--- a/VitalSync_AI_Presentation.pptx
+++ b/VitalSync_AI_Presentation.pptx
@@ -15,8 +15,6 @@
     <p:sldId id="263" r:id="rId15"/>
     <p:sldId id="264" r:id="rId16"/>
     <p:sldId id="265" r:id="rId17"/>
-    <p:sldId id="266" r:id="rId18"/>
-    <p:sldId id="267" r:id="rId19"/>
   </p:sldIdLst>
   <p:sldSz cx="12191695" cy="6858000" type="screen4x3"/>
   <p:notesSz cx="6858000" cy="9144000"/>
@@ -513,7 +511,7 @@
           <a:lstStyle/>
           <a:p>
             <a:r>
-              <a:t>Good morning/afternoon everyone. My name is Mohammed Salman Hussain, and I am excited to present VitalSync AI, a project built under the IBM SkillsBuild Masterclass 5 curriculum in direct alignment with UN Sustainable Development Goal 3. VitalSync AI is an offline, local-first preventive health platform that eliminates health anxiety by combining peer-reviewed biophysics, machine learning calibrated on over 500,000 CDC records, and local GPU LLM synthesis with zero cloud telemetry.</a:t>
+              <a:t>Good morning/afternoon everyone. My name is Mohammed Salman Hussain, and I am presenting VitalSync AI, created under IBM SkillsBuild Masterclass 5 in direct alignment with UN Sustainable Development Goal 3 (Target 3.4). VitalSync AI is an offline, local-first preventive health platform that eliminates health anxiety by combining peer-reviewed biophysics, machine learning calibrated on over 500,000 CDC records, and local GPU LLM synthesis with zero cloud telemetry. Everything you see today is production-ready, locally test-verified, and completely open source.</a:t>
             </a:r>
           </a:p>
         </p:txBody>
@@ -583,147 +581,7 @@
           <a:lstStyle/>
           <a:p>
             <a:r>
-              <a:t>Here is our Lean Canvas summary. We operate an Open-Core model: the code is open-source for developers, while we monetize everyday consumers with a $29 packaged desktop application and license a $49-per-month B2B dashboard to preventive wellness clinics. Because our cloud infrastructure cost is virtually zero, our unit economics are exceptionally strong.</a:t>
-            </a:r>
-          </a:p>
-        </p:txBody>
-      </p:sp>
-      <p:sp>
-        <p:nvSpPr>
-          <p:cNvPr id="4" name="Slide Number Placeholder 3"/>
-          <p:cNvSpPr>
-            <a:spLocks noGrp="1"/>
-          </p:cNvSpPr>
-          <p:nvPr>
-            <p:ph type="sldNum" idx="5" sz="quarter"/>
-          </p:nvPr>
-        </p:nvSpPr>
-        <p:spPr/>
-      </p:sp>
-    </p:spTree>
-  </p:cSld>
-  <p:clrMapOvr>
-    <a:masterClrMapping/>
-  </p:clrMapOvr>
-</p:notes>
-</file>
-
-<file path=ppt/notesSlides/notesSlide11.xml><?xml version="1.0" encoding="utf-8"?>
-<p:notes xmlns:a="http://schemas.openxmlformats.org/drawingml/2006/main" xmlns:p="http://schemas.openxmlformats.org/presentationml/2006/main" xmlns:r="http://schemas.openxmlformats.org/officeDocument/2006/relationships">
-  <p:cSld>
-    <p:spTree>
-      <p:nvGrpSpPr>
-        <p:cNvPr id="1" name=""/>
-        <p:cNvGrpSpPr/>
-        <p:nvPr/>
-      </p:nvGrpSpPr>
-      <p:grpSpPr>
-        <a:xfrm>
-          <a:off x="0" y="0"/>
-          <a:ext cx="0" cy="0"/>
-          <a:chOff x="0" y="0"/>
-          <a:chExt cx="0" cy="0"/>
-        </a:xfrm>
-      </p:grpSpPr>
-      <p:sp>
-        <p:nvSpPr>
-          <p:cNvPr id="2" name="Slide Image Placeholder 1"/>
-          <p:cNvSpPr>
-            <a:spLocks noGrp="1"/>
-          </p:cNvSpPr>
-          <p:nvPr>
-            <p:ph type="sldImg" idx="2"/>
-          </p:nvPr>
-        </p:nvSpPr>
-        <p:spPr/>
-      </p:sp>
-      <p:sp>
-        <p:nvSpPr>
-          <p:cNvPr id="3" name="Notes Placeholder 2"/>
-          <p:cNvSpPr>
-            <a:spLocks noGrp="1"/>
-          </p:cNvSpPr>
-          <p:nvPr>
-            <p:ph type="body" idx="3" sz="quarter"/>
-          </p:nvPr>
-        </p:nvSpPr>
-        <p:spPr/>
-        <p:txBody>
-          <a:bodyPr/>
-          <a:lstStyle/>
-          <a:p>
-            <a:r>
-              <a:t>VitalSync AI directly contributes to UN SDG 3, Target 3.4. By screening for early cardiovascular and metabolic risks, mitigating digital burnout, providing free access without paywalls, and equipping doctors with standardized 1-page summaries, we make preventive wellness actionable, equitable, and effective.</a:t>
-            </a:r>
-          </a:p>
-        </p:txBody>
-      </p:sp>
-      <p:sp>
-        <p:nvSpPr>
-          <p:cNvPr id="4" name="Slide Number Placeholder 3"/>
-          <p:cNvSpPr>
-            <a:spLocks noGrp="1"/>
-          </p:cNvSpPr>
-          <p:nvPr>
-            <p:ph type="sldNum" idx="5" sz="quarter"/>
-          </p:nvPr>
-        </p:nvSpPr>
-        <p:spPr/>
-      </p:sp>
-    </p:spTree>
-  </p:cSld>
-  <p:clrMapOvr>
-    <a:masterClrMapping/>
-  </p:clrMapOvr>
-</p:notes>
-</file>
-
-<file path=ppt/notesSlides/notesSlide12.xml><?xml version="1.0" encoding="utf-8"?>
-<p:notes xmlns:a="http://schemas.openxmlformats.org/drawingml/2006/main" xmlns:p="http://schemas.openxmlformats.org/presentationml/2006/main" xmlns:r="http://schemas.openxmlformats.org/officeDocument/2006/relationships">
-  <p:cSld>
-    <p:spTree>
-      <p:nvGrpSpPr>
-        <p:cNvPr id="1" name=""/>
-        <p:cNvGrpSpPr/>
-        <p:nvPr/>
-      </p:nvGrpSpPr>
-      <p:grpSpPr>
-        <a:xfrm>
-          <a:off x="0" y="0"/>
-          <a:ext cx="0" cy="0"/>
-          <a:chOff x="0" y="0"/>
-          <a:chExt cx="0" cy="0"/>
-        </a:xfrm>
-      </p:grpSpPr>
-      <p:sp>
-        <p:nvSpPr>
-          <p:cNvPr id="2" name="Slide Image Placeholder 1"/>
-          <p:cNvSpPr>
-            <a:spLocks noGrp="1"/>
-          </p:cNvSpPr>
-          <p:nvPr>
-            <p:ph type="sldImg" idx="2"/>
-          </p:nvPr>
-        </p:nvSpPr>
-        <p:spPr/>
-      </p:sp>
-      <p:sp>
-        <p:nvSpPr>
-          <p:cNvPr id="3" name="Notes Placeholder 2"/>
-          <p:cNvSpPr>
-            <a:spLocks noGrp="1"/>
-          </p:cNvSpPr>
-          <p:nvPr>
-            <p:ph type="body" idx="3" sz="quarter"/>
-          </p:nvPr>
-        </p:nvSpPr>
-        <p:spPr/>
-        <p:txBody>
-          <a:bodyPr/>
-          <a:lstStyle/>
-          <a:p>
-            <a:r>
-              <a:t>In conclusion, VitalSync AI is not a concept or a toy prototype. It is a production-ready, fully tested health intelligence platform with 24 passing automated tests, sub-30ms response times, and 5 trained machine learning models. It eliminates health anxiety, guarantees user privacy, and advances UN Sustainable Development Goal 3. Everything is open-source and live on GitHub. Thank you very much, and I welcome your questions.</a:t>
+              <a:t>In conclusion, VitalSync AI directly fulfills the requirements of IBM SkillsBuild Masterclass 5 and UN SDG 3, Target 3.4. Our business model relies on an open-core structure with unbeatable unit economics because inference runs 100% locally on user hardware. We have delivered a production REST API, dual web interfaces, 5 calibrated machine learning models, 24 passing unit tests, and a combined Lean Canvas and Concept Note PDF. The entire project is live on GitHub. Thank you very much, and I welcome your questions.</a:t>
             </a:r>
           </a:p>
         </p:txBody>
@@ -793,7 +651,7 @@
           <a:lstStyle/>
           <a:p>
             <a:r>
-              <a:t>We have all been there: it is 1:00 AM, you feel an eyelid twitch after an espresso, you Google it, and within five minutes you are reading about motor neuron disease. That is cyberchondria. Commercial search engines monetize fear. Meanwhile, we spend hours doomscrolling before bed, suppressing melatonin, while commercial apps monetize our sensitive biometrics. When users ask cloud chatbots for help, they get ungrounded, hallucinated numbers. We need a private, grounded solution.</a:t>
+              <a:t>We have all been there: it is 1:00 AM, you feel an eyelid twitch after an espresso, you Google it, and within five minutes you are convinced you have a motor neuron disease. That is cyberchondria. Commercial search engines monetize fear. Meanwhile, we spend hours doomscrolling before bed, suppressing melatonin, while commercial apps monetize our sensitive biometrics. When users ask cloud chatbots for help, they get ungrounded, hallucinated numbers. We need a private, grounded solution.</a:t>
             </a:r>
           </a:p>
         </p:txBody>
@@ -933,7 +791,7 @@
           <a:lstStyle/>
           <a:p>
             <a:r>
-              <a:t>VitalSync AI is built on four core pillars: zero hallucination, anti-cyberchondria demystification, 100% offline privacy, and strict clinical safety guardrails. When your scale jumps 1.5 kg overnight, VitalSync AI does not tell you that you gained fat—it calculates the exact glycogen-water mass balance, proving it is harmless water retention. And every single calculation runs privately on your own GPU.</a:t>
+              <a:t>Here is our system architecture. The key architectural breakthrough is our Homogeneous Single-Payload Pipeline. One single Pydantic schema flows from input to biophysics math, machine learning inference, clinical safety triage, and local LLM synthesis. The local Qwen LLM is strictly an empathetic translator of locked, pre-computed truth. Because the numbers are pre-calculated by Python, the AI cannot hallucinate.</a:t>
             </a:r>
           </a:p>
         </p:txBody>
@@ -1003,7 +861,7 @@
           <a:lstStyle/>
           <a:p>
             <a:r>
-              <a:t>Here is the architecture of our pipeline. The entire system is homogeneous: one single data schema flows from intake to math, machine learning, clinical triage, and LLM synthesis. The key insight is that our local Qwen LLM is strictly an interpreter of pre-computed, locked truth. It is physically impossible for the AI to hallucinate numbers because the math has already been verified.</a:t>
+              <a:t>This slide shows our live production dashboard running on localhost. On the left is the glassmorphic dashboard showing the live clinical triage banner and the five calibrated risk dials for cardiovascular risk, pre-diabetes, sleep latency, and burnout. On the right is our dynamic nutrition engine with macro partitioning based on the user's lean mass and activity levels. The entire interface communicates with our FastAPI backend with a sub-30ms roundtrip.</a:t>
             </a:r>
           </a:p>
         </p:txBody>
@@ -1073,7 +931,7 @@
           <a:lstStyle/>
           <a:p>
             <a:r>
-              <a:t>VitalSync AI is live and fully working today. On the left is our glassmorphic dashboard showing the five calibrated risk dials and live triage banner. On the right is our 24-hour pharmacokinetic caffeine curve, modeling active stimulant decay and warning users when caffeine at bedtime exceeds 25 mg. We also feature an interactive What-If simulator, an 'Am I Okay?' de-escalation module, and a 1-page standardized doctor briefing.</a:t>
+              <a:t>Here is our circadian sleep and caffeine engine. Caffeine has an average elimination half-life of 5.5 hours. If you drink 200 mg of caffeine at 4:00 PM, you still have nearly 100 mg active in your bloodstream at 10:00 PM. Our Canvas-rendered elimination curve maps exact stimulant clearance and alerts users if bedtime caffeine exceeds 25 mg. Crucially, it explains post-coffee heart flutters as harmless adenosine blockade, preventing late-night cardiac panic.</a:t>
             </a:r>
           </a:p>
         </p:txBody>
@@ -1143,7 +1001,7 @@
           <a:lstStyle/>
           <a:p>
             <a:r>
-              <a:t>To adhere strictly to our zero-hallucination directive, our models are trained on authentic, peer-reviewed public health datasets. Over 500,000 real-world records power these ensembles. Our cardiovascular model achieves an ROC-AUC of 0.817, our pre-diabetes screener reaches 0.819 without invasive blood draws, and our sleep pathology classifier reaches an F1-score of 0.893.</a:t>
+              <a:t>On Slide 7, we showcase two of our most powerful interactive features. On the left is our counterfactual What-If simulator. Users can adjust sliders—such as reducing bedtime screen time by 45 minutes or adding 3,000 steps—and immediately see how their projected sleep latency drops by 18 minutes and their 10-year cardio risk improves. On the right is our functional micronutrient knowledge matrix, mapping subjective symptoms like eyelid twitches or cramps directly to biochemical cofactors.</a:t>
             </a:r>
           </a:p>
         </p:txBody>
@@ -1213,7 +1071,7 @@
           <a:lstStyle/>
           <a:p>
             <a:r>
-              <a:t>Clinical safety is our highest priority. We enforce an automated Three-Tier Clinical Triage Engine. Level 1 covers routine lifestyle optimization. Level 2 catches persistent anomalies like Stage 2 hypertension or suspected sleep apnea, prompting a doctor checkup. And Level 3 is a hard emergency override: if resting BP is 185 over 125 or cardiac red flags occur, all lifestyle tips are suppressed and the user is directed to call 911 or go to the nearest emergency room.</a:t>
+              <a:t>Slide 8 demonstrates our commitment to patient well-being and clinical safety. On the left is our 'Am I Okay?' 60-second de-escalation tool. When someone sees a 1.5 kg scale jump overnight, we explain the biophysical glycogen-water mass balance—proving it is water retention, not fat gain. On the right is our 1-page standardized Doctor Visit Briefing. And underneath it all is our strict 3-tier clinical triage engine: if blood pressure is in hypertensive crisis or red flags occur, the entire app locks out lifestyle advice and directs the user to dial 911.</a:t>
             </a:r>
           </a:p>
         </p:txBody>
@@ -1283,7 +1141,7 @@
           <a:lstStyle/>
           <a:p>
             <a:r>
-              <a:t>Privacy is the cornerstone of VitalSync AI. Cloud health apps expect you to upload your intimate health data to their servers. VitalSync AI runs 100% offline. Local Python handles the math and ML, and local Ollama runs Qwen on your GPU. Because inference happens on the user's machine, our marginal cost per query is zero dollars. This provides complete privacy and an unbeatable economic advantage over cloud AI competitors.</a:t>
+              <a:t>Zero hallucination requires genuine scientific rigor. VitalSync AI deploys 5 supervised machine learning models trained on over 500,000 authentic records from the CDC and clinical polysomnography studies. Our cardiovascular model achieves an ROC-AUC of 0.817; our pre-diabetes screener achieves an ROC-AUC of 0.819 without invasive blood tests; and our sleep latency model achieves an RMSE of 6.84 minutes. All 24 automated unit tests pass in 3.25 seconds.</a:t>
             </a:r>
           </a:p>
         </p:txBody>
@@ -4285,7 +4143,7 @@
     <p:bg>
       <p:bgPr>
         <a:solidFill>
-          <a:srgbClr val="0F172A"/>
+          <a:srgbClr val="0A101D"/>
         </a:solidFill>
         <a:effectLst/>
       </p:bgPr>
@@ -4305,16 +4163,16 @@
         </p:nvSpPr>
         <p:spPr>
           <a:xfrm>
-            <a:off x="731520" y="731520"/>
-            <a:ext cx="5943600" cy="411480"/>
+            <a:off x="731520" y="685800"/>
+            <a:ext cx="6217920" cy="384048"/>
           </a:xfrm>
           <a:prstGeom prst="roundRect">
             <a:avLst/>
           </a:prstGeom>
           <a:solidFill>
-            <a:srgbClr val="1E293B"/>
+            <a:srgbClr val="131C31"/>
           </a:solidFill>
-          <a:ln>
+          <a:ln w="15240">
             <a:solidFill>
               <a:srgbClr val="38BDF8"/>
             </a:solidFill>
@@ -4359,8 +4217,8 @@
         </p:nvSpPr>
         <p:spPr>
           <a:xfrm>
-            <a:off x="731520" y="1371600"/>
-            <a:ext cx="10515600" cy="1828800"/>
+            <a:off x="731520" y="1280160"/>
+            <a:ext cx="10698480" cy="1920240"/>
           </a:xfrm>
           <a:prstGeom prst="rect">
             <a:avLst/>
@@ -4374,7 +4232,7 @@
           <a:lstStyle/>
           <a:p>
             <a:pPr>
-              <a:defRPr sz="4600" b="1">
+              <a:defRPr sz="4400" b="1">
                 <a:solidFill>
                   <a:srgbClr val="F8FAFC"/>
                 </a:solidFill>
@@ -4382,6 +4240,21 @@
             </a:pPr>
             <a:r>
               <a:t>VitalSync AI</a:t>
+            </a:r>
+          </a:p>
+          <a:p>
+            <a:pPr>
+              <a:spcBef>
+                <a:spcPts val="600"/>
+              </a:spcBef>
+              <a:defRPr sz="1700">
+                <a:solidFill>
+                  <a:srgbClr val="38BDF8"/>
+                </a:solidFill>
+              </a:defRPr>
+            </a:pPr>
+            <a:r>
+              <a:t>A Homogeneous, Scientifically Grounded, Local-First Health &amp; Circadian Intelligence Engine</a:t>
             </a:r>
           </a:p>
           <a:p>
@@ -4389,14 +4262,14 @@
               <a:spcBef>
                 <a:spcPts val="800"/>
               </a:spcBef>
-              <a:defRPr sz="1800">
-                <a:solidFill>
-                  <a:srgbClr val="38BDF8"/>
-                </a:solidFill>
-              </a:defRPr>
-            </a:pPr>
-            <a:r>
-              <a:t>A Homogeneous, Scientifically Grounded, Local-First Health &amp; Circadian Intelligence Engine</a:t>
+              <a:defRPr sz="1200">
+                <a:solidFill>
+                  <a:srgbClr val="94A3B8"/>
+                </a:solidFill>
+              </a:defRPr>
+            </a:pPr>
+            <a:r>
+              <a:t>Eliminating cyberchondria through peer-reviewed biophysics, 5 ML models trained on 500,000+ CDC records, and local GPU LLM synthesis with zero cloud telemetry.</a:t>
             </a:r>
           </a:p>
         </p:txBody>
@@ -4409,18 +4282,18 @@
         </p:nvSpPr>
         <p:spPr>
           <a:xfrm>
-            <a:off x="731520" y="3474720"/>
-            <a:ext cx="2468880" cy="2377440"/>
+            <a:off x="731520" y="3566160"/>
+            <a:ext cx="2514600" cy="2331720"/>
           </a:xfrm>
           <a:prstGeom prst="roundRect">
             <a:avLst/>
           </a:prstGeom>
           <a:solidFill>
-            <a:srgbClr val="1E293B"/>
+            <a:srgbClr val="131C31"/>
           </a:solidFill>
-          <a:ln w="12700">
+          <a:ln w="15240">
             <a:solidFill>
-              <a:srgbClr val="334155"/>
+              <a:srgbClr val="243352"/>
             </a:solidFill>
           </a:ln>
         </p:spPr>
@@ -4439,14 +4312,14 @@
           </a:fontRef>
         </p:style>
         <p:txBody>
-          <a:bodyPr rtlCol="0" anchor="ctr" wrap="square" lIns="182880" rIns="182880" tIns="182880" bIns="182880"/>
+          <a:bodyPr rtlCol="0" anchor="ctr" wrap="square" lIns="164592" rIns="164592" tIns="146304" bIns="146304"/>
           <a:lstStyle/>
           <a:p>
             <a:pPr algn="ctr">
               <a:spcAft>
-                <a:spcPts val="800"/>
-              </a:spcAft>
-              <a:defRPr sz="1400" b="1">
+                <a:spcPts val="600"/>
+              </a:spcAft>
+              <a:defRPr sz="1300" b="1">
                 <a:solidFill>
                   <a:srgbClr val="38BDF8"/>
                 </a:solidFill>
@@ -4459,9 +4332,9 @@
           <a:p>
             <a:pPr>
               <a:spcAft>
-                <a:spcPts val="400"/>
-              </a:spcAft>
-              <a:defRPr sz="1100">
+                <a:spcPts val="300"/>
+              </a:spcAft>
+              <a:defRPr sz="1050">
                 <a:solidFill>
                   <a:srgbClr val="F8FAFC"/>
                 </a:solidFill>
@@ -4474,9 +4347,9 @@
           <a:p>
             <a:pPr>
               <a:spcAft>
-                <a:spcPts val="400"/>
-              </a:spcAft>
-              <a:defRPr sz="1100">
+                <a:spcPts val="300"/>
+              </a:spcAft>
+              <a:defRPr sz="1050">
                 <a:solidFill>
                   <a:srgbClr val="F8FAFC"/>
                 </a:solidFill>
@@ -4489,31 +4362,31 @@
           <a:p>
             <a:pPr>
               <a:spcAft>
-                <a:spcPts val="400"/>
-              </a:spcAft>
-              <a:defRPr sz="1100">
-                <a:solidFill>
-                  <a:srgbClr val="F8FAFC"/>
-                </a:solidFill>
-              </a:defRPr>
-            </a:pPr>
-            <a:r>
-              <a:t>• Complete HIPAA &amp; GDPR privacy guarantee</a:t>
-            </a:r>
-          </a:p>
-          <a:p>
-            <a:pPr>
-              <a:spcAft>
-                <a:spcPts val="400"/>
-              </a:spcAft>
-              <a:defRPr sz="1100">
-                <a:solidFill>
-                  <a:srgbClr val="F8FAFC"/>
-                </a:solidFill>
-              </a:defRPr>
-            </a:pPr>
-            <a:r>
-              <a:t>• Zero recurring API costs</a:t>
+                <a:spcPts val="300"/>
+              </a:spcAft>
+              <a:defRPr sz="1050">
+                <a:solidFill>
+                  <a:srgbClr val="F8FAFC"/>
+                </a:solidFill>
+              </a:defRPr>
+            </a:pPr>
+            <a:r>
+              <a:t>• Complete HIPAA &amp; GDPR privacy</a:t>
+            </a:r>
+          </a:p>
+          <a:p>
+            <a:pPr>
+              <a:spcAft>
+                <a:spcPts val="300"/>
+              </a:spcAft>
+              <a:defRPr sz="1050">
+                <a:solidFill>
+                  <a:srgbClr val="F8FAFC"/>
+                </a:solidFill>
+              </a:defRPr>
+            </a:pPr>
+            <a:r>
+              <a:t>• $0 marginal API query cost</a:t>
             </a:r>
           </a:p>
         </p:txBody>
@@ -4526,18 +4399,18 @@
         </p:nvSpPr>
         <p:spPr>
           <a:xfrm>
-            <a:off x="3474720" y="3474720"/>
-            <a:ext cx="2468880" cy="2377440"/>
+            <a:off x="3456432" y="3566160"/>
+            <a:ext cx="2514600" cy="2331720"/>
           </a:xfrm>
           <a:prstGeom prst="roundRect">
             <a:avLst/>
           </a:prstGeom>
           <a:solidFill>
-            <a:srgbClr val="1E293B"/>
+            <a:srgbClr val="131C31"/>
           </a:solidFill>
-          <a:ln w="12700">
+          <a:ln w="15240">
             <a:solidFill>
-              <a:srgbClr val="334155"/>
+              <a:srgbClr val="243352"/>
             </a:solidFill>
           </a:ln>
         </p:spPr>
@@ -4556,14 +4429,14 @@
           </a:fontRef>
         </p:style>
         <p:txBody>
-          <a:bodyPr rtlCol="0" anchor="ctr" wrap="square" lIns="182880" rIns="182880" tIns="182880" bIns="182880"/>
+          <a:bodyPr rtlCol="0" anchor="ctr" wrap="square" lIns="164592" rIns="164592" tIns="146304" bIns="146304"/>
           <a:lstStyle/>
           <a:p>
             <a:pPr algn="ctr">
               <a:spcAft>
-                <a:spcPts val="800"/>
-              </a:spcAft>
-              <a:defRPr sz="1400" b="1">
+                <a:spcPts val="600"/>
+              </a:spcAft>
+              <a:defRPr sz="1300" b="1">
                 <a:solidFill>
                   <a:srgbClr val="10B981"/>
                 </a:solidFill>
@@ -4576,24 +4449,24 @@
           <a:p>
             <a:pPr>
               <a:spcAft>
-                <a:spcPts val="400"/>
-              </a:spcAft>
-              <a:defRPr sz="1100">
-                <a:solidFill>
-                  <a:srgbClr val="F8FAFC"/>
-                </a:solidFill>
-              </a:defRPr>
-            </a:pPr>
-            <a:r>
-              <a:t>• Trained on 500,000+ CDC records</a:t>
-            </a:r>
-          </a:p>
-          <a:p>
-            <a:pPr>
-              <a:spcAft>
-                <a:spcPts val="400"/>
-              </a:spcAft>
-              <a:defRPr sz="1100">
+                <a:spcPts val="300"/>
+              </a:spcAft>
+              <a:defRPr sz="1050">
+                <a:solidFill>
+                  <a:srgbClr val="F8FAFC"/>
+                </a:solidFill>
+              </a:defRPr>
+            </a:pPr>
+            <a:r>
+              <a:t>• Trained on 500k+ CDC records</a:t>
+            </a:r>
+          </a:p>
+          <a:p>
+            <a:pPr>
+              <a:spcAft>
+                <a:spcPts val="300"/>
+              </a:spcAft>
+              <a:defRPr sz="1050">
                 <a:solidFill>
                   <a:srgbClr val="F8FAFC"/>
                 </a:solidFill>
@@ -4606,24 +4479,24 @@
           <a:p>
             <a:pPr>
               <a:spcAft>
-                <a:spcPts val="400"/>
-              </a:spcAft>
-              <a:defRPr sz="1100">
-                <a:solidFill>
-                  <a:srgbClr val="F8FAFC"/>
-                </a:solidFill>
-              </a:defRPr>
-            </a:pPr>
-            <a:r>
-              <a:t>• Pre-Diabetes Screener (AUC: 0.819)</a:t>
-            </a:r>
-          </a:p>
-          <a:p>
-            <a:pPr>
-              <a:spcAft>
-                <a:spcPts val="400"/>
-              </a:spcAft>
-              <a:defRPr sz="1100">
+                <a:spcPts val="300"/>
+              </a:spcAft>
+              <a:defRPr sz="1050">
+                <a:solidFill>
+                  <a:srgbClr val="F8FAFC"/>
+                </a:solidFill>
+              </a:defRPr>
+            </a:pPr>
+            <a:r>
+              <a:t>• Pre-Diabetes (ROC-AUC: 0.819)</a:t>
+            </a:r>
+          </a:p>
+          <a:p>
+            <a:pPr>
+              <a:spcAft>
+                <a:spcPts val="300"/>
+              </a:spcAft>
+              <a:defRPr sz="1050">
                 <a:solidFill>
                   <a:srgbClr val="F8FAFC"/>
                 </a:solidFill>
@@ -4643,18 +4516,18 @@
         </p:nvSpPr>
         <p:spPr>
           <a:xfrm>
-            <a:off x="6217920" y="3474720"/>
-            <a:ext cx="2468880" cy="2377440"/>
+            <a:off x="6181344" y="3566160"/>
+            <a:ext cx="2514600" cy="2331720"/>
           </a:xfrm>
           <a:prstGeom prst="roundRect">
             <a:avLst/>
           </a:prstGeom>
           <a:solidFill>
-            <a:srgbClr val="1E293B"/>
+            <a:srgbClr val="131C31"/>
           </a:solidFill>
-          <a:ln w="12700">
+          <a:ln w="15240">
             <a:solidFill>
-              <a:srgbClr val="334155"/>
+              <a:srgbClr val="243352"/>
             </a:solidFill>
           </a:ln>
         </p:spPr>
@@ -4673,14 +4546,14 @@
           </a:fontRef>
         </p:style>
         <p:txBody>
-          <a:bodyPr rtlCol="0" anchor="ctr" wrap="square" lIns="182880" rIns="182880" tIns="182880" bIns="182880"/>
+          <a:bodyPr rtlCol="0" anchor="ctr" wrap="square" lIns="164592" rIns="164592" tIns="146304" bIns="146304"/>
           <a:lstStyle/>
           <a:p>
             <a:pPr algn="ctr">
               <a:spcAft>
-                <a:spcPts val="800"/>
-              </a:spcAft>
-              <a:defRPr sz="1400" b="1">
+                <a:spcPts val="600"/>
+              </a:spcAft>
+              <a:defRPr sz="1300" b="1">
                 <a:solidFill>
                   <a:srgbClr val="F59E0B"/>
                 </a:solidFill>
@@ -4693,9 +4566,9 @@
           <a:p>
             <a:pPr>
               <a:spcAft>
-                <a:spcPts val="400"/>
-              </a:spcAft>
-              <a:defRPr sz="1100">
+                <a:spcPts val="300"/>
+              </a:spcAft>
+              <a:defRPr sz="1050">
                 <a:solidFill>
                   <a:srgbClr val="F8FAFC"/>
                 </a:solidFill>
@@ -4708,9 +4581,9 @@
           <a:p>
             <a:pPr>
               <a:spcAft>
-                <a:spcPts val="400"/>
-              </a:spcAft>
-              <a:defRPr sz="1100">
+                <a:spcPts val="300"/>
+              </a:spcAft>
+              <a:defRPr sz="1050">
                 <a:solidFill>
                   <a:srgbClr val="F8FAFC"/>
                 </a:solidFill>
@@ -4723,24 +4596,24 @@
           <a:p>
             <a:pPr>
               <a:spcAft>
-                <a:spcPts val="400"/>
-              </a:spcAft>
-              <a:defRPr sz="1100">
-                <a:solidFill>
-                  <a:srgbClr val="F8FAFC"/>
-                </a:solidFill>
-              </a:defRPr>
-            </a:pPr>
-            <a:r>
-              <a:t>• Glycogen-water scale mass balance</a:t>
-            </a:r>
-          </a:p>
-          <a:p>
-            <a:pPr>
-              <a:spcAft>
-                <a:spcPts val="400"/>
-              </a:spcAft>
-              <a:defRPr sz="1100">
+                <a:spcPts val="300"/>
+              </a:spcAft>
+              <a:defRPr sz="1050">
+                <a:solidFill>
+                  <a:srgbClr val="F8FAFC"/>
+                </a:solidFill>
+              </a:defRPr>
+            </a:pPr>
+            <a:r>
+              <a:t>• Glycogen-water mass balance</a:t>
+            </a:r>
+          </a:p>
+          <a:p>
+            <a:pPr>
+              <a:spcAft>
+                <a:spcPts val="300"/>
+              </a:spcAft>
+              <a:defRPr sz="1050">
                 <a:solidFill>
                   <a:srgbClr val="F8FAFC"/>
                 </a:solidFill>
@@ -4760,18 +4633,18 @@
         </p:nvSpPr>
         <p:spPr>
           <a:xfrm>
-            <a:off x="8961120" y="3474720"/>
-            <a:ext cx="2468880" cy="2377440"/>
+            <a:off x="8906256" y="3566160"/>
+            <a:ext cx="2514600" cy="2331720"/>
           </a:xfrm>
           <a:prstGeom prst="roundRect">
             <a:avLst/>
           </a:prstGeom>
           <a:solidFill>
-            <a:srgbClr val="1E293B"/>
+            <a:srgbClr val="131C31"/>
           </a:solidFill>
-          <a:ln w="12700">
+          <a:ln w="15240">
             <a:solidFill>
-              <a:srgbClr val="334155"/>
+              <a:srgbClr val="243352"/>
             </a:solidFill>
           </a:ln>
         </p:spPr>
@@ -4790,44 +4663,44 @@
           </a:fontRef>
         </p:style>
         <p:txBody>
-          <a:bodyPr rtlCol="0" anchor="ctr" wrap="square" lIns="182880" rIns="182880" tIns="182880" bIns="182880"/>
+          <a:bodyPr rtlCol="0" anchor="ctr" wrap="square" lIns="164592" rIns="164592" tIns="146304" bIns="146304"/>
           <a:lstStyle/>
           <a:p>
             <a:pPr algn="ctr">
               <a:spcAft>
-                <a:spcPts val="800"/>
-              </a:spcAft>
-              <a:defRPr sz="1400" b="1">
+                <a:spcPts val="600"/>
+              </a:spcAft>
+              <a:defRPr sz="1300" b="1">
                 <a:solidFill>
                   <a:srgbClr val="A855F7"/>
                 </a:solidFill>
               </a:defRPr>
             </a:pPr>
             <a:r>
-              <a:t>Clinical Guardrails</a:t>
-            </a:r>
-          </a:p>
-          <a:p>
-            <a:pPr>
-              <a:spcAft>
-                <a:spcPts val="400"/>
-              </a:spcAft>
-              <a:defRPr sz="1100">
-                <a:solidFill>
-                  <a:srgbClr val="F8FAFC"/>
-                </a:solidFill>
-              </a:defRPr>
-            </a:pPr>
-            <a:r>
-              <a:t>• Deterministic 3-tier safety triage</a:t>
-            </a:r>
-          </a:p>
-          <a:p>
-            <a:pPr>
-              <a:spcAft>
-                <a:spcPts val="400"/>
-              </a:spcAft>
-              <a:defRPr sz="1100">
+              <a:t>Clinical Safety</a:t>
+            </a:r>
+          </a:p>
+          <a:p>
+            <a:pPr>
+              <a:spcAft>
+                <a:spcPts val="300"/>
+              </a:spcAft>
+              <a:defRPr sz="1050">
+                <a:solidFill>
+                  <a:srgbClr val="F8FAFC"/>
+                </a:solidFill>
+              </a:defRPr>
+            </a:pPr>
+            <a:r>
+              <a:t>• Deterministic 3-tier triage engine</a:t>
+            </a:r>
+          </a:p>
+          <a:p>
+            <a:pPr>
+              <a:spcAft>
+                <a:spcPts val="300"/>
+              </a:spcAft>
+              <a:defRPr sz="1050">
                 <a:solidFill>
                   <a:srgbClr val="F8FAFC"/>
                 </a:solidFill>
@@ -4840,9 +4713,9 @@
           <a:p>
             <a:pPr>
               <a:spcAft>
-                <a:spcPts val="400"/>
-              </a:spcAft>
-              <a:defRPr sz="1100">
+                <a:spcPts val="300"/>
+              </a:spcAft>
+              <a:defRPr sz="1050">
                 <a:solidFill>
                   <a:srgbClr val="F8FAFC"/>
                 </a:solidFill>
@@ -4855,9 +4728,9 @@
           <a:p>
             <a:pPr>
               <a:spcAft>
-                <a:spcPts val="400"/>
-              </a:spcAft>
-              <a:defRPr sz="1100">
+                <a:spcPts val="300"/>
+              </a:spcAft>
+              <a:defRPr sz="1050">
                 <a:solidFill>
                   <a:srgbClr val="F8FAFC"/>
                 </a:solidFill>
@@ -4877,8 +4750,8 @@
         </p:nvSpPr>
         <p:spPr>
           <a:xfrm>
-            <a:off x="731520" y="6035040"/>
-            <a:ext cx="10515600" cy="365760"/>
+            <a:off x="731520" y="6126480"/>
+            <a:ext cx="10698480" cy="365760"/>
           </a:xfrm>
           <a:prstGeom prst="rect">
             <a:avLst/>
@@ -4892,14 +4765,14 @@
           <a:lstStyle/>
           <a:p>
             <a:pPr>
-              <a:defRPr sz="1100">
+              <a:defRPr sz="1050">
                 <a:solidFill>
                   <a:srgbClr val="94A3B8"/>
                 </a:solidFill>
               </a:defRPr>
             </a:pPr>
             <a:r>
-              <a:t>Project Lead: Mohammed Salman Hussain  •  GitHub: github.com/Mohammed-Salman-Hussain/VitalSync-AI</a:t>
+              <a:t>Project Lead: Mohammed Salman Hussain  •  GitHub: github.com/Mohammed-Salman-Hussain/VitalSync-AI  •  Email: salmanhussain1199@gmail.com</a:t>
             </a:r>
           </a:p>
         </p:txBody>
@@ -4918,7 +4791,7 @@
     <p:bg>
       <p:bgPr>
         <a:solidFill>
-          <a:srgbClr val="0F172A"/>
+          <a:srgbClr val="0A101D"/>
         </a:solidFill>
         <a:effectLst/>
       </p:bgPr>
@@ -4938,8 +4811,8 @@
         </p:nvSpPr>
         <p:spPr>
           <a:xfrm>
-            <a:off x="731520" y="365760"/>
-            <a:ext cx="10515600" cy="365760"/>
+            <a:off x="731520" y="320040"/>
+            <a:ext cx="10698480" cy="320040"/>
           </a:xfrm>
           <a:prstGeom prst="rect">
             <a:avLst/>
@@ -4960,7 +4833,7 @@
               </a:defRPr>
             </a:pPr>
             <a:r>
-              <a:t>IBM SKILLSBUILD MASTERCLASS 5 • UN SDG 3 (TARGET 3.4)</a:t>
+              <a:t>BUSINESS MODEL, IMPACT &amp; ROADMAP</a:t>
             </a:r>
           </a:p>
         </p:txBody>
@@ -4973,8 +4846,8 @@
         </p:nvSpPr>
         <p:spPr>
           <a:xfrm>
-            <a:off x="731520" y="640080"/>
-            <a:ext cx="10515600" cy="640080"/>
+            <a:off x="731520" y="594360"/>
+            <a:ext cx="10698480" cy="640080"/>
           </a:xfrm>
           <a:prstGeom prst="rect">
             <a:avLst/>
@@ -4988,14 +4861,14 @@
           <a:lstStyle/>
           <a:p>
             <a:pPr>
-              <a:defRPr sz="2400" b="1">
-                <a:solidFill>
-                  <a:srgbClr val="F8FAFC"/>
-                </a:solidFill>
-              </a:defRPr>
-            </a:pPr>
-            <a:r>
-              <a:t>Business Model &amp; The Lean Canvas at a Glance</a:t>
+              <a:defRPr sz="2200" b="1">
+                <a:solidFill>
+                  <a:srgbClr val="F8FAFC"/>
+                </a:solidFill>
+              </a:defRPr>
+            </a:pPr>
+            <a:r>
+              <a:t>Lean Canvas Overview, UN SDG 3 (Target 3.4) &amp; Next Horizons</a:t>
             </a:r>
           </a:p>
         </p:txBody>
@@ -5008,18 +4881,18 @@
         </p:nvSpPr>
         <p:spPr>
           <a:xfrm>
-            <a:off x="731520" y="1645920"/>
-            <a:ext cx="3291840" cy="4572000"/>
+            <a:off x="731520" y="1463040"/>
+            <a:ext cx="3328416" cy="4663440"/>
           </a:xfrm>
           <a:prstGeom prst="roundRect">
             <a:avLst/>
           </a:prstGeom>
           <a:solidFill>
-            <a:srgbClr val="1E293B"/>
+            <a:srgbClr val="131C31"/>
           </a:solidFill>
-          <a:ln w="12700">
+          <a:ln w="15240">
             <a:solidFill>
-              <a:srgbClr val="334155"/>
+              <a:srgbClr val="243352"/>
             </a:solidFill>
           </a:ln>
         </p:spPr>
@@ -5038,81 +4911,81 @@
           </a:fontRef>
         </p:style>
         <p:txBody>
-          <a:bodyPr rtlCol="0" anchor="ctr" wrap="square" lIns="182880" rIns="182880" tIns="182880" bIns="182880"/>
+          <a:bodyPr rtlCol="0" anchor="ctr" wrap="square" lIns="164592" rIns="164592" tIns="146304" bIns="146304"/>
           <a:lstStyle/>
           <a:p>
             <a:pPr algn="ctr">
               <a:spcAft>
-                <a:spcPts val="800"/>
-              </a:spcAft>
-              <a:defRPr sz="1400" b="1">
+                <a:spcPts val="600"/>
+              </a:spcAft>
+              <a:defRPr sz="1300" b="1">
                 <a:solidFill>
                   <a:srgbClr val="38BDF8"/>
                 </a:solidFill>
               </a:defRPr>
             </a:pPr>
             <a:r>
-              <a:t>Customer Segments &amp; Channels</a:t>
-            </a:r>
-          </a:p>
-          <a:p>
-            <a:pPr>
-              <a:spcAft>
-                <a:spcPts val="400"/>
-              </a:spcAft>
-              <a:defRPr sz="1100">
-                <a:solidFill>
-                  <a:srgbClr val="F8FAFC"/>
-                </a:solidFill>
-              </a:defRPr>
-            </a:pPr>
-            <a:r>
-              <a:t>• B2C Knowledge Workers &amp; Students: Digital burnout, screen time, health anxiety.</a:t>
-            </a:r>
-          </a:p>
-          <a:p>
-            <a:pPr>
-              <a:spcAft>
-                <a:spcPts val="400"/>
-              </a:spcAft>
-              <a:defRPr sz="1100">
-                <a:solidFill>
-                  <a:srgbClr val="F8FAFC"/>
-                </a:solidFill>
-              </a:defRPr>
-            </a:pPr>
-            <a:r>
-              <a:t>• B2C Privacy Advocates: Users refusing cloud health tracking.</a:t>
-            </a:r>
-          </a:p>
-          <a:p>
-            <a:pPr>
-              <a:spcAft>
-                <a:spcPts val="400"/>
-              </a:spcAft>
-              <a:defRPr sz="1100">
-                <a:solidFill>
-                  <a:srgbClr val="F8FAFC"/>
-                </a:solidFill>
-              </a:defRPr>
-            </a:pPr>
-            <a:r>
-              <a:t>• B2B Wellness Coaches &amp; Clinics: Patient lifestyle intake &amp; briefing logs.</a:t>
-            </a:r>
-          </a:p>
-          <a:p>
-            <a:pPr>
-              <a:spcAft>
-                <a:spcPts val="400"/>
-              </a:spcAft>
-              <a:defRPr sz="1100">
-                <a:solidFill>
-                  <a:srgbClr val="F8FAFC"/>
-                </a:solidFill>
-              </a:defRPr>
-            </a:pPr>
-            <a:r>
-              <a:t>• Channels: GitHub open-source, r/LocalLLaMA, r/healthanxiety, hackathons, clinic partnerships.</a:t>
+              <a:t>Business Model &amp; Lean Canvas</a:t>
+            </a:r>
+          </a:p>
+          <a:p>
+            <a:pPr>
+              <a:spcAft>
+                <a:spcPts val="300"/>
+              </a:spcAft>
+              <a:defRPr sz="1050">
+                <a:solidFill>
+                  <a:srgbClr val="F8FAFC"/>
+                </a:solidFill>
+              </a:defRPr>
+            </a:pPr>
+            <a:r>
+              <a:t>• Open-Core Model: Free MIT Community Edition for developers and public health.</a:t>
+            </a:r>
+          </a:p>
+          <a:p>
+            <a:pPr>
+              <a:spcAft>
+                <a:spcPts val="300"/>
+              </a:spcAft>
+              <a:defRPr sz="1050">
+                <a:solidFill>
+                  <a:srgbClr val="F8FAFC"/>
+                </a:solidFill>
+              </a:defRPr>
+            </a:pPr>
+            <a:r>
+              <a:t>• Desktop Pro ($29 One-Time): Packaged app with auto model manager &amp; PDF export.</a:t>
+            </a:r>
+          </a:p>
+          <a:p>
+            <a:pPr>
+              <a:spcAft>
+                <a:spcPts val="300"/>
+              </a:spcAft>
+              <a:defRPr sz="1050">
+                <a:solidFill>
+                  <a:srgbClr val="F8FAFC"/>
+                </a:solidFill>
+              </a:defRPr>
+            </a:pPr>
+            <a:r>
+              <a:t>• Clinic B2B ($49/mo): Multi-client management, branded briefings, EHR export.</a:t>
+            </a:r>
+          </a:p>
+          <a:p>
+            <a:pPr>
+              <a:spcAft>
+                <a:spcPts val="300"/>
+              </a:spcAft>
+              <a:defRPr sz="1050">
+                <a:solidFill>
+                  <a:srgbClr val="F8FAFC"/>
+                </a:solidFill>
+              </a:defRPr>
+            </a:pPr>
+            <a:r>
+              <a:t>• Cost Structure: $0 cloud LLM fees; $0 cloud DB; &gt;95% gross margin on software licenses.</a:t>
             </a:r>
           </a:p>
         </p:txBody>
@@ -5125,18 +4998,18 @@
         </p:nvSpPr>
         <p:spPr>
           <a:xfrm>
-            <a:off x="4389120" y="1645920"/>
-            <a:ext cx="3291840" cy="4572000"/>
+            <a:off x="4425696" y="1463040"/>
+            <a:ext cx="3328416" cy="4663440"/>
           </a:xfrm>
           <a:prstGeom prst="roundRect">
             <a:avLst/>
           </a:prstGeom>
           <a:solidFill>
-            <a:srgbClr val="1E293B"/>
+            <a:srgbClr val="131C31"/>
           </a:solidFill>
-          <a:ln w="12700">
+          <a:ln w="15240">
             <a:solidFill>
-              <a:srgbClr val="334155"/>
+              <a:srgbClr val="243352"/>
             </a:solidFill>
           </a:ln>
         </p:spPr>
@@ -5155,81 +5028,81 @@
           </a:fontRef>
         </p:style>
         <p:txBody>
-          <a:bodyPr rtlCol="0" anchor="ctr" wrap="square" lIns="182880" rIns="182880" tIns="182880" bIns="182880"/>
+          <a:bodyPr rtlCol="0" anchor="ctr" wrap="square" lIns="164592" rIns="164592" tIns="146304" bIns="146304"/>
           <a:lstStyle/>
           <a:p>
             <a:pPr algn="ctr">
               <a:spcAft>
-                <a:spcPts val="800"/>
-              </a:spcAft>
-              <a:defRPr sz="1400" b="1">
+                <a:spcPts val="600"/>
+              </a:spcAft>
+              <a:defRPr sz="1300" b="1">
                 <a:solidFill>
                   <a:srgbClr val="10B981"/>
                 </a:solidFill>
               </a:defRPr>
             </a:pPr>
             <a:r>
-              <a:t>Revenue Model (Open-Core)</a:t>
-            </a:r>
-          </a:p>
-          <a:p>
-            <a:pPr>
-              <a:spcAft>
-                <a:spcPts val="400"/>
-              </a:spcAft>
-              <a:defRPr sz="1100">
-                <a:solidFill>
-                  <a:srgbClr val="F8FAFC"/>
-                </a:solidFill>
-              </a:defRPr>
-            </a:pPr>
-            <a:r>
-              <a:t>• Community Edition (Free / MIT): Full open-source pipeline for developers.</a:t>
-            </a:r>
-          </a:p>
-          <a:p>
-            <a:pPr>
-              <a:spcAft>
-                <a:spcPts val="400"/>
-              </a:spcAft>
-              <a:defRPr sz="1100">
-                <a:solidFill>
-                  <a:srgbClr val="F8FAFC"/>
-                </a:solidFill>
-              </a:defRPr>
-            </a:pPr>
-            <a:r>
-              <a:t>• VitalSync Desktop Pro ($29 One-Time): Packaged app with auto model manager &amp; PDF export.</a:t>
-            </a:r>
-          </a:p>
-          <a:p>
-            <a:pPr>
-              <a:spcAft>
-                <a:spcPts val="400"/>
-              </a:spcAft>
-              <a:defRPr sz="1100">
-                <a:solidFill>
-                  <a:srgbClr val="F8FAFC"/>
-                </a:solidFill>
-              </a:defRPr>
-            </a:pPr>
-            <a:r>
-              <a:t>• VitalSync Clinic B2B ($49/mo): Multi-client management, branded briefings, longitudinal trends.</a:t>
-            </a:r>
-          </a:p>
-          <a:p>
-            <a:pPr>
-              <a:spcAft>
-                <a:spcPts val="400"/>
-              </a:spcAft>
-              <a:defRPr sz="1100">
-                <a:solidFill>
-                  <a:srgbClr val="F8FAFC"/>
-                </a:solidFill>
-              </a:defRPr>
-            </a:pPr>
-            <a:r>
-              <a:t>• UN SDG 3 Innovation Grants: Research funding for preventive public health screening.</a:t>
+              <a:t>UN SDG 3 (Target 3.4) Impact</a:t>
+            </a:r>
+          </a:p>
+          <a:p>
+            <a:pPr>
+              <a:spcAft>
+                <a:spcPts val="300"/>
+              </a:spcAft>
+              <a:defRPr sz="1050">
+                <a:solidFill>
+                  <a:srgbClr val="F8FAFC"/>
+                </a:solidFill>
+              </a:defRPr>
+            </a:pPr>
+            <a:r>
+              <a:t>• NCD Prevention: Early non-invasive screening for cardiovascular disease and type 2 diabetes.</a:t>
+            </a:r>
+          </a:p>
+          <a:p>
+            <a:pPr>
+              <a:spcAft>
+                <a:spcPts val="300"/>
+              </a:spcAft>
+              <a:defRPr sz="1050">
+                <a:solidFill>
+                  <a:srgbClr val="F8FAFC"/>
+                </a:solidFill>
+              </a:defRPr>
+            </a:pPr>
+            <a:r>
+              <a:t>• Mental Well-Being: Demystifies somatic sensations to eliminate acute cyberchondria.</a:t>
+            </a:r>
+          </a:p>
+          <a:p>
+            <a:pPr>
+              <a:spcAft>
+                <a:spcPts val="300"/>
+              </a:spcAft>
+              <a:defRPr sz="1050">
+                <a:solidFill>
+                  <a:srgbClr val="F8FAFC"/>
+                </a:solidFill>
+              </a:defRPr>
+            </a:pPr>
+            <a:r>
+              <a:t>• Circadian Restoration: Cuts sleep latency and halts late doomscrolling habits.</a:t>
+            </a:r>
+          </a:p>
+          <a:p>
+            <a:pPr>
+              <a:spcAft>
+                <a:spcPts val="300"/>
+              </a:spcAft>
+              <a:defRPr sz="1050">
+                <a:solidFill>
+                  <a:srgbClr val="F8FAFC"/>
+                </a:solidFill>
+              </a:defRPr>
+            </a:pPr>
+            <a:r>
+              <a:t>• Health Equity: 100% free and open-source; runs locally without expensive cloud subscriptions.</a:t>
             </a:r>
           </a:p>
         </p:txBody>
@@ -5242,18 +5115,18 @@
         </p:nvSpPr>
         <p:spPr>
           <a:xfrm>
-            <a:off x="8046720" y="1645920"/>
-            <a:ext cx="3291840" cy="4572000"/>
+            <a:off x="8119872" y="1463040"/>
+            <a:ext cx="3328416" cy="4663440"/>
           </a:xfrm>
           <a:prstGeom prst="roundRect">
             <a:avLst/>
           </a:prstGeom>
           <a:solidFill>
-            <a:srgbClr val="1E293B"/>
+            <a:srgbClr val="131C31"/>
           </a:solidFill>
-          <a:ln w="12700">
+          <a:ln w="15240">
             <a:solidFill>
-              <a:srgbClr val="334155"/>
+              <a:srgbClr val="243352"/>
             </a:solidFill>
           </a:ln>
         </p:spPr>
@@ -5272,1110 +5145,111 @@
           </a:fontRef>
         </p:style>
         <p:txBody>
-          <a:bodyPr rtlCol="0" anchor="ctr" wrap="square" lIns="182880" rIns="182880" tIns="182880" bIns="182880"/>
+          <a:bodyPr rtlCol="0" anchor="ctr" wrap="square" lIns="164592" rIns="164592" tIns="146304" bIns="146304"/>
           <a:lstStyle/>
           <a:p>
             <a:pPr algn="ctr">
               <a:spcAft>
-                <a:spcPts val="800"/>
-              </a:spcAft>
-              <a:defRPr sz="1400" b="1">
+                <a:spcPts val="600"/>
+              </a:spcAft>
+              <a:defRPr sz="1300" b="1">
                 <a:solidFill>
                   <a:srgbClr val="A855F7"/>
                 </a:solidFill>
               </a:defRPr>
             </a:pPr>
             <a:r>
-              <a:t>Cost Structure &amp; Key Metrics</a:t>
-            </a:r>
-          </a:p>
-          <a:p>
-            <a:pPr>
-              <a:spcAft>
-                <a:spcPts val="400"/>
-              </a:spcAft>
-              <a:defRPr sz="1100">
-                <a:solidFill>
-                  <a:srgbClr val="F8FAFC"/>
-                </a:solidFill>
-              </a:defRPr>
-            </a:pPr>
-            <a:r>
-              <a:t>• Cost Structure: $0 cloud LLM inference fees; $0 cloud database costs; minimal GitHub hosting.</a:t>
-            </a:r>
-          </a:p>
-          <a:p>
-            <a:pPr>
-              <a:spcAft>
-                <a:spcPts val="400"/>
-              </a:spcAft>
-              <a:defRPr sz="1100">
-                <a:solidFill>
-                  <a:srgbClr val="F8FAFC"/>
-                </a:solidFill>
-              </a:defRPr>
-            </a:pPr>
-            <a:r>
-              <a:t>• Gross Margins: &gt;95% on software licenses.</a:t>
-            </a:r>
-          </a:p>
-          <a:p>
-            <a:pPr>
-              <a:spcAft>
-                <a:spcPts val="400"/>
-              </a:spcAft>
-              <a:defRPr sz="1100">
-                <a:solidFill>
-                  <a:srgbClr val="F8FAFC"/>
-                </a:solidFill>
-              </a:defRPr>
-            </a:pPr>
-            <a:r>
-              <a:t>• Key Metrics: 100% clinical triage sensitivity; sub-30ms latency; anxiety reduction score (&gt;40%).</a:t>
-            </a:r>
-          </a:p>
-          <a:p>
-            <a:pPr>
-              <a:spcAft>
-                <a:spcPts val="400"/>
-              </a:spcAft>
-              <a:defRPr sz="1100">
-                <a:solidFill>
-                  <a:srgbClr val="F8FAFC"/>
-                </a:solidFill>
-              </a:defRPr>
-            </a:pPr>
-            <a:r>
-              <a:t>• Doctor Briefings generated per user visit.</a:t>
-            </a:r>
-          </a:p>
-        </p:txBody>
-      </p:sp>
-    </p:spTree>
-  </p:cSld>
-  <p:clrMapOvr>
-    <a:masterClrMapping/>
-  </p:clrMapOvr>
-</p:sld>
-</file>
-
-<file path=ppt/slides/slide11.xml><?xml version="1.0" encoding="utf-8"?>
-<p:sld xmlns:a="http://schemas.openxmlformats.org/drawingml/2006/main" xmlns:p="http://schemas.openxmlformats.org/presentationml/2006/main" xmlns:r="http://schemas.openxmlformats.org/officeDocument/2006/relationships">
-  <p:cSld>
-    <p:bg>
-      <p:bgPr>
-        <a:solidFill>
-          <a:srgbClr val="0F172A"/>
-        </a:solidFill>
-        <a:effectLst/>
-      </p:bgPr>
-    </p:bg>
-    <p:spTree>
-      <p:nvGrpSpPr>
-        <p:cNvPr id="1" name=""/>
-        <p:cNvGrpSpPr/>
-        <p:nvPr/>
-      </p:nvGrpSpPr>
-      <p:grpSpPr/>
-      <p:sp>
-        <p:nvSpPr>
-          <p:cNvPr id="2" name="TextBox 1"/>
-          <p:cNvSpPr txBox="1"/>
-          <p:nvPr/>
-        </p:nvSpPr>
-        <p:spPr>
-          <a:xfrm>
-            <a:off x="731520" y="365760"/>
-            <a:ext cx="10515600" cy="365760"/>
-          </a:xfrm>
-          <a:prstGeom prst="rect">
-            <a:avLst/>
-          </a:prstGeom>
-          <a:noFill/>
-        </p:spPr>
-        <p:txBody>
-          <a:bodyPr wrap="square">
-            <a:spAutoFit/>
-          </a:bodyPr>
-          <a:lstStyle/>
-          <a:p>
-            <a:pPr>
-              <a:defRPr sz="1000" b="1">
-                <a:solidFill>
-                  <a:srgbClr val="38BDF8"/>
-                </a:solidFill>
-              </a:defRPr>
-            </a:pPr>
-            <a:r>
-              <a:t>IBM SKILLSBUILD MASTERCLASS 5 • UN SDG 3 (TARGET 3.4)</a:t>
-            </a:r>
-          </a:p>
-        </p:txBody>
-      </p:sp>
-      <p:sp>
-        <p:nvSpPr>
-          <p:cNvPr id="3" name="TextBox 2"/>
-          <p:cNvSpPr txBox="1"/>
-          <p:nvPr/>
-        </p:nvSpPr>
-        <p:spPr>
-          <a:xfrm>
-            <a:off x="731520" y="640080"/>
-            <a:ext cx="10515600" cy="640080"/>
-          </a:xfrm>
-          <a:prstGeom prst="rect">
-            <a:avLst/>
-          </a:prstGeom>
-          <a:noFill/>
-        </p:spPr>
-        <p:txBody>
-          <a:bodyPr wrap="square">
-            <a:spAutoFit/>
-          </a:bodyPr>
-          <a:lstStyle/>
-          <a:p>
-            <a:pPr>
-              <a:defRPr sz="2400" b="1">
-                <a:solidFill>
-                  <a:srgbClr val="F8FAFC"/>
-                </a:solidFill>
-              </a:defRPr>
-            </a:pPr>
-            <a:r>
-              <a:t>Social Impact: Advancing UN SDG 3 (Target 3.4)</a:t>
-            </a:r>
-          </a:p>
-        </p:txBody>
-      </p:sp>
-      <p:sp>
-        <p:nvSpPr>
-          <p:cNvPr id="4" name="Rounded Rectangle 3"/>
-          <p:cNvSpPr/>
-          <p:nvPr/>
-        </p:nvSpPr>
-        <p:spPr>
-          <a:xfrm>
-            <a:off x="731520" y="1645920"/>
-            <a:ext cx="5120640" cy="2194560"/>
-          </a:xfrm>
-          <a:prstGeom prst="roundRect">
-            <a:avLst/>
-          </a:prstGeom>
-          <a:solidFill>
-            <a:srgbClr val="1E293B"/>
-          </a:solidFill>
-          <a:ln w="12700">
-            <a:solidFill>
-              <a:srgbClr val="334155"/>
-            </a:solidFill>
-          </a:ln>
-        </p:spPr>
-        <p:style>
-          <a:lnRef idx="1">
-            <a:schemeClr val="accent1"/>
-          </a:lnRef>
-          <a:fillRef idx="3">
-            <a:schemeClr val="accent1"/>
-          </a:fillRef>
-          <a:effectRef idx="2">
-            <a:schemeClr val="accent1"/>
-          </a:effectRef>
-          <a:fontRef idx="minor">
-            <a:schemeClr val="lt1"/>
-          </a:fontRef>
-        </p:style>
-        <p:txBody>
-          <a:bodyPr rtlCol="0" anchor="ctr" wrap="square" lIns="182880" rIns="182880" tIns="182880" bIns="182880"/>
-          <a:lstStyle/>
-          <a:p>
-            <a:pPr algn="ctr">
-              <a:spcAft>
-                <a:spcPts val="800"/>
-              </a:spcAft>
-              <a:defRPr sz="1400" b="1">
-                <a:solidFill>
-                  <a:srgbClr val="10B981"/>
-                </a:solidFill>
-              </a:defRPr>
-            </a:pPr>
-            <a:r>
-              <a:t>🎯 Target 3.4: NCD Prevention</a:t>
-            </a:r>
-          </a:p>
-          <a:p>
-            <a:pPr>
-              <a:spcAft>
-                <a:spcPts val="400"/>
-              </a:spcAft>
-              <a:defRPr sz="1100">
-                <a:solidFill>
-                  <a:srgbClr val="F8FAFC"/>
-                </a:solidFill>
-              </a:defRPr>
-            </a:pPr>
-            <a:r>
-              <a:t>• Non-communicable diseases cause 74% of global deaths.</a:t>
-            </a:r>
-          </a:p>
-          <a:p>
-            <a:pPr>
-              <a:spcAft>
-                <a:spcPts val="400"/>
-              </a:spcAft>
-              <a:defRPr sz="1100">
-                <a:solidFill>
-                  <a:srgbClr val="F8FAFC"/>
-                </a:solidFill>
-              </a:defRPr>
-            </a:pPr>
-            <a:r>
-              <a:t>• VitalSync AI detects sub-clinical cardiovascular and pre-diabetic risk markers early.</a:t>
-            </a:r>
-          </a:p>
-          <a:p>
-            <a:pPr>
-              <a:spcAft>
-                <a:spcPts val="400"/>
-              </a:spcAft>
-              <a:defRPr sz="1100">
-                <a:solidFill>
-                  <a:srgbClr val="F8FAFC"/>
-                </a:solidFill>
-              </a:defRPr>
-            </a:pPr>
-            <a:r>
-              <a:t>• Identifies lifestyle risks years before irreversible clinical diagnosis.</a:t>
-            </a:r>
-          </a:p>
-          <a:p>
-            <a:pPr>
-              <a:spcAft>
-                <a:spcPts val="400"/>
-              </a:spcAft>
-              <a:defRPr sz="1100">
-                <a:solidFill>
-                  <a:srgbClr val="F8FAFC"/>
-                </a:solidFill>
-              </a:defRPr>
-            </a:pPr>
-            <a:r>
-              <a:t>• Encourages evidence-based dietary and physical activity interventions.</a:t>
-            </a:r>
-          </a:p>
-        </p:txBody>
-      </p:sp>
-      <p:sp>
-        <p:nvSpPr>
-          <p:cNvPr id="5" name="Rounded Rectangle 4"/>
-          <p:cNvSpPr/>
-          <p:nvPr/>
-        </p:nvSpPr>
-        <p:spPr>
-          <a:xfrm>
-            <a:off x="6217920" y="1645920"/>
-            <a:ext cx="5120640" cy="2194560"/>
-          </a:xfrm>
-          <a:prstGeom prst="roundRect">
-            <a:avLst/>
-          </a:prstGeom>
-          <a:solidFill>
-            <a:srgbClr val="1E293B"/>
-          </a:solidFill>
-          <a:ln w="12700">
-            <a:solidFill>
-              <a:srgbClr val="334155"/>
-            </a:solidFill>
-          </a:ln>
-        </p:spPr>
-        <p:style>
-          <a:lnRef idx="1">
-            <a:schemeClr val="accent1"/>
-          </a:lnRef>
-          <a:fillRef idx="3">
-            <a:schemeClr val="accent1"/>
-          </a:fillRef>
-          <a:effectRef idx="2">
-            <a:schemeClr val="accent1"/>
-          </a:effectRef>
-          <a:fontRef idx="minor">
-            <a:schemeClr val="lt1"/>
-          </a:fontRef>
-        </p:style>
-        <p:txBody>
-          <a:bodyPr rtlCol="0" anchor="ctr" wrap="square" lIns="182880" rIns="182880" tIns="182880" bIns="182880"/>
-          <a:lstStyle/>
-          <a:p>
-            <a:pPr algn="ctr">
-              <a:spcAft>
-                <a:spcPts val="800"/>
-              </a:spcAft>
-              <a:defRPr sz="1400" b="1">
-                <a:solidFill>
-                  <a:srgbClr val="38BDF8"/>
-                </a:solidFill>
-              </a:defRPr>
-            </a:pPr>
-            <a:r>
-              <a:t>🧠 Mental Wellness &amp; Digital Fatigue</a:t>
-            </a:r>
-          </a:p>
-          <a:p>
-            <a:pPr>
-              <a:spcAft>
-                <a:spcPts val="400"/>
-              </a:spcAft>
-              <a:defRPr sz="1100">
-                <a:solidFill>
-                  <a:srgbClr val="F8FAFC"/>
-                </a:solidFill>
-              </a:defRPr>
-            </a:pPr>
-            <a:r>
-              <a:t>• Directly addresses bedtime screen doomscrolling and sleep debt.</a:t>
-            </a:r>
-          </a:p>
-          <a:p>
-            <a:pPr>
-              <a:spcAft>
-                <a:spcPts val="400"/>
-              </a:spcAft>
-              <a:defRPr sz="1100">
-                <a:solidFill>
-                  <a:srgbClr val="F8FAFC"/>
-                </a:solidFill>
-              </a:defRPr>
-            </a:pPr>
-            <a:r>
-              <a:t>• Reduces somatic health anxiety by eliminating alarmist search results.</a:t>
-            </a:r>
-          </a:p>
-          <a:p>
-            <a:pPr>
-              <a:spcAft>
-                <a:spcPts val="400"/>
-              </a:spcAft>
-              <a:defRPr sz="1100">
-                <a:solidFill>
-                  <a:srgbClr val="F8FAFC"/>
-                </a:solidFill>
-              </a:defRPr>
-            </a:pPr>
-            <a:r>
-              <a:t>• Demystifies everyday bodily signals with reassuring biological science.</a:t>
-            </a:r>
-          </a:p>
-          <a:p>
-            <a:pPr>
-              <a:spcAft>
-                <a:spcPts val="400"/>
-              </a:spcAft>
-              <a:defRPr sz="1100">
-                <a:solidFill>
-                  <a:srgbClr val="F8FAFC"/>
-                </a:solidFill>
-              </a:defRPr>
-            </a:pPr>
-            <a:r>
-              <a:t>• Protects young adults and knowledge workers from chronic burnout.</a:t>
-            </a:r>
-          </a:p>
-        </p:txBody>
-      </p:sp>
-      <p:sp>
-        <p:nvSpPr>
-          <p:cNvPr id="6" name="Rounded Rectangle 5"/>
-          <p:cNvSpPr/>
-          <p:nvPr/>
-        </p:nvSpPr>
-        <p:spPr>
-          <a:xfrm>
-            <a:off x="731520" y="4114800"/>
-            <a:ext cx="5120640" cy="2194560"/>
-          </a:xfrm>
-          <a:prstGeom prst="roundRect">
-            <a:avLst/>
-          </a:prstGeom>
-          <a:solidFill>
-            <a:srgbClr val="1E293B"/>
-          </a:solidFill>
-          <a:ln w="12700">
-            <a:solidFill>
-              <a:srgbClr val="334155"/>
-            </a:solidFill>
-          </a:ln>
-        </p:spPr>
-        <p:style>
-          <a:lnRef idx="1">
-            <a:schemeClr val="accent1"/>
-          </a:lnRef>
-          <a:fillRef idx="3">
-            <a:schemeClr val="accent1"/>
-          </a:fillRef>
-          <a:effectRef idx="2">
-            <a:schemeClr val="accent1"/>
-          </a:effectRef>
-          <a:fontRef idx="minor">
-            <a:schemeClr val="lt1"/>
-          </a:fontRef>
-        </p:style>
-        <p:txBody>
-          <a:bodyPr rtlCol="0" anchor="ctr" wrap="square" lIns="182880" rIns="182880" tIns="182880" bIns="182880"/>
-          <a:lstStyle/>
-          <a:p>
-            <a:pPr algn="ctr">
-              <a:spcAft>
-                <a:spcPts val="800"/>
-              </a:spcAft>
-              <a:defRPr sz="1400" b="1">
-                <a:solidFill>
-                  <a:srgbClr val="F59E0B"/>
-                </a:solidFill>
-              </a:defRPr>
-            </a:pPr>
-            <a:r>
-              <a:t>⚖️ Healthcare Equity &amp; Accessibility</a:t>
-            </a:r>
-          </a:p>
-          <a:p>
-            <a:pPr>
-              <a:spcAft>
-                <a:spcPts val="400"/>
-              </a:spcAft>
-              <a:defRPr sz="1100">
-                <a:solidFill>
-                  <a:srgbClr val="F8FAFC"/>
-                </a:solidFill>
-              </a:defRPr>
-            </a:pPr>
-            <a:r>
-              <a:t>• Zero subscription paywalls; completely free and open-source.</a:t>
-            </a:r>
-          </a:p>
-          <a:p>
-            <a:pPr>
-              <a:spcAft>
-                <a:spcPts val="400"/>
-              </a:spcAft>
-              <a:defRPr sz="1100">
-                <a:solidFill>
-                  <a:srgbClr val="F8FAFC"/>
-                </a:solidFill>
-              </a:defRPr>
-            </a:pPr>
-            <a:r>
-              <a:t>• No high-end cloud subscriptions required; runs on everyday PCs.</a:t>
-            </a:r>
-          </a:p>
-          <a:p>
-            <a:pPr>
-              <a:spcAft>
-                <a:spcPts val="400"/>
-              </a:spcAft>
-              <a:defRPr sz="1100">
-                <a:solidFill>
-                  <a:srgbClr val="F8FAFC"/>
-                </a:solidFill>
-              </a:defRPr>
-            </a:pPr>
-            <a:r>
-              <a:t>• Brings clinical-grade biophysics and screening to underserved populations.</a:t>
-            </a:r>
-          </a:p>
-          <a:p>
-            <a:pPr>
-              <a:spcAft>
-                <a:spcPts val="400"/>
-              </a:spcAft>
-              <a:defRPr sz="1100">
-                <a:solidFill>
-                  <a:srgbClr val="F8FAFC"/>
-                </a:solidFill>
-              </a:defRPr>
-            </a:pPr>
-            <a:r>
-              <a:t>• Bridges the socioeconomic digital health divide.</a:t>
-            </a:r>
-          </a:p>
-        </p:txBody>
-      </p:sp>
-      <p:sp>
-        <p:nvSpPr>
-          <p:cNvPr id="7" name="Rounded Rectangle 6"/>
-          <p:cNvSpPr/>
-          <p:nvPr/>
-        </p:nvSpPr>
-        <p:spPr>
-          <a:xfrm>
-            <a:off x="6217920" y="4114800"/>
-            <a:ext cx="5120640" cy="2194560"/>
-          </a:xfrm>
-          <a:prstGeom prst="roundRect">
-            <a:avLst/>
-          </a:prstGeom>
-          <a:solidFill>
-            <a:srgbClr val="1E293B"/>
-          </a:solidFill>
-          <a:ln w="12700">
-            <a:solidFill>
-              <a:srgbClr val="334155"/>
-            </a:solidFill>
-          </a:ln>
-        </p:spPr>
-        <p:style>
-          <a:lnRef idx="1">
-            <a:schemeClr val="accent1"/>
-          </a:lnRef>
-          <a:fillRef idx="3">
-            <a:schemeClr val="accent1"/>
-          </a:fillRef>
-          <a:effectRef idx="2">
-            <a:schemeClr val="accent1"/>
-          </a:effectRef>
-          <a:fontRef idx="minor">
-            <a:schemeClr val="lt1"/>
-          </a:fontRef>
-        </p:style>
-        <p:txBody>
-          <a:bodyPr rtlCol="0" anchor="ctr" wrap="square" lIns="182880" rIns="182880" tIns="182880" bIns="182880"/>
-          <a:lstStyle/>
-          <a:p>
-            <a:pPr algn="ctr">
-              <a:spcAft>
-                <a:spcPts val="800"/>
-              </a:spcAft>
-              <a:defRPr sz="1400" b="1">
-                <a:solidFill>
-                  <a:srgbClr val="A855F7"/>
-                </a:solidFill>
-              </a:defRPr>
-            </a:pPr>
-            <a:r>
-              <a:t>🏥 Clinical Consultation Efficiency</a:t>
-            </a:r>
-          </a:p>
-          <a:p>
-            <a:pPr>
-              <a:spcAft>
-                <a:spcPts val="400"/>
-              </a:spcAft>
-              <a:defRPr sz="1100">
-                <a:solidFill>
-                  <a:srgbClr val="F8FAFC"/>
-                </a:solidFill>
-              </a:defRPr>
-            </a:pPr>
-            <a:r>
-              <a:t>• Patients arrive at primary care visits with structured 1-page briefings.</a:t>
-            </a:r>
-          </a:p>
-          <a:p>
-            <a:pPr>
-              <a:spcAft>
-                <a:spcPts val="400"/>
-              </a:spcAft>
-              <a:defRPr sz="1100">
-                <a:solidFill>
-                  <a:srgbClr val="F8FAFC"/>
-                </a:solidFill>
-              </a:defRPr>
-            </a:pPr>
-            <a:r>
-              <a:t>• Saves 4-6 minutes of diagnostic intake during 15-minute consultations.</a:t>
-            </a:r>
-          </a:p>
-          <a:p>
-            <a:pPr>
-              <a:spcAft>
-                <a:spcPts val="400"/>
-              </a:spcAft>
-              <a:defRPr sz="1100">
-                <a:solidFill>
-                  <a:srgbClr val="F8FAFC"/>
-                </a:solidFill>
-              </a:defRPr>
-            </a:pPr>
-            <a:r>
-              <a:t>• Reduces avoidable panic-driven visits to emergency departments.</a:t>
-            </a:r>
-          </a:p>
-          <a:p>
-            <a:pPr>
-              <a:spcAft>
-                <a:spcPts val="400"/>
-              </a:spcAft>
-              <a:defRPr sz="1100">
-                <a:solidFill>
-                  <a:srgbClr val="F8FAFC"/>
-                </a:solidFill>
-              </a:defRPr>
-            </a:pPr>
-            <a:r>
-              <a:t>• Strengthens the collaborative relationship between patients and physicians.</a:t>
-            </a:r>
-          </a:p>
-        </p:txBody>
-      </p:sp>
-    </p:spTree>
-  </p:cSld>
-  <p:clrMapOvr>
-    <a:masterClrMapping/>
-  </p:clrMapOvr>
-</p:sld>
-</file>
-
-<file path=ppt/slides/slide12.xml><?xml version="1.0" encoding="utf-8"?>
-<p:sld xmlns:a="http://schemas.openxmlformats.org/drawingml/2006/main" xmlns:p="http://schemas.openxmlformats.org/presentationml/2006/main" xmlns:r="http://schemas.openxmlformats.org/officeDocument/2006/relationships">
-  <p:cSld>
-    <p:bg>
-      <p:bgPr>
-        <a:solidFill>
-          <a:srgbClr val="0F172A"/>
-        </a:solidFill>
-        <a:effectLst/>
-      </p:bgPr>
-    </p:bg>
-    <p:spTree>
-      <p:nvGrpSpPr>
-        <p:cNvPr id="1" name=""/>
-        <p:cNvGrpSpPr/>
-        <p:nvPr/>
-      </p:nvGrpSpPr>
-      <p:grpSpPr/>
-      <p:sp>
-        <p:nvSpPr>
-          <p:cNvPr id="2" name="TextBox 1"/>
-          <p:cNvSpPr txBox="1"/>
-          <p:nvPr/>
-        </p:nvSpPr>
-        <p:spPr>
-          <a:xfrm>
-            <a:off x="731520" y="365760"/>
-            <a:ext cx="10515600" cy="365760"/>
-          </a:xfrm>
-          <a:prstGeom prst="rect">
-            <a:avLst/>
-          </a:prstGeom>
-          <a:noFill/>
-        </p:spPr>
-        <p:txBody>
-          <a:bodyPr wrap="square">
-            <a:spAutoFit/>
-          </a:bodyPr>
-          <a:lstStyle/>
-          <a:p>
-            <a:pPr>
-              <a:defRPr sz="1000" b="1">
-                <a:solidFill>
-                  <a:srgbClr val="38BDF8"/>
-                </a:solidFill>
-              </a:defRPr>
-            </a:pPr>
-            <a:r>
-              <a:t>IBM SKILLSBUILD MASTERCLASS 5 • UN SDG 3 (TARGET 3.4)</a:t>
-            </a:r>
-          </a:p>
-        </p:txBody>
-      </p:sp>
-      <p:sp>
-        <p:nvSpPr>
-          <p:cNvPr id="3" name="TextBox 2"/>
-          <p:cNvSpPr txBox="1"/>
-          <p:nvPr/>
-        </p:nvSpPr>
-        <p:spPr>
-          <a:xfrm>
-            <a:off x="731520" y="640080"/>
-            <a:ext cx="10515600" cy="640080"/>
-          </a:xfrm>
-          <a:prstGeom prst="rect">
-            <a:avLst/>
-          </a:prstGeom>
-          <a:noFill/>
-        </p:spPr>
-        <p:txBody>
-          <a:bodyPr wrap="square">
-            <a:spAutoFit/>
-          </a:bodyPr>
-          <a:lstStyle/>
-          <a:p>
-            <a:pPr>
-              <a:defRPr sz="2400" b="1">
-                <a:solidFill>
-                  <a:srgbClr val="F8FAFC"/>
-                </a:solidFill>
-              </a:defRPr>
-            </a:pPr>
-            <a:r>
-              <a:t>Project Deliverables, Live Repository &amp; Conclusion</a:t>
-            </a:r>
-          </a:p>
-        </p:txBody>
-      </p:sp>
-      <p:sp>
-        <p:nvSpPr>
-          <p:cNvPr id="4" name="Rounded Rectangle 3"/>
-          <p:cNvSpPr/>
-          <p:nvPr/>
-        </p:nvSpPr>
-        <p:spPr>
-          <a:xfrm>
-            <a:off x="731520" y="1645920"/>
-            <a:ext cx="5120640" cy="4389120"/>
-          </a:xfrm>
-          <a:prstGeom prst="roundRect">
-            <a:avLst/>
-          </a:prstGeom>
-          <a:solidFill>
-            <a:srgbClr val="1E293B"/>
-          </a:solidFill>
-          <a:ln w="12700">
-            <a:solidFill>
-              <a:srgbClr val="334155"/>
-            </a:solidFill>
-          </a:ln>
-        </p:spPr>
-        <p:style>
-          <a:lnRef idx="1">
-            <a:schemeClr val="accent1"/>
-          </a:lnRef>
-          <a:fillRef idx="3">
-            <a:schemeClr val="accent1"/>
-          </a:fillRef>
-          <a:effectRef idx="2">
-            <a:schemeClr val="accent1"/>
-          </a:effectRef>
-          <a:fontRef idx="minor">
-            <a:schemeClr val="lt1"/>
-          </a:fontRef>
-        </p:style>
-        <p:txBody>
-          <a:bodyPr rtlCol="0" anchor="ctr" wrap="square" lIns="182880" rIns="182880" tIns="182880" bIns="182880"/>
-          <a:lstStyle/>
-          <a:p>
-            <a:pPr algn="ctr">
-              <a:spcAft>
-                <a:spcPts val="800"/>
-              </a:spcAft>
-              <a:defRPr sz="1400" b="1">
-                <a:solidFill>
-                  <a:srgbClr val="10B981"/>
-                </a:solidFill>
-              </a:defRPr>
-            </a:pPr>
-            <a:r>
-              <a:t>✅ What Has Been Built &amp; Delivered</a:t>
-            </a:r>
-          </a:p>
-          <a:p>
-            <a:pPr>
-              <a:spcAft>
-                <a:spcPts val="400"/>
-              </a:spcAft>
-              <a:defRPr sz="1100">
-                <a:solidFill>
-                  <a:srgbClr val="F8FAFC"/>
-                </a:solidFill>
-              </a:defRPr>
-            </a:pPr>
-            <a:r>
-              <a:t>• Production FastAPI REST server (&lt;30ms latency) &amp; Glassmorphic Web App.</a:t>
-            </a:r>
-          </a:p>
-          <a:p>
-            <a:pPr>
-              <a:spcAft>
-                <a:spcPts val="400"/>
-              </a:spcAft>
-              <a:defRPr sz="1100">
-                <a:solidFill>
-                  <a:srgbClr val="F8FAFC"/>
-                </a:solidFill>
-              </a:defRPr>
-            </a:pPr>
-            <a:r>
-              <a:t>• Streamlit Pro dashboard with interactive What-If lifestyle simulator.</a:t>
-            </a:r>
-          </a:p>
-          <a:p>
-            <a:pPr>
-              <a:spcAft>
-                <a:spcPts val="400"/>
-              </a:spcAft>
-              <a:defRPr sz="1100">
-                <a:solidFill>
-                  <a:srgbClr val="F8FAFC"/>
-                </a:solidFill>
-              </a:defRPr>
-            </a:pPr>
-            <a:r>
-              <a:t>• 5 Supervised Machine Learning pipelines trained on 500,000+ CDC records.</a:t>
-            </a:r>
-          </a:p>
-          <a:p>
-            <a:pPr>
-              <a:spcAft>
-                <a:spcPts val="400"/>
-              </a:spcAft>
-              <a:defRPr sz="1100">
-                <a:solidFill>
-                  <a:srgbClr val="F8FAFC"/>
-                </a:solidFill>
-              </a:defRPr>
-            </a:pPr>
-            <a:r>
-              <a:t>• Validated biophysical math (Mifflin, Katch, caffeine pharmacokinetics).</a:t>
-            </a:r>
-          </a:p>
-          <a:p>
-            <a:pPr>
-              <a:spcAft>
-                <a:spcPts val="400"/>
-              </a:spcAft>
-              <a:defRPr sz="1100">
-                <a:solidFill>
-                  <a:srgbClr val="F8FAFC"/>
-                </a:solidFill>
-              </a:defRPr>
-            </a:pPr>
-            <a:r>
-              <a:t>• Deterministic 3-tier clinical safety triage engine (Green/Yellow/Red).</a:t>
-            </a:r>
-          </a:p>
-          <a:p>
-            <a:pPr>
-              <a:spcAft>
-                <a:spcPts val="400"/>
-              </a:spcAft>
-              <a:defRPr sz="1100">
-                <a:solidFill>
-                  <a:srgbClr val="F8FAFC"/>
-                </a:solidFill>
-              </a:defRPr>
-            </a:pPr>
-            <a:r>
-              <a:t>• Local Qwen GPU integration via Ollama with prompt guardrails.</a:t>
-            </a:r>
-          </a:p>
-          <a:p>
-            <a:pPr>
-              <a:spcAft>
-                <a:spcPts val="400"/>
-              </a:spcAft>
-              <a:defRPr sz="1100">
-                <a:solidFill>
-                  <a:srgbClr val="F8FAFC"/>
-                </a:solidFill>
-              </a:defRPr>
-            </a:pPr>
-            <a:r>
-              <a:t>• 24/24 automated unit and integration tests passing in pytest.</a:t>
-            </a:r>
-          </a:p>
-          <a:p>
-            <a:pPr>
-              <a:spcAft>
-                <a:spcPts val="400"/>
-              </a:spcAft>
-              <a:defRPr sz="1100">
-                <a:solidFill>
-                  <a:srgbClr val="F8FAFC"/>
-                </a:solidFill>
-              </a:defRPr>
-            </a:pPr>
-            <a:r>
-              <a:t>• Published open-source on GitHub with full technical report and API docs.</a:t>
-            </a:r>
-          </a:p>
-        </p:txBody>
-      </p:sp>
-      <p:sp>
-        <p:nvSpPr>
-          <p:cNvPr id="5" name="Rounded Rectangle 4"/>
-          <p:cNvSpPr/>
-          <p:nvPr/>
-        </p:nvSpPr>
-        <p:spPr>
-          <a:xfrm>
-            <a:off x="6217920" y="1645920"/>
-            <a:ext cx="5120640" cy="4389120"/>
-          </a:xfrm>
-          <a:prstGeom prst="roundRect">
-            <a:avLst/>
-          </a:prstGeom>
-          <a:solidFill>
-            <a:srgbClr val="1E293B"/>
-          </a:solidFill>
-          <a:ln w="12700">
-            <a:solidFill>
-              <a:srgbClr val="334155"/>
-            </a:solidFill>
-          </a:ln>
-        </p:spPr>
-        <p:style>
-          <a:lnRef idx="1">
-            <a:schemeClr val="accent1"/>
-          </a:lnRef>
-          <a:fillRef idx="3">
-            <a:schemeClr val="accent1"/>
-          </a:fillRef>
-          <a:effectRef idx="2">
-            <a:schemeClr val="accent1"/>
-          </a:effectRef>
-          <a:fontRef idx="minor">
-            <a:schemeClr val="lt1"/>
-          </a:fontRef>
-        </p:style>
-        <p:txBody>
-          <a:bodyPr rtlCol="0" anchor="ctr" wrap="square" lIns="182880" rIns="182880" tIns="182880" bIns="182880"/>
-          <a:lstStyle/>
-          <a:p>
-            <a:pPr algn="ctr">
-              <a:spcAft>
-                <a:spcPts val="800"/>
-              </a:spcAft>
-              <a:defRPr sz="1400" b="1">
-                <a:solidFill>
-                  <a:srgbClr val="38BDF8"/>
-                </a:solidFill>
-              </a:defRPr>
-            </a:pPr>
-            <a:r>
-              <a:t>🚀 Future Roadmap &amp; Links</a:t>
-            </a:r>
-          </a:p>
-          <a:p>
-            <a:pPr>
-              <a:spcAft>
-                <a:spcPts val="400"/>
-              </a:spcAft>
-              <a:defRPr sz="1100">
-                <a:solidFill>
-                  <a:srgbClr val="F8FAFC"/>
-                </a:solidFill>
-              </a:defRPr>
-            </a:pPr>
-            <a:r>
-              <a:t>• Phase 6: Local Bluetooth wearable sensor integration (Apple HealthKit / Garmin).</a:t>
-            </a:r>
-          </a:p>
-          <a:p>
-            <a:pPr>
-              <a:spcAft>
-                <a:spcPts val="400"/>
-              </a:spcAft>
-              <a:defRPr sz="1100">
-                <a:solidFill>
-                  <a:srgbClr val="F8FAFC"/>
-                </a:solidFill>
-              </a:defRPr>
-            </a:pPr>
-            <a:r>
-              <a:t>• Phase 7: Standardized HL7 FHIR electronic health record export.</a:t>
-            </a:r>
-          </a:p>
-          <a:p>
-            <a:pPr>
-              <a:spcAft>
-                <a:spcPts val="400"/>
-              </a:spcAft>
-              <a:defRPr sz="1100">
-                <a:solidFill>
-                  <a:srgbClr val="F8FAFC"/>
-                </a:solidFill>
-              </a:defRPr>
-            </a:pPr>
-            <a:r>
-              <a:t>• Phase 8: One-click packaged desktop installers (Electron / Tauri).</a:t>
-            </a:r>
-          </a:p>
-          <a:p>
-            <a:pPr>
-              <a:spcAft>
-                <a:spcPts val="400"/>
-              </a:spcAft>
-              <a:defRPr sz="1100">
-                <a:solidFill>
-                  <a:srgbClr val="F8FAFC"/>
-                </a:solidFill>
-              </a:defRPr>
-            </a:pPr>
-            <a:r>
-              <a:t>• </a:t>
-            </a:r>
-          </a:p>
-          <a:p>
-            <a:pPr>
-              <a:spcAft>
-                <a:spcPts val="400"/>
-              </a:spcAft>
-              <a:defRPr sz="1100">
-                <a:solidFill>
-                  <a:srgbClr val="F8FAFC"/>
-                </a:solidFill>
-              </a:defRPr>
-            </a:pPr>
-            <a:r>
-              <a:t>• 🔗 Repository: github.com/Mohammed-Salman-Hussain/VitalSync-AI</a:t>
-            </a:r>
-          </a:p>
-          <a:p>
-            <a:pPr>
-              <a:spcAft>
-                <a:spcPts val="400"/>
-              </a:spcAft>
-              <a:defRPr sz="1100">
-                <a:solidFill>
-                  <a:srgbClr val="F8FAFC"/>
-                </a:solidFill>
-              </a:defRPr>
-            </a:pPr>
-            <a:r>
-              <a:t>• 📄 Concept Note: CONCEPT_NOTE.md</a:t>
-            </a:r>
-          </a:p>
-          <a:p>
-            <a:pPr>
-              <a:spcAft>
-                <a:spcPts val="400"/>
-              </a:spcAft>
-              <a:defRPr sz="1100">
-                <a:solidFill>
-                  <a:srgbClr val="F8FAFC"/>
-                </a:solidFill>
-              </a:defRPr>
-            </a:pPr>
-            <a:r>
-              <a:t>• 📊 Lean Canvas: LEAN_CANVAS.md</a:t>
-            </a:r>
-          </a:p>
-          <a:p>
-            <a:pPr>
-              <a:spcAft>
-                <a:spcPts val="400"/>
-              </a:spcAft>
-              <a:defRPr sz="1100">
-                <a:solidFill>
-                  <a:srgbClr val="F8FAFC"/>
-                </a:solidFill>
-              </a:defRPr>
-            </a:pPr>
-            <a:r>
-              <a:t>• 👨‍💻 Lead Innovator: Mohammed Salman Hussain</a:t>
-            </a:r>
-          </a:p>
-          <a:p>
-            <a:pPr>
-              <a:spcAft>
-                <a:spcPts val="400"/>
-              </a:spcAft>
-              <a:defRPr sz="1100">
-                <a:solidFill>
-                  <a:srgbClr val="F8FAFC"/>
-                </a:solidFill>
-              </a:defRPr>
-            </a:pPr>
-            <a:r>
-              <a:t>• ✉️ Email: salmanhussain1199@gmail.com</a:t>
+              <a:t>Deliverables &amp; Live Repository</a:t>
+            </a:r>
+          </a:p>
+          <a:p>
+            <a:pPr>
+              <a:spcAft>
+                <a:spcPts val="300"/>
+              </a:spcAft>
+              <a:defRPr sz="1050">
+                <a:solidFill>
+                  <a:srgbClr val="F8FAFC"/>
+                </a:solidFill>
+              </a:defRPr>
+            </a:pPr>
+            <a:r>
+              <a:t>• Production REST Server (&lt;30ms API) &amp; Glassmorphic Dashboard.</a:t>
+            </a:r>
+          </a:p>
+          <a:p>
+            <a:pPr>
+              <a:spcAft>
+                <a:spcPts val="300"/>
+              </a:spcAft>
+              <a:defRPr sz="1050">
+                <a:solidFill>
+                  <a:srgbClr val="F8FAFC"/>
+                </a:solidFill>
+              </a:defRPr>
+            </a:pPr>
+            <a:r>
+              <a:t>• Streamlit Pro UI with interactive What-If habit simulation.</a:t>
+            </a:r>
+          </a:p>
+          <a:p>
+            <a:pPr>
+              <a:spcAft>
+                <a:spcPts val="300"/>
+              </a:spcAft>
+              <a:defRPr sz="1050">
+                <a:solidFill>
+                  <a:srgbClr val="F8FAFC"/>
+                </a:solidFill>
+              </a:defRPr>
+            </a:pPr>
+            <a:r>
+              <a:t>• 24/24 Automated Unit Tests passing in pytest.</a:t>
+            </a:r>
+          </a:p>
+          <a:p>
+            <a:pPr>
+              <a:spcAft>
+                <a:spcPts val="300"/>
+              </a:spcAft>
+              <a:defRPr sz="1050">
+                <a:solidFill>
+                  <a:srgbClr val="F8FAFC"/>
+                </a:solidFill>
+              </a:defRPr>
+            </a:pPr>
+            <a:r>
+              <a:t>• Single Combined Lean Canvas &amp; Concept Note PDF.</a:t>
+            </a:r>
+          </a:p>
+          <a:p>
+            <a:pPr>
+              <a:spcAft>
+                <a:spcPts val="300"/>
+              </a:spcAft>
+              <a:defRPr sz="1050">
+                <a:solidFill>
+                  <a:srgbClr val="F8FAFC"/>
+                </a:solidFill>
+              </a:defRPr>
+            </a:pPr>
+            <a:r>
+              <a:t>• GitHub: github.com/Mohammed-Salman-Hussain/VitalSync-AI</a:t>
+            </a:r>
+          </a:p>
+          <a:p>
+            <a:pPr>
+              <a:spcAft>
+                <a:spcPts val="300"/>
+              </a:spcAft>
+              <a:defRPr sz="1050">
+                <a:solidFill>
+                  <a:srgbClr val="F8FAFC"/>
+                </a:solidFill>
+              </a:defRPr>
+            </a:pPr>
+            <a:r>
+              <a:t>• Lead: Mohammed Salman Hussain (salmanhussain1199@gmail.com)</a:t>
             </a:r>
           </a:p>
         </p:txBody>
@@ -6394,7 +5268,7 @@
     <p:bg>
       <p:bgPr>
         <a:solidFill>
-          <a:srgbClr val="0F172A"/>
+          <a:srgbClr val="0A101D"/>
         </a:solidFill>
         <a:effectLst/>
       </p:bgPr>
@@ -6414,8 +5288,8 @@
         </p:nvSpPr>
         <p:spPr>
           <a:xfrm>
-            <a:off x="731520" y="365760"/>
-            <a:ext cx="10515600" cy="365760"/>
+            <a:off x="731520" y="320040"/>
+            <a:ext cx="10698480" cy="320040"/>
           </a:xfrm>
           <a:prstGeom prst="rect">
             <a:avLst/>
@@ -6436,7 +5310,7 @@
               </a:defRPr>
             </a:pPr>
             <a:r>
-              <a:t>IBM SKILLSBUILD MASTERCLASS 5 • UN SDG 3 (TARGET 3.4)</a:t>
+              <a:t>THE URGENT PROBLEM • UN SDG 3 CONTEXT</a:t>
             </a:r>
           </a:p>
         </p:txBody>
@@ -6449,8 +5323,8 @@
         </p:nvSpPr>
         <p:spPr>
           <a:xfrm>
-            <a:off x="731520" y="640080"/>
-            <a:ext cx="10515600" cy="640080"/>
+            <a:off x="731520" y="594360"/>
+            <a:ext cx="10698480" cy="640080"/>
           </a:xfrm>
           <a:prstGeom prst="rect">
             <a:avLst/>
@@ -6464,14 +5338,14 @@
           <a:lstStyle/>
           <a:p>
             <a:pPr>
-              <a:defRPr sz="2400" b="1">
-                <a:solidFill>
-                  <a:srgbClr val="F8FAFC"/>
-                </a:solidFill>
-              </a:defRPr>
-            </a:pPr>
-            <a:r>
-              <a:t>The Problem: The Cyberchondria Epidemic &amp; Digital Health Crisis</a:t>
+              <a:defRPr sz="2200" b="1">
+                <a:solidFill>
+                  <a:srgbClr val="F8FAFC"/>
+                </a:solidFill>
+              </a:defRPr>
+            </a:pPr>
+            <a:r>
+              <a:t>The Problem: The Cyberchondria Epidemic &amp; Modern Digital Burnout</a:t>
             </a:r>
           </a:p>
         </p:txBody>
@@ -6484,18 +5358,18 @@
         </p:nvSpPr>
         <p:spPr>
           <a:xfrm>
-            <a:off x="731520" y="1645920"/>
-            <a:ext cx="3291840" cy="4389120"/>
+            <a:off x="731520" y="1463040"/>
+            <a:ext cx="3328416" cy="4663440"/>
           </a:xfrm>
           <a:prstGeom prst="roundRect">
             <a:avLst/>
           </a:prstGeom>
           <a:solidFill>
-            <a:srgbClr val="1E293B"/>
+            <a:srgbClr val="131C31"/>
           </a:solidFill>
-          <a:ln w="12700">
+          <a:ln w="15240">
             <a:solidFill>
-              <a:srgbClr val="334155"/>
+              <a:srgbClr val="243352"/>
             </a:solidFill>
           </a:ln>
         </p:spPr>
@@ -6514,14 +5388,14 @@
           </a:fontRef>
         </p:style>
         <p:txBody>
-          <a:bodyPr rtlCol="0" anchor="ctr" wrap="square" lIns="182880" rIns="182880" tIns="182880" bIns="182880"/>
+          <a:bodyPr rtlCol="0" anchor="ctr" wrap="square" lIns="164592" rIns="164592" tIns="146304" bIns="146304"/>
           <a:lstStyle/>
           <a:p>
             <a:pPr algn="ctr">
               <a:spcAft>
-                <a:spcPts val="800"/>
-              </a:spcAft>
-              <a:defRPr sz="1400" b="1">
+                <a:spcPts val="600"/>
+              </a:spcAft>
+              <a:defRPr sz="1300" b="1">
                 <a:solidFill>
                   <a:srgbClr val="F59E0B"/>
                 </a:solidFill>
@@ -6534,54 +5408,54 @@
           <a:p>
             <a:pPr>
               <a:spcAft>
-                <a:spcPts val="400"/>
-              </a:spcAft>
-              <a:defRPr sz="1100">
-                <a:solidFill>
-                  <a:srgbClr val="F8FAFC"/>
-                </a:solidFill>
-              </a:defRPr>
-            </a:pPr>
-            <a:r>
-              <a:t>• Millions search common bodily signals: eyelid twitches, post-coffee heart thumping, 1.5kg scale jumps.</a:t>
-            </a:r>
-          </a:p>
-          <a:p>
-            <a:pPr>
-              <a:spcAft>
-                <a:spcPts val="400"/>
-              </a:spcAft>
-              <a:defRPr sz="1100">
-                <a:solidFill>
-                  <a:srgbClr val="F8FAFC"/>
-                </a:solidFill>
-              </a:defRPr>
-            </a:pPr>
-            <a:r>
-              <a:t>• Search engines rank catastrophic worst-case diagnoses (ALS, cardiac failure, renal collapse) to drive clicks.</a:t>
-            </a:r>
-          </a:p>
-          <a:p>
-            <a:pPr>
-              <a:spcAft>
-                <a:spcPts val="400"/>
-              </a:spcAft>
-              <a:defRPr sz="1100">
-                <a:solidFill>
-                  <a:srgbClr val="F8FAFC"/>
-                </a:solidFill>
-              </a:defRPr>
-            </a:pPr>
-            <a:r>
-              <a:t>• Triggers acute health anxiety, elevates cortisol and blood pressure, causing more physical symptoms.</a:t>
-            </a:r>
-          </a:p>
-          <a:p>
-            <a:pPr>
-              <a:spcAft>
-                <a:spcPts val="400"/>
-              </a:spcAft>
-              <a:defRPr sz="1100">
+                <a:spcPts val="300"/>
+              </a:spcAft>
+              <a:defRPr sz="1050">
+                <a:solidFill>
+                  <a:srgbClr val="F8FAFC"/>
+                </a:solidFill>
+              </a:defRPr>
+            </a:pPr>
+            <a:r>
+              <a:t>• Millions search common bodily signals: eyelid twitches, post-coffee heart palpitations, or 1.5kg scale jumps.</a:t>
+            </a:r>
+          </a:p>
+          <a:p>
+            <a:pPr>
+              <a:spcAft>
+                <a:spcPts val="300"/>
+              </a:spcAft>
+              <a:defRPr sz="1050">
+                <a:solidFill>
+                  <a:srgbClr val="F8FAFC"/>
+                </a:solidFill>
+              </a:defRPr>
+            </a:pPr>
+            <a:r>
+              <a:t>• Ad-driven search engines rank catastrophic worst-case diagnoses (ALS, cardiac failure, renal collapse) to drive page views.</a:t>
+            </a:r>
+          </a:p>
+          <a:p>
+            <a:pPr>
+              <a:spcAft>
+                <a:spcPts val="300"/>
+              </a:spcAft>
+              <a:defRPr sz="1050">
+                <a:solidFill>
+                  <a:srgbClr val="F8FAFC"/>
+                </a:solidFill>
+              </a:defRPr>
+            </a:pPr>
+            <a:r>
+              <a:t>• Triggers acute health anxiety, elevates sympathetic cortisol &amp; blood pressure, causing more physical symptoms.</a:t>
+            </a:r>
+          </a:p>
+          <a:p>
+            <a:pPr>
+              <a:spcAft>
+                <a:spcPts val="300"/>
+              </a:spcAft>
+              <a:defRPr sz="1050">
                 <a:solidFill>
                   <a:srgbClr val="F8FAFC"/>
                 </a:solidFill>
@@ -6601,18 +5475,18 @@
         </p:nvSpPr>
         <p:spPr>
           <a:xfrm>
-            <a:off x="4389120" y="1645920"/>
-            <a:ext cx="3291840" cy="4389120"/>
+            <a:off x="4425696" y="1463040"/>
+            <a:ext cx="3328416" cy="4663440"/>
           </a:xfrm>
           <a:prstGeom prst="roundRect">
             <a:avLst/>
           </a:prstGeom>
           <a:solidFill>
-            <a:srgbClr val="1E293B"/>
+            <a:srgbClr val="131C31"/>
           </a:solidFill>
-          <a:ln w="12700">
+          <a:ln w="15240">
             <a:solidFill>
-              <a:srgbClr val="334155"/>
+              <a:srgbClr val="243352"/>
             </a:solidFill>
           </a:ln>
         </p:spPr>
@@ -6631,81 +5505,81 @@
           </a:fontRef>
         </p:style>
         <p:txBody>
-          <a:bodyPr rtlCol="0" anchor="ctr" wrap="square" lIns="182880" rIns="182880" tIns="182880" bIns="182880"/>
+          <a:bodyPr rtlCol="0" anchor="ctr" wrap="square" lIns="164592" rIns="164592" tIns="146304" bIns="146304"/>
           <a:lstStyle/>
           <a:p>
             <a:pPr algn="ctr">
               <a:spcAft>
-                <a:spcPts val="800"/>
-              </a:spcAft>
-              <a:defRPr sz="1400" b="1">
+                <a:spcPts val="600"/>
+              </a:spcAft>
+              <a:defRPr sz="1300" b="1">
                 <a:solidFill>
                   <a:srgbClr val="38BDF8"/>
                 </a:solidFill>
               </a:defRPr>
             </a:pPr>
             <a:r>
-              <a:t>2. Bedtime Screen Fatigue</a:t>
-            </a:r>
-          </a:p>
-          <a:p>
-            <a:pPr>
-              <a:spcAft>
-                <a:spcPts val="400"/>
-              </a:spcAft>
-              <a:defRPr sz="1100">
-                <a:solidFill>
-                  <a:srgbClr val="F8FAFC"/>
-                </a:solidFill>
-              </a:defRPr>
-            </a:pPr>
-            <a:r>
-              <a:t>• Average worker/student spends 7-10 hours on screens + 45-90 min in bed doomscrolling.</a:t>
-            </a:r>
-          </a:p>
-          <a:p>
-            <a:pPr>
-              <a:spcAft>
-                <a:spcPts val="400"/>
-              </a:spcAft>
-              <a:defRPr sz="1100">
-                <a:solidFill>
-                  <a:srgbClr val="F8FAFC"/>
-                </a:solidFill>
-              </a:defRPr>
-            </a:pPr>
-            <a:r>
-              <a:t>• Blue light suppresses melatonin; late-afternoon caffeine remains active due to 5.5h half-life.</a:t>
-            </a:r>
-          </a:p>
-          <a:p>
-            <a:pPr>
-              <a:spcAft>
-                <a:spcPts val="400"/>
-              </a:spcAft>
-              <a:defRPr sz="1100">
-                <a:solidFill>
-                  <a:srgbClr val="F8FAFC"/>
-                </a:solidFill>
-              </a:defRPr>
-            </a:pPr>
-            <a:r>
-              <a:t>• Leads to severe sleep latency (30-60 min), chronic sleep debt, and daytime cognitive exhaustion.</a:t>
-            </a:r>
-          </a:p>
-          <a:p>
-            <a:pPr>
-              <a:spcAft>
-                <a:spcPts val="400"/>
-              </a:spcAft>
-              <a:defRPr sz="1100">
-                <a:solidFill>
-                  <a:srgbClr val="F8FAFC"/>
-                </a:solidFill>
-              </a:defRPr>
-            </a:pPr>
-            <a:r>
-              <a:t>• Accelerates digital burnout and sub-clinical metabolic dysfunction.</a:t>
+              <a:t>2. Bedtime Screen Fatigue &amp; Sleep Debt</a:t>
+            </a:r>
+          </a:p>
+          <a:p>
+            <a:pPr>
+              <a:spcAft>
+                <a:spcPts val="300"/>
+              </a:spcAft>
+              <a:defRPr sz="1050">
+                <a:solidFill>
+                  <a:srgbClr val="F8FAFC"/>
+                </a:solidFill>
+              </a:defRPr>
+            </a:pPr>
+            <a:r>
+              <a:t>• Average knowledge worker spends 7-10 hours on screens plus 45-90 minutes doomscrolling in bed.</a:t>
+            </a:r>
+          </a:p>
+          <a:p>
+            <a:pPr>
+              <a:spcAft>
+                <a:spcPts val="300"/>
+              </a:spcAft>
+              <a:defRPr sz="1050">
+                <a:solidFill>
+                  <a:srgbClr val="F8FAFC"/>
+                </a:solidFill>
+              </a:defRPr>
+            </a:pPr>
+            <a:r>
+              <a:t>• Short-wavelength blue light suppresses pineal melatonin production.</a:t>
+            </a:r>
+          </a:p>
+          <a:p>
+            <a:pPr>
+              <a:spcAft>
+                <a:spcPts val="300"/>
+              </a:spcAft>
+              <a:defRPr sz="1050">
+                <a:solidFill>
+                  <a:srgbClr val="F8FAFC"/>
+                </a:solidFill>
+              </a:defRPr>
+            </a:pPr>
+            <a:r>
+              <a:t>• Late-afternoon caffeine remains biologically active due to its 5.5-hour half-life (t_1/2 = 5.5h).</a:t>
+            </a:r>
+          </a:p>
+          <a:p>
+            <a:pPr>
+              <a:spcAft>
+                <a:spcPts val="300"/>
+              </a:spcAft>
+              <a:defRPr sz="1050">
+                <a:solidFill>
+                  <a:srgbClr val="F8FAFC"/>
+                </a:solidFill>
+              </a:defRPr>
+            </a:pPr>
+            <a:r>
+              <a:t>• Causes severe sleep latency (30-60 min), chronic sleep debt, and accelerates digital burnout and metabolic decline.</a:t>
             </a:r>
           </a:p>
         </p:txBody>
@@ -6718,18 +5592,18 @@
         </p:nvSpPr>
         <p:spPr>
           <a:xfrm>
-            <a:off x="8046720" y="1645920"/>
-            <a:ext cx="3291840" cy="4389120"/>
+            <a:off x="8119872" y="1463040"/>
+            <a:ext cx="3328416" cy="4663440"/>
           </a:xfrm>
           <a:prstGeom prst="roundRect">
             <a:avLst/>
           </a:prstGeom>
           <a:solidFill>
-            <a:srgbClr val="1E293B"/>
+            <a:srgbClr val="131C31"/>
           </a:solidFill>
-          <a:ln w="12700">
+          <a:ln w="15240">
             <a:solidFill>
-              <a:srgbClr val="334155"/>
+              <a:srgbClr val="243352"/>
             </a:solidFill>
           </a:ln>
         </p:spPr>
@@ -6748,81 +5622,81 @@
           </a:fontRef>
         </p:style>
         <p:txBody>
-          <a:bodyPr rtlCol="0" anchor="ctr" wrap="square" lIns="182880" rIns="182880" tIns="182880" bIns="182880"/>
+          <a:bodyPr rtlCol="0" anchor="ctr" wrap="square" lIns="164592" rIns="164592" tIns="146304" bIns="146304"/>
           <a:lstStyle/>
           <a:p>
             <a:pPr algn="ctr">
               <a:spcAft>
-                <a:spcPts val="800"/>
-              </a:spcAft>
-              <a:defRPr sz="1400" b="1">
-                <a:solidFill>
-                  <a:srgbClr val="A855F7"/>
-                </a:solidFill>
-              </a:defRPr>
-            </a:pPr>
-            <a:r>
-              <a:t>3. Cloud Surveillance &amp; AI Lies</a:t>
-            </a:r>
-          </a:p>
-          <a:p>
-            <a:pPr>
-              <a:spcAft>
-                <a:spcPts val="400"/>
-              </a:spcAft>
-              <a:defRPr sz="1100">
-                <a:solidFill>
-                  <a:srgbClr val="F8FAFC"/>
-                </a:solidFill>
-              </a:defRPr>
-            </a:pPr>
-            <a:r>
-              <a:t>• Commercial fitness trackers upload sensitive biometrics to third-party ad brokers.</a:t>
-            </a:r>
-          </a:p>
-          <a:p>
-            <a:pPr>
-              <a:spcAft>
-                <a:spcPts val="400"/>
-              </a:spcAft>
-              <a:defRPr sz="1100">
-                <a:solidFill>
-                  <a:srgbClr val="F8FAFC"/>
-                </a:solidFill>
-              </a:defRPr>
-            </a:pPr>
-            <a:r>
-              <a:t>• Users hesitate to log real health conditions due to privacy fears.</a:t>
-            </a:r>
-          </a:p>
-          <a:p>
-            <a:pPr>
-              <a:spcAft>
-                <a:spcPts val="400"/>
-              </a:spcAft>
-              <a:defRPr sz="1100">
-                <a:solidFill>
-                  <a:srgbClr val="F8FAFC"/>
-                </a:solidFill>
-              </a:defRPr>
-            </a:pPr>
-            <a:r>
-              <a:t>• Cloud LLMs act as ungrounded black boxes, hallucinating metabolic equations and contradictory diets.</a:t>
-            </a:r>
-          </a:p>
-          <a:p>
-            <a:pPr>
-              <a:spcAft>
-                <a:spcPts val="400"/>
-              </a:spcAft>
-              <a:defRPr sz="1100">
-                <a:solidFill>
-                  <a:srgbClr val="F8FAFC"/>
-                </a:solidFill>
-              </a:defRPr>
-            </a:pPr>
-            <a:r>
-              <a:t>• Zero clinical guardrails or emergency override capabilities.</a:t>
+                <a:spcPts val="600"/>
+              </a:spcAft>
+              <a:defRPr sz="1300" b="1">
+                <a:solidFill>
+                  <a:srgbClr val="EF4444"/>
+                </a:solidFill>
+              </a:defRPr>
+            </a:pPr>
+            <a:r>
+              <a:t>3. Cloud Surveillance &amp; AI Hallucinations</a:t>
+            </a:r>
+          </a:p>
+          <a:p>
+            <a:pPr>
+              <a:spcAft>
+                <a:spcPts val="300"/>
+              </a:spcAft>
+              <a:defRPr sz="1050">
+                <a:solidFill>
+                  <a:srgbClr val="F8FAFC"/>
+                </a:solidFill>
+              </a:defRPr>
+            </a:pPr>
+            <a:r>
+              <a:t>• Commercial fitness trackers upload sensitive biometrics to third-party cloud brokers and advertisers.</a:t>
+            </a:r>
+          </a:p>
+          <a:p>
+            <a:pPr>
+              <a:spcAft>
+                <a:spcPts val="300"/>
+              </a:spcAft>
+              <a:defRPr sz="1050">
+                <a:solidFill>
+                  <a:srgbClr val="F8FAFC"/>
+                </a:solidFill>
+              </a:defRPr>
+            </a:pPr>
+            <a:r>
+              <a:t>• Users hesitate to log real health conditions due to legitimate privacy fears.</a:t>
+            </a:r>
+          </a:p>
+          <a:p>
+            <a:pPr>
+              <a:spcAft>
+                <a:spcPts val="300"/>
+              </a:spcAft>
+              <a:defRPr sz="1050">
+                <a:solidFill>
+                  <a:srgbClr val="F8FAFC"/>
+                </a:solidFill>
+              </a:defRPr>
+            </a:pPr>
+            <a:r>
+              <a:t>• Cloud LLMs act as ungrounded black boxes, hallucinating dietary targets and contradictory medical claims.</a:t>
+            </a:r>
+          </a:p>
+          <a:p>
+            <a:pPr>
+              <a:spcAft>
+                <a:spcPts val="300"/>
+              </a:spcAft>
+              <a:defRPr sz="1050">
+                <a:solidFill>
+                  <a:srgbClr val="F8FAFC"/>
+                </a:solidFill>
+              </a:defRPr>
+            </a:pPr>
+            <a:r>
+              <a:t>• Zero clinical guardrails or deterministic emergency override protocols.</a:t>
             </a:r>
           </a:p>
         </p:txBody>
@@ -6841,7 +5715,7 @@
     <p:bg>
       <p:bgPr>
         <a:solidFill>
-          <a:srgbClr val="0F172A"/>
+          <a:srgbClr val="0A101D"/>
         </a:solidFill>
         <a:effectLst/>
       </p:bgPr>
@@ -6861,8 +5735,8 @@
         </p:nvSpPr>
         <p:spPr>
           <a:xfrm>
-            <a:off x="731520" y="365760"/>
-            <a:ext cx="10515600" cy="365760"/>
+            <a:off x="731520" y="320040"/>
+            <a:ext cx="10698480" cy="320040"/>
           </a:xfrm>
           <a:prstGeom prst="rect">
             <a:avLst/>
@@ -6883,7 +5757,7 @@
               </a:defRPr>
             </a:pPr>
             <a:r>
-              <a:t>IBM SKILLSBUILD MASTERCLASS 5 • UN SDG 3 (TARGET 3.4)</a:t>
+              <a:t>COMPETITIVE LANDSCAPE &amp; MARKET GAPS</a:t>
             </a:r>
           </a:p>
         </p:txBody>
@@ -6896,8 +5770,8 @@
         </p:nvSpPr>
         <p:spPr>
           <a:xfrm>
-            <a:off x="731520" y="640080"/>
-            <a:ext cx="10515600" cy="640080"/>
+            <a:off x="731520" y="594360"/>
+            <a:ext cx="10698480" cy="640080"/>
           </a:xfrm>
           <a:prstGeom prst="rect">
             <a:avLst/>
@@ -6911,7 +5785,7 @@
           <a:lstStyle/>
           <a:p>
             <a:pPr>
-              <a:defRPr sz="2400" b="1">
+              <a:defRPr sz="2200" b="1">
                 <a:solidFill>
                   <a:srgbClr val="F8FAFC"/>
                 </a:solidFill>
@@ -6931,18 +5805,18 @@
         </p:nvSpPr>
         <p:spPr>
           <a:xfrm>
-            <a:off x="731520" y="1645920"/>
-            <a:ext cx="5120640" cy="2103120"/>
+            <a:off x="731520" y="1463040"/>
+            <a:ext cx="5120640" cy="2240280"/>
           </a:xfrm>
           <a:prstGeom prst="roundRect">
             <a:avLst/>
           </a:prstGeom>
           <a:solidFill>
-            <a:srgbClr val="1E293B"/>
+            <a:srgbClr val="131C31"/>
           </a:solidFill>
-          <a:ln w="12700">
+          <a:ln w="15240">
             <a:solidFill>
-              <a:srgbClr val="334155"/>
+              <a:srgbClr val="243352"/>
             </a:solidFill>
           </a:ln>
         </p:spPr>
@@ -6961,29 +5835,29 @@
           </a:fontRef>
         </p:style>
         <p:txBody>
-          <a:bodyPr rtlCol="0" anchor="ctr" wrap="square" lIns="182880" rIns="182880" tIns="182880" bIns="182880"/>
+          <a:bodyPr rtlCol="0" anchor="ctr" wrap="square" lIns="164592" rIns="164592" tIns="146304" bIns="146304"/>
           <a:lstStyle/>
           <a:p>
             <a:pPr algn="ctr">
               <a:spcAft>
-                <a:spcPts val="800"/>
-              </a:spcAft>
-              <a:defRPr sz="1400" b="1">
+                <a:spcPts val="600"/>
+              </a:spcAft>
+              <a:defRPr sz="1300" b="1">
                 <a:solidFill>
                   <a:srgbClr val="F59E0B"/>
                 </a:solidFill>
               </a:defRPr>
             </a:pPr>
             <a:r>
-              <a:t>❌ Alarmist Search Engines (Google / WebMD)</a:t>
-            </a:r>
-          </a:p>
-          <a:p>
-            <a:pPr>
-              <a:spcAft>
-                <a:spcPts val="400"/>
-              </a:spcAft>
-              <a:defRPr sz="1100">
+              <a:t>❌ Search Engines (Google / WebMD)</a:t>
+            </a:r>
+          </a:p>
+          <a:p>
+            <a:pPr>
+              <a:spcAft>
+                <a:spcPts val="300"/>
+              </a:spcAft>
+              <a:defRPr sz="1050">
                 <a:solidFill>
                   <a:srgbClr val="F8FAFC"/>
                 </a:solidFill>
@@ -6996,31 +5870,31 @@
           <a:p>
             <a:pPr>
               <a:spcAft>
-                <a:spcPts val="400"/>
-              </a:spcAft>
-              <a:defRPr sz="1100">
-                <a:solidFill>
-                  <a:srgbClr val="F8FAFC"/>
-                </a:solidFill>
-              </a:defRPr>
-            </a:pPr>
-            <a:r>
-              <a:t>• No concept of user vitals, caffeine clearance, or hydration context.</a:t>
-            </a:r>
-          </a:p>
-          <a:p>
-            <a:pPr>
-              <a:spcAft>
-                <a:spcPts val="400"/>
-              </a:spcAft>
-              <a:defRPr sz="1100">
-                <a:solidFill>
-                  <a:srgbClr val="F8FAFC"/>
-                </a:solidFill>
-              </a:defRPr>
-            </a:pPr>
-            <a:r>
-              <a:t>• Converts benign muscle twitches into acute psychiatric health anxiety.</a:t>
+                <a:spcPts val="300"/>
+              </a:spcAft>
+              <a:defRPr sz="1050">
+                <a:solidFill>
+                  <a:srgbClr val="F8FAFC"/>
+                </a:solidFill>
+              </a:defRPr>
+            </a:pPr>
+            <a:r>
+              <a:t>• Zero awareness of user vitals, caffeine clearance, or hydration context.</a:t>
+            </a:r>
+          </a:p>
+          <a:p>
+            <a:pPr>
+              <a:spcAft>
+                <a:spcPts val="300"/>
+              </a:spcAft>
+              <a:defRPr sz="1050">
+                <a:solidFill>
+                  <a:srgbClr val="F8FAFC"/>
+                </a:solidFill>
+              </a:defRPr>
+            </a:pPr>
+            <a:r>
+              <a:t>• Converts harmless muscle twitches into acute psychiatric health anxiety.</a:t>
             </a:r>
           </a:p>
         </p:txBody>
@@ -7033,18 +5907,18 @@
         </p:nvSpPr>
         <p:spPr>
           <a:xfrm>
-            <a:off x="6217920" y="1645920"/>
-            <a:ext cx="5120640" cy="2103120"/>
+            <a:off x="6217920" y="1463040"/>
+            <a:ext cx="5120640" cy="2240280"/>
           </a:xfrm>
           <a:prstGeom prst="roundRect">
             <a:avLst/>
           </a:prstGeom>
           <a:solidFill>
-            <a:srgbClr val="1E293B"/>
+            <a:srgbClr val="131C31"/>
           </a:solidFill>
-          <a:ln w="12700">
+          <a:ln w="15240">
             <a:solidFill>
-              <a:srgbClr val="334155"/>
+              <a:srgbClr val="243352"/>
             </a:solidFill>
           </a:ln>
         </p:spPr>
@@ -7063,14 +5937,14 @@
           </a:fontRef>
         </p:style>
         <p:txBody>
-          <a:bodyPr rtlCol="0" anchor="ctr" wrap="square" lIns="182880" rIns="182880" tIns="182880" bIns="182880"/>
+          <a:bodyPr rtlCol="0" anchor="ctr" wrap="square" lIns="164592" rIns="164592" tIns="146304" bIns="146304"/>
           <a:lstStyle/>
           <a:p>
             <a:pPr algn="ctr">
               <a:spcAft>
-                <a:spcPts val="800"/>
-              </a:spcAft>
-              <a:defRPr sz="1400" b="1">
+                <a:spcPts val="600"/>
+              </a:spcAft>
+              <a:defRPr sz="1300" b="1">
                 <a:solidFill>
                   <a:srgbClr val="38BDF8"/>
                 </a:solidFill>
@@ -7083,24 +5957,24 @@
           <a:p>
             <a:pPr>
               <a:spcAft>
-                <a:spcPts val="400"/>
-              </a:spcAft>
-              <a:defRPr sz="1100">
-                <a:solidFill>
-                  <a:srgbClr val="F8FAFC"/>
-                </a:solidFill>
-              </a:defRPr>
-            </a:pPr>
-            <a:r>
-              <a:t>• Siloed calculators for calories, macros, TDEE, and sleep debt that never talk.</a:t>
-            </a:r>
-          </a:p>
-          <a:p>
-            <a:pPr>
-              <a:spcAft>
-                <a:spcPts val="400"/>
-              </a:spcAft>
-              <a:defRPr sz="1100">
+                <a:spcPts val="300"/>
+              </a:spcAft>
+              <a:defRPr sz="1050">
+                <a:solidFill>
+                  <a:srgbClr val="F8FAFC"/>
+                </a:solidFill>
+              </a:defRPr>
+            </a:pPr>
+            <a:r>
+              <a:t>• Siloed calculators for calories, macros, TDEE, and sleep debt that never communicate.</a:t>
+            </a:r>
+          </a:p>
+          <a:p>
+            <a:pPr>
+              <a:spcAft>
+                <a:spcPts val="300"/>
+              </a:spcAft>
+              <a:defRPr sz="1050">
                 <a:solidFill>
                   <a:srgbClr val="F8FAFC"/>
                 </a:solidFill>
@@ -7113,16 +5987,16 @@
           <a:p>
             <a:pPr>
               <a:spcAft>
-                <a:spcPts val="400"/>
-              </a:spcAft>
-              <a:defRPr sz="1100">
-                <a:solidFill>
-                  <a:srgbClr val="F8FAFC"/>
-                </a:solidFill>
-              </a:defRPr>
-            </a:pPr>
-            <a:r>
-              <a:t>• Forces users to manually synthesize conflicting data across 5 websites.</a:t>
+                <a:spcPts val="300"/>
+              </a:spcAft>
+              <a:defRPr sz="1050">
+                <a:solidFill>
+                  <a:srgbClr val="F8FAFC"/>
+                </a:solidFill>
+              </a:defRPr>
+            </a:pPr>
+            <a:r>
+              <a:t>• Forces users to manually synthesize conflicting advice across 5 separate websites.</a:t>
             </a:r>
           </a:p>
         </p:txBody>
@@ -7135,18 +6009,18 @@
         </p:nvSpPr>
         <p:spPr>
           <a:xfrm>
-            <a:off x="731520" y="4023360"/>
-            <a:ext cx="5120640" cy="2194560"/>
+            <a:off x="731520" y="3931920"/>
+            <a:ext cx="5120640" cy="2240280"/>
           </a:xfrm>
           <a:prstGeom prst="roundRect">
             <a:avLst/>
           </a:prstGeom>
           <a:solidFill>
-            <a:srgbClr val="1E293B"/>
+            <a:srgbClr val="131C31"/>
           </a:solidFill>
-          <a:ln w="12700">
+          <a:ln w="15240">
             <a:solidFill>
-              <a:srgbClr val="334155"/>
+              <a:srgbClr val="243352"/>
             </a:solidFill>
           </a:ln>
         </p:spPr>
@@ -7165,16 +6039,16 @@
           </a:fontRef>
         </p:style>
         <p:txBody>
-          <a:bodyPr rtlCol="0" anchor="ctr" wrap="square" lIns="182880" rIns="182880" tIns="182880" bIns="182880"/>
+          <a:bodyPr rtlCol="0" anchor="ctr" wrap="square" lIns="164592" rIns="164592" tIns="146304" bIns="146304"/>
           <a:lstStyle/>
           <a:p>
             <a:pPr algn="ctr">
               <a:spcAft>
-                <a:spcPts val="800"/>
-              </a:spcAft>
-              <a:defRPr sz="1400" b="1">
-                <a:solidFill>
-                  <a:srgbClr val="A855F7"/>
+                <a:spcPts val="600"/>
+              </a:spcAft>
+              <a:defRPr sz="1300" b="1">
+                <a:solidFill>
+                  <a:srgbClr val="EF4444"/>
                 </a:solidFill>
               </a:defRPr>
             </a:pPr>
@@ -7185,9 +6059,9 @@
           <a:p>
             <a:pPr>
               <a:spcAft>
-                <a:spcPts val="400"/>
-              </a:spcAft>
-              <a:defRPr sz="1100">
+                <a:spcPts val="300"/>
+              </a:spcAft>
+              <a:defRPr sz="1050">
                 <a:solidFill>
                   <a:srgbClr val="F8FAFC"/>
                 </a:solidFill>
@@ -7200,9 +6074,9 @@
           <a:p>
             <a:pPr>
               <a:spcAft>
-                <a:spcPts val="400"/>
-              </a:spcAft>
-              <a:defRPr sz="1100">
+                <a:spcPts val="300"/>
+              </a:spcAft>
+              <a:defRPr sz="1050">
                 <a:solidFill>
                   <a:srgbClr val="F8FAFC"/>
                 </a:solidFill>
@@ -7215,9 +6089,9 @@
           <a:p>
             <a:pPr>
               <a:spcAft>
-                <a:spcPts val="400"/>
-              </a:spcAft>
-              <a:defRPr sz="1100">
+                <a:spcPts val="300"/>
+              </a:spcAft>
+              <a:defRPr sz="1050">
                 <a:solidFill>
                   <a:srgbClr val="F8FAFC"/>
                 </a:solidFill>
@@ -7237,18 +6111,18 @@
         </p:nvSpPr>
         <p:spPr>
           <a:xfrm>
-            <a:off x="6217920" y="4023360"/>
-            <a:ext cx="5120640" cy="2194560"/>
+            <a:off x="6217920" y="3931920"/>
+            <a:ext cx="5120640" cy="2240280"/>
           </a:xfrm>
           <a:prstGeom prst="roundRect">
             <a:avLst/>
           </a:prstGeom>
           <a:solidFill>
-            <a:srgbClr val="1E293B"/>
+            <a:srgbClr val="131C31"/>
           </a:solidFill>
-          <a:ln w="12700">
+          <a:ln w="15240">
             <a:solidFill>
-              <a:srgbClr val="334155"/>
+              <a:srgbClr val="243352"/>
             </a:solidFill>
           </a:ln>
         </p:spPr>
@@ -7267,14 +6141,14 @@
           </a:fontRef>
         </p:style>
         <p:txBody>
-          <a:bodyPr rtlCol="0" anchor="ctr" wrap="square" lIns="182880" rIns="182880" tIns="182880" bIns="182880"/>
+          <a:bodyPr rtlCol="0" anchor="ctr" wrap="square" lIns="164592" rIns="164592" tIns="146304" bIns="146304"/>
           <a:lstStyle/>
           <a:p>
             <a:pPr algn="ctr">
               <a:spcAft>
-                <a:spcPts val="800"/>
-              </a:spcAft>
-              <a:defRPr sz="1400" b="1">
+                <a:spcPts val="600"/>
+              </a:spcAft>
+              <a:defRPr sz="1300" b="1">
                 <a:solidFill>
                   <a:srgbClr val="10B981"/>
                 </a:solidFill>
@@ -7287,9 +6161,9 @@
           <a:p>
             <a:pPr>
               <a:spcAft>
-                <a:spcPts val="400"/>
-              </a:spcAft>
-              <a:defRPr sz="1100">
+                <a:spcPts val="300"/>
+              </a:spcAft>
+              <a:defRPr sz="1050">
                 <a:solidFill>
                   <a:srgbClr val="F8FAFC"/>
                 </a:solidFill>
@@ -7302,9 +6176,9 @@
           <a:p>
             <a:pPr>
               <a:spcAft>
-                <a:spcPts val="400"/>
-              </a:spcAft>
-              <a:defRPr sz="1100">
+                <a:spcPts val="300"/>
+              </a:spcAft>
+              <a:defRPr sz="1050">
                 <a:solidFill>
                   <a:srgbClr val="F8FAFC"/>
                 </a:solidFill>
@@ -7317,9 +6191,9 @@
           <a:p>
             <a:pPr>
               <a:spcAft>
-                <a:spcPts val="400"/>
-              </a:spcAft>
-              <a:defRPr sz="1100">
+                <a:spcPts val="300"/>
+              </a:spcAft>
+              <a:defRPr sz="1050">
                 <a:solidFill>
                   <a:srgbClr val="F8FAFC"/>
                 </a:solidFill>
@@ -7345,7 +6219,7 @@
     <p:bg>
       <p:bgPr>
         <a:solidFill>
-          <a:srgbClr val="0F172A"/>
+          <a:srgbClr val="0A101D"/>
         </a:solidFill>
         <a:effectLst/>
       </p:bgPr>
@@ -7365,8 +6239,8 @@
         </p:nvSpPr>
         <p:spPr>
           <a:xfrm>
-            <a:off x="731520" y="365760"/>
-            <a:ext cx="10515600" cy="365760"/>
+            <a:off x="731520" y="320040"/>
+            <a:ext cx="10698480" cy="320040"/>
           </a:xfrm>
           <a:prstGeom prst="rect">
             <a:avLst/>
@@ -7387,7 +6261,7 @@
               </a:defRPr>
             </a:pPr>
             <a:r>
-              <a:t>IBM SKILLSBUILD MASTERCLASS 5 • UN SDG 3 (TARGET 3.4)</a:t>
+              <a:t>SYSTEM ARCHITECTURE &amp; CORE INNOVATION</a:t>
             </a:r>
           </a:p>
         </p:txBody>
@@ -7400,8 +6274,8 @@
         </p:nvSpPr>
         <p:spPr>
           <a:xfrm>
-            <a:off x="731520" y="640080"/>
-            <a:ext cx="10515600" cy="640080"/>
+            <a:off x="731520" y="594360"/>
+            <a:ext cx="10698480" cy="640080"/>
           </a:xfrm>
           <a:prstGeom prst="rect">
             <a:avLst/>
@@ -7415,14 +6289,14 @@
           <a:lstStyle/>
           <a:p>
             <a:pPr>
-              <a:defRPr sz="2400" b="1">
-                <a:solidFill>
-                  <a:srgbClr val="F8FAFC"/>
-                </a:solidFill>
-              </a:defRPr>
-            </a:pPr>
-            <a:r>
-              <a:t>Our Solution: VitalSync AI — The 4 Core Pillars</a:t>
+              <a:defRPr sz="2200" b="1">
+                <a:solidFill>
+                  <a:srgbClr val="F8FAFC"/>
+                </a:solidFill>
+              </a:defRPr>
+            </a:pPr>
+            <a:r>
+              <a:t>The Solution: Homogeneous Single-Payload Architecture</a:t>
             </a:r>
           </a:p>
         </p:txBody>
@@ -7435,18 +6309,18 @@
         </p:nvSpPr>
         <p:spPr>
           <a:xfrm>
-            <a:off x="731520" y="1645920"/>
-            <a:ext cx="5120640" cy="2103120"/>
+            <a:off x="731520" y="1463040"/>
+            <a:ext cx="5120640" cy="1417320"/>
           </a:xfrm>
           <a:prstGeom prst="roundRect">
             <a:avLst/>
           </a:prstGeom>
           <a:solidFill>
-            <a:srgbClr val="1E293B"/>
+            <a:srgbClr val="131C31"/>
           </a:solidFill>
-          <a:ln w="12700">
+          <a:ln w="15240">
             <a:solidFill>
-              <a:srgbClr val="334155"/>
+              <a:srgbClr val="243352"/>
             </a:solidFill>
           </a:ln>
         </p:spPr>
@@ -7465,81 +6339,36 @@
           </a:fontRef>
         </p:style>
         <p:txBody>
-          <a:bodyPr rtlCol="0" anchor="ctr" wrap="square" lIns="182880" rIns="182880" tIns="182880" bIns="182880"/>
+          <a:bodyPr rtlCol="0" anchor="ctr" wrap="square" lIns="164592" rIns="164592" tIns="146304" bIns="146304"/>
           <a:lstStyle/>
           <a:p>
             <a:pPr algn="ctr">
               <a:spcAft>
-                <a:spcPts val="800"/>
-              </a:spcAft>
-              <a:defRPr sz="1400" b="1">
-                <a:solidFill>
-                  <a:srgbClr val="10B981"/>
-                </a:solidFill>
-              </a:defRPr>
-            </a:pPr>
-            <a:r>
-              <a:t>1. Zero-Hallucination Biophysics</a:t>
-            </a:r>
-          </a:p>
-          <a:p>
-            <a:pPr>
-              <a:spcAft>
-                <a:spcPts val="400"/>
-              </a:spcAft>
-              <a:defRPr sz="1100">
-                <a:solidFill>
-                  <a:srgbClr val="F8FAFC"/>
-                </a:solidFill>
-              </a:defRPr>
-            </a:pPr>
-            <a:r>
-              <a:t>• All calculations executed via validated Python algorithms before AI prompts.</a:t>
-            </a:r>
-          </a:p>
-          <a:p>
-            <a:pPr>
-              <a:spcAft>
-                <a:spcPts val="400"/>
-              </a:spcAft>
-              <a:defRPr sz="1100">
-                <a:solidFill>
-                  <a:srgbClr val="F8FAFC"/>
-                </a:solidFill>
-              </a:defRPr>
-            </a:pPr>
-            <a:r>
-              <a:t>• Mifflin-St Jeor &amp; Katch-McArdle BMR, dynamic macronutrient partitioning.</a:t>
-            </a:r>
-          </a:p>
-          <a:p>
-            <a:pPr>
-              <a:spcAft>
-                <a:spcPts val="400"/>
-              </a:spcAft>
-              <a:defRPr sz="1100">
-                <a:solidFill>
-                  <a:srgbClr val="F8FAFC"/>
-                </a:solidFill>
-              </a:defRPr>
-            </a:pPr>
-            <a:r>
-              <a:t>• First-order caffeine pharmacokinetics (t_1/2 = 5.5h) and scale glycogen-water bounds.</a:t>
-            </a:r>
-          </a:p>
-          <a:p>
-            <a:pPr>
-              <a:spcAft>
-                <a:spcPts val="400"/>
-              </a:spcAft>
-              <a:defRPr sz="1100">
-                <a:solidFill>
-                  <a:srgbClr val="F8FAFC"/>
-                </a:solidFill>
-              </a:defRPr>
-            </a:pPr>
-            <a:r>
-              <a:t>• The AI is physically prevented from inventing or guessing numbers.</a:t>
+                <a:spcPts val="600"/>
+              </a:spcAft>
+              <a:defRPr sz="1300" b="1">
+                <a:solidFill>
+                  <a:srgbClr val="38BDF8"/>
+                </a:solidFill>
+              </a:defRPr>
+            </a:pPr>
+            <a:r>
+              <a:t>Step 1: Unified Schema Contract</a:t>
+            </a:r>
+          </a:p>
+          <a:p>
+            <a:pPr>
+              <a:spcAft>
+                <a:spcPts val="300"/>
+              </a:spcAft>
+              <a:defRPr sz="1050">
+                <a:solidFill>
+                  <a:srgbClr val="F8FAFC"/>
+                </a:solidFill>
+              </a:defRPr>
+            </a:pPr>
+            <a:r>
+              <a:t>• UserHealthProfile Pydantic object validates biometrics, sleep, bedtime screens, caffeine, and symptoms.</a:t>
             </a:r>
           </a:p>
         </p:txBody>
@@ -7552,18 +6381,18 @@
         </p:nvSpPr>
         <p:spPr>
           <a:xfrm>
-            <a:off x="6217920" y="1645920"/>
-            <a:ext cx="5120640" cy="2103120"/>
+            <a:off x="6217920" y="1463040"/>
+            <a:ext cx="5120640" cy="1417320"/>
           </a:xfrm>
           <a:prstGeom prst="roundRect">
             <a:avLst/>
           </a:prstGeom>
           <a:solidFill>
-            <a:srgbClr val="1E293B"/>
+            <a:srgbClr val="131C31"/>
           </a:solidFill>
-          <a:ln w="12700">
+          <a:ln w="15240">
             <a:solidFill>
-              <a:srgbClr val="334155"/>
+              <a:srgbClr val="243352"/>
             </a:solidFill>
           </a:ln>
         </p:spPr>
@@ -7582,81 +6411,36 @@
           </a:fontRef>
         </p:style>
         <p:txBody>
-          <a:bodyPr rtlCol="0" anchor="ctr" wrap="square" lIns="182880" rIns="182880" tIns="182880" bIns="182880"/>
+          <a:bodyPr rtlCol="0" anchor="ctr" wrap="square" lIns="164592" rIns="164592" tIns="146304" bIns="146304"/>
           <a:lstStyle/>
           <a:p>
             <a:pPr algn="ctr">
               <a:spcAft>
-                <a:spcPts val="800"/>
-              </a:spcAft>
-              <a:defRPr sz="1400" b="1">
-                <a:solidFill>
-                  <a:srgbClr val="38BDF8"/>
-                </a:solidFill>
-              </a:defRPr>
-            </a:pPr>
-            <a:r>
-              <a:t>2. Anti-Cyberchondria Demystification</a:t>
-            </a:r>
-          </a:p>
-          <a:p>
-            <a:pPr>
-              <a:spcAft>
-                <a:spcPts val="400"/>
-              </a:spcAft>
-              <a:defRPr sz="1100">
-                <a:solidFill>
-                  <a:srgbClr val="F8FAFC"/>
-                </a:solidFill>
-              </a:defRPr>
-            </a:pPr>
-            <a:r>
-              <a:t>• Deconstructs harmless somatic signals with calm, cellular explanations.</a:t>
-            </a:r>
-          </a:p>
-          <a:p>
-            <a:pPr>
-              <a:spcAft>
-                <a:spcPts val="400"/>
-              </a:spcAft>
-              <a:defRPr sz="1100">
-                <a:solidFill>
-                  <a:srgbClr val="F8FAFC"/>
-                </a:solidFill>
-              </a:defRPr>
-            </a:pPr>
-            <a:r>
-              <a:t>• Explains post-coffee heart thumping as adenosine blockade, not heart disease.</a:t>
-            </a:r>
-          </a:p>
-          <a:p>
-            <a:pPr>
-              <a:spcAft>
-                <a:spcPts val="400"/>
-              </a:spcAft>
-              <a:defRPr sz="1100">
-                <a:solidFill>
-                  <a:srgbClr val="F8FAFC"/>
-                </a:solidFill>
-              </a:defRPr>
-            </a:pPr>
-            <a:r>
-              <a:t>• Explains 1.5kg scale jumps as glycogen-bound water (3-4g water per gram glycogen).</a:t>
-            </a:r>
-          </a:p>
-          <a:p>
-            <a:pPr>
-              <a:spcAft>
-                <a:spcPts val="400"/>
-              </a:spcAft>
-              <a:defRPr sz="1100">
-                <a:solidFill>
-                  <a:srgbClr val="F8FAFC"/>
-                </a:solidFill>
-              </a:defRPr>
-            </a:pPr>
-            <a:r>
-              <a:t>• Focuses on the Top 3 High-Impact Behavioral Levers to prevent cognitive overload.</a:t>
+                <a:spcPts val="600"/>
+              </a:spcAft>
+              <a:defRPr sz="1300" b="1">
+                <a:solidFill>
+                  <a:srgbClr val="10B981"/>
+                </a:solidFill>
+              </a:defRPr>
+            </a:pPr>
+            <a:r>
+              <a:t>Step 2: Biophysical Engine (&lt;1ms)</a:t>
+            </a:r>
+          </a:p>
+          <a:p>
+            <a:pPr>
+              <a:spcAft>
+                <a:spcPts val="300"/>
+              </a:spcAft>
+              <a:defRPr sz="1050">
+                <a:solidFill>
+                  <a:srgbClr val="F8FAFC"/>
+                </a:solidFill>
+              </a:defRPr>
+            </a:pPr>
+            <a:r>
+              <a:t>• Calculates Mifflin/Katch BMR, dynamic macro partitioning, caffeine clearance curve, and scale weight bounds.</a:t>
             </a:r>
           </a:p>
         </p:txBody>
@@ -7669,18 +6453,18 @@
         </p:nvSpPr>
         <p:spPr>
           <a:xfrm>
-            <a:off x="731520" y="4023360"/>
-            <a:ext cx="5120640" cy="2194560"/>
+            <a:off x="731520" y="3063240"/>
+            <a:ext cx="5120640" cy="1417320"/>
           </a:xfrm>
           <a:prstGeom prst="roundRect">
             <a:avLst/>
           </a:prstGeom>
           <a:solidFill>
-            <a:srgbClr val="1E293B"/>
+            <a:srgbClr val="131C31"/>
           </a:solidFill>
-          <a:ln w="12700">
+          <a:ln w="15240">
             <a:solidFill>
-              <a:srgbClr val="334155"/>
+              <a:srgbClr val="243352"/>
             </a:solidFill>
           </a:ln>
         </p:spPr>
@@ -7699,81 +6483,36 @@
           </a:fontRef>
         </p:style>
         <p:txBody>
-          <a:bodyPr rtlCol="0" anchor="ctr" wrap="square" lIns="182880" rIns="182880" tIns="182880" bIns="182880"/>
+          <a:bodyPr rtlCol="0" anchor="ctr" wrap="square" lIns="164592" rIns="164592" tIns="146304" bIns="146304"/>
           <a:lstStyle/>
           <a:p>
             <a:pPr algn="ctr">
               <a:spcAft>
-                <a:spcPts val="800"/>
-              </a:spcAft>
-              <a:defRPr sz="1400" b="1">
-                <a:solidFill>
-                  <a:srgbClr val="A855F7"/>
-                </a:solidFill>
-              </a:defRPr>
-            </a:pPr>
-            <a:r>
-              <a:t>3. 100% Localhost GPU Privacy</a:t>
-            </a:r>
-          </a:p>
-          <a:p>
-            <a:pPr>
-              <a:spcAft>
-                <a:spcPts val="400"/>
-              </a:spcAft>
-              <a:defRPr sz="1100">
-                <a:solidFill>
-                  <a:srgbClr val="F8FAFC"/>
-                </a:solidFill>
-              </a:defRPr>
-            </a:pPr>
-            <a:r>
-              <a:t>• Complete offline operation. Python ML + local Qwen LLM on GPU via Ollama.</a:t>
-            </a:r>
-          </a:p>
-          <a:p>
-            <a:pPr>
-              <a:spcAft>
-                <a:spcPts val="400"/>
-              </a:spcAft>
-              <a:defRPr sz="1100">
-                <a:solidFill>
-                  <a:srgbClr val="F8FAFC"/>
-                </a:solidFill>
-              </a:defRPr>
-            </a:pPr>
-            <a:r>
-              <a:t>• Zero cloud API subscriptions; zero external telemetry or tracking.</a:t>
-            </a:r>
-          </a:p>
-          <a:p>
-            <a:pPr>
-              <a:spcAft>
-                <a:spcPts val="400"/>
-              </a:spcAft>
-              <a:defRPr sz="1100">
-                <a:solidFill>
-                  <a:srgbClr val="F8FAFC"/>
-                </a:solidFill>
-              </a:defRPr>
-            </a:pPr>
-            <a:r>
-              <a:t>• Full data sovereignty: biometrics never leave the user's machine.</a:t>
-            </a:r>
-          </a:p>
-          <a:p>
-            <a:pPr>
-              <a:spcAft>
-                <a:spcPts val="400"/>
-              </a:spcAft>
-              <a:defRPr sz="1100">
-                <a:solidFill>
-                  <a:srgbClr val="F8FAFC"/>
-                </a:solidFill>
-              </a:defRPr>
-            </a:pPr>
-            <a:r>
-              <a:t>• Sub-30 millisecond complete diagnostic payload generation.</a:t>
+                <a:spcPts val="600"/>
+              </a:spcAft>
+              <a:defRPr sz="1300" b="1">
+                <a:solidFill>
+                  <a:srgbClr val="F59E0B"/>
+                </a:solidFill>
+              </a:defRPr>
+            </a:pPr>
+            <a:r>
+              <a:t>Step 3: 5 ML Ensembles (~4ms)</a:t>
+            </a:r>
+          </a:p>
+          <a:p>
+            <a:pPr>
+              <a:spcAft>
+                <a:spcPts val="300"/>
+              </a:spcAft>
+              <a:defRPr sz="1050">
+                <a:solidFill>
+                  <a:srgbClr val="F8FAFC"/>
+                </a:solidFill>
+              </a:defRPr>
+            </a:pPr>
+            <a:r>
+              <a:t>• Singleton MLInferenceEngine runs models for 10-Yr Cardio Risk, Pre-Diabetes, Sleep Latency, and Burnout.</a:t>
             </a:r>
           </a:p>
         </p:txBody>
@@ -7786,18 +6525,18 @@
         </p:nvSpPr>
         <p:spPr>
           <a:xfrm>
-            <a:off x="6217920" y="4023360"/>
-            <a:ext cx="5120640" cy="2194560"/>
+            <a:off x="6217920" y="3063240"/>
+            <a:ext cx="5120640" cy="1417320"/>
           </a:xfrm>
           <a:prstGeom prst="roundRect">
             <a:avLst/>
           </a:prstGeom>
           <a:solidFill>
-            <a:srgbClr val="1E293B"/>
+            <a:srgbClr val="131C31"/>
           </a:solidFill>
-          <a:ln w="12700">
+          <a:ln w="15240">
             <a:solidFill>
-              <a:srgbClr val="334155"/>
+              <a:srgbClr val="243352"/>
             </a:solidFill>
           </a:ln>
         </p:spPr>
@@ -7816,81 +6555,180 @@
           </a:fontRef>
         </p:style>
         <p:txBody>
-          <a:bodyPr rtlCol="0" anchor="ctr" wrap="square" lIns="182880" rIns="182880" tIns="182880" bIns="182880"/>
+          <a:bodyPr rtlCol="0" anchor="ctr" wrap="square" lIns="164592" rIns="164592" tIns="146304" bIns="146304"/>
           <a:lstStyle/>
           <a:p>
             <a:pPr algn="ctr">
               <a:spcAft>
-                <a:spcPts val="800"/>
-              </a:spcAft>
-              <a:defRPr sz="1400" b="1">
-                <a:solidFill>
-                  <a:srgbClr val="F59E0B"/>
-                </a:solidFill>
-              </a:defRPr>
-            </a:pPr>
-            <a:r>
-              <a:t>4. Clinical Guardrails &amp; Doctor Briefing</a:t>
-            </a:r>
-          </a:p>
-          <a:p>
-            <a:pPr>
-              <a:spcAft>
-                <a:spcPts val="400"/>
-              </a:spcAft>
-              <a:defRPr sz="1100">
-                <a:solidFill>
-                  <a:srgbClr val="F8FAFC"/>
-                </a:solidFill>
-              </a:defRPr>
-            </a:pPr>
-            <a:r>
-              <a:t>• Deterministic 3-tier triage engine (Green, Yellow, Red Emergency Override).</a:t>
-            </a:r>
-          </a:p>
-          <a:p>
-            <a:pPr>
-              <a:spcAft>
-                <a:spcPts val="400"/>
-              </a:spcAft>
-              <a:defRPr sz="1100">
-                <a:solidFill>
-                  <a:srgbClr val="F8FAFC"/>
-                </a:solidFill>
-              </a:defRPr>
-            </a:pPr>
-            <a:r>
-              <a:t>• AHA/ACC blood pressure classification halts lifestyle advice if BP &gt;= 180/120.</a:t>
-            </a:r>
-          </a:p>
-          <a:p>
-            <a:pPr>
-              <a:spcAft>
-                <a:spcPts val="400"/>
-              </a:spcAft>
-              <a:defRPr sz="1100">
-                <a:solidFill>
-                  <a:srgbClr val="F8FAFC"/>
-                </a:solidFill>
-              </a:defRPr>
-            </a:pPr>
-            <a:r>
-              <a:t>• 1-Click standardized Markdown/PDF Doctor Visit Briefing for primary care visits.</a:t>
-            </a:r>
-          </a:p>
-          <a:p>
-            <a:pPr>
-              <a:spcAft>
-                <a:spcPts val="400"/>
-              </a:spcAft>
-              <a:defRPr sz="1100">
-                <a:solidFill>
-                  <a:srgbClr val="F8FAFC"/>
-                </a:solidFill>
-              </a:defRPr>
-            </a:pPr>
-            <a:r>
-              <a:t>• Interactive What-If counterfactual simulator for real-time habit testing.</a:t>
+                <a:spcPts val="600"/>
+              </a:spcAft>
+              <a:defRPr sz="1300" b="1">
+                <a:solidFill>
+                  <a:srgbClr val="EF4444"/>
+                </a:solidFill>
+              </a:defRPr>
+            </a:pPr>
+            <a:r>
+              <a:t>Step 4: Clinical Safety Triage (&lt;0.1ms)</a:t>
+            </a:r>
+          </a:p>
+          <a:p>
+            <a:pPr>
+              <a:spcAft>
+                <a:spcPts val="300"/>
+              </a:spcAft>
+              <a:defRPr sz="1050">
+                <a:solidFill>
+                  <a:srgbClr val="F8FAFC"/>
+                </a:solidFill>
+              </a:defRPr>
+            </a:pPr>
+            <a:r>
+              <a:t>• Deterministic rules evaluate AHA blood pressure staging and red flags; assigns Green, Yellow, or Red Override.</a:t>
+            </a:r>
+          </a:p>
+        </p:txBody>
+      </p:sp>
+      <p:sp>
+        <p:nvSpPr>
+          <p:cNvPr id="8" name="Rounded Rectangle 7"/>
+          <p:cNvSpPr/>
+          <p:nvPr/>
+        </p:nvSpPr>
+        <p:spPr>
+          <a:xfrm>
+            <a:off x="731520" y="4663440"/>
+            <a:ext cx="5120640" cy="1417320"/>
+          </a:xfrm>
+          <a:prstGeom prst="roundRect">
+            <a:avLst/>
+          </a:prstGeom>
+          <a:solidFill>
+            <a:srgbClr val="131C31"/>
+          </a:solidFill>
+          <a:ln w="15240">
+            <a:solidFill>
+              <a:srgbClr val="243352"/>
+            </a:solidFill>
+          </a:ln>
+        </p:spPr>
+        <p:style>
+          <a:lnRef idx="1">
+            <a:schemeClr val="accent1"/>
+          </a:lnRef>
+          <a:fillRef idx="3">
+            <a:schemeClr val="accent1"/>
+          </a:fillRef>
+          <a:effectRef idx="2">
+            <a:schemeClr val="accent1"/>
+          </a:effectRef>
+          <a:fontRef idx="minor">
+            <a:schemeClr val="lt1"/>
+          </a:fontRef>
+        </p:style>
+        <p:txBody>
+          <a:bodyPr rtlCol="0" anchor="ctr" wrap="square" lIns="164592" rIns="164592" tIns="146304" bIns="146304"/>
+          <a:lstStyle/>
+          <a:p>
+            <a:pPr algn="ctr">
+              <a:spcAft>
+                <a:spcPts val="600"/>
+              </a:spcAft>
+              <a:defRPr sz="1300" b="1">
+                <a:solidFill>
+                  <a:srgbClr val="A855F7"/>
+                </a:solidFill>
+              </a:defRPr>
+            </a:pPr>
+            <a:r>
+              <a:t>Step 5: Master Diagnostic Payload</a:t>
+            </a:r>
+          </a:p>
+          <a:p>
+            <a:pPr>
+              <a:spcAft>
+                <a:spcPts val="300"/>
+              </a:spcAft>
+              <a:defRPr sz="1050">
+                <a:solidFill>
+                  <a:srgbClr val="F8FAFC"/>
+                </a:solidFill>
+              </a:defRPr>
+            </a:pPr>
+            <a:r>
+              <a:t>• Bundles all metrics, calibrated percentages, and flags into a tamper-proof ComprehensiveDiagnosticPayload JSON.</a:t>
+            </a:r>
+          </a:p>
+        </p:txBody>
+      </p:sp>
+      <p:sp>
+        <p:nvSpPr>
+          <p:cNvPr id="9" name="Rounded Rectangle 8"/>
+          <p:cNvSpPr/>
+          <p:nvPr/>
+        </p:nvSpPr>
+        <p:spPr>
+          <a:xfrm>
+            <a:off x="6217920" y="4663440"/>
+            <a:ext cx="5120640" cy="1417320"/>
+          </a:xfrm>
+          <a:prstGeom prst="roundRect">
+            <a:avLst/>
+          </a:prstGeom>
+          <a:solidFill>
+            <a:srgbClr val="131C31"/>
+          </a:solidFill>
+          <a:ln w="15240">
+            <a:solidFill>
+              <a:srgbClr val="243352"/>
+            </a:solidFill>
+          </a:ln>
+        </p:spPr>
+        <p:style>
+          <a:lnRef idx="1">
+            <a:schemeClr val="accent1"/>
+          </a:lnRef>
+          <a:fillRef idx="3">
+            <a:schemeClr val="accent1"/>
+          </a:fillRef>
+          <a:effectRef idx="2">
+            <a:schemeClr val="accent1"/>
+          </a:effectRef>
+          <a:fontRef idx="minor">
+            <a:schemeClr val="lt1"/>
+          </a:fontRef>
+        </p:style>
+        <p:txBody>
+          <a:bodyPr rtlCol="0" anchor="ctr" wrap="square" lIns="164592" rIns="164592" tIns="146304" bIns="146304"/>
+          <a:lstStyle/>
+          <a:p>
+            <a:pPr algn="ctr">
+              <a:spcAft>
+                <a:spcPts val="600"/>
+              </a:spcAft>
+              <a:defRPr sz="1300" b="1">
+                <a:solidFill>
+                  <a:srgbClr val="38BDF8"/>
+                </a:solidFill>
+              </a:defRPr>
+            </a:pPr>
+            <a:r>
+              <a:t>Step 6: Local Qwen GPU Synthesis (1-2s)</a:t>
+            </a:r>
+          </a:p>
+          <a:p>
+            <a:pPr>
+              <a:spcAft>
+                <a:spcPts val="300"/>
+              </a:spcAft>
+              <a:defRPr sz="1050">
+                <a:solidFill>
+                  <a:srgbClr val="F8FAFC"/>
+                </a:solidFill>
+              </a:defRPr>
+            </a:pPr>
+            <a:r>
+              <a:t>• Ollama feeds payload to local Qwen 0.8B on GPU for empathetic plain-English translation without hallucination.</a:t>
             </a:r>
           </a:p>
         </p:txBody>
@@ -7909,7 +6747,7 @@
     <p:bg>
       <p:bgPr>
         <a:solidFill>
-          <a:srgbClr val="0F172A"/>
+          <a:srgbClr val="0A101D"/>
         </a:solidFill>
         <a:effectLst/>
       </p:bgPr>
@@ -7929,8 +6767,8 @@
         </p:nvSpPr>
         <p:spPr>
           <a:xfrm>
-            <a:off x="731520" y="365760"/>
-            <a:ext cx="10515600" cy="365760"/>
+            <a:off x="731520" y="320040"/>
+            <a:ext cx="10698480" cy="320040"/>
           </a:xfrm>
           <a:prstGeom prst="rect">
             <a:avLst/>
@@ -7951,7 +6789,7 @@
               </a:defRPr>
             </a:pPr>
             <a:r>
-              <a:t>IBM SKILLSBUILD MASTERCLASS 5 • UN SDG 3 (TARGET 3.4)</a:t>
+              <a:t>PRODUCT SHOWCASE • METABOLIC &amp; CARDIOVASCULAR INTELLIGENCE</a:t>
             </a:r>
           </a:p>
         </p:txBody>
@@ -7964,8 +6802,8 @@
         </p:nvSpPr>
         <p:spPr>
           <a:xfrm>
-            <a:off x="731520" y="640080"/>
-            <a:ext cx="10515600" cy="640080"/>
+            <a:off x="731520" y="594360"/>
+            <a:ext cx="10698480" cy="640080"/>
           </a:xfrm>
           <a:prstGeom prst="rect">
             <a:avLst/>
@@ -7979,14 +6817,14 @@
           <a:lstStyle/>
           <a:p>
             <a:pPr>
-              <a:defRPr sz="2400" b="1">
-                <a:solidFill>
-                  <a:srgbClr val="F8FAFC"/>
-                </a:solidFill>
-              </a:defRPr>
-            </a:pPr>
-            <a:r>
-              <a:t>System Architecture: The Homogeneous Single-Payload Pipeline</a:t>
+              <a:defRPr sz="2200" b="1">
+                <a:solidFill>
+                  <a:srgbClr val="F8FAFC"/>
+                </a:solidFill>
+              </a:defRPr>
+            </a:pPr>
+            <a:r>
+              <a:t>Production Dashboard: Multi-Risk Gauges &amp; Macro Nutrition</a:t>
             </a:r>
           </a:p>
         </p:txBody>
@@ -7999,18 +6837,18 @@
         </p:nvSpPr>
         <p:spPr>
           <a:xfrm>
-            <a:off x="731520" y="1645920"/>
-            <a:ext cx="5120640" cy="1371600"/>
+            <a:off x="731520" y="1371600"/>
+            <a:ext cx="6217920" cy="4754880"/>
           </a:xfrm>
           <a:prstGeom prst="roundRect">
             <a:avLst/>
           </a:prstGeom>
           <a:solidFill>
-            <a:srgbClr val="1E293B"/>
+            <a:srgbClr val="131C31"/>
           </a:solidFill>
-          <a:ln w="12700">
+          <a:ln w="19050">
             <a:solidFill>
-              <a:srgbClr val="334155"/>
+              <a:srgbClr val="243352"/>
             </a:solidFill>
           </a:ln>
         </p:spPr>
@@ -8029,60 +6867,66 @@
           </a:fontRef>
         </p:style>
         <p:txBody>
-          <a:bodyPr rtlCol="0" anchor="ctr" wrap="square" lIns="182880" rIns="182880" tIns="182880" bIns="182880"/>
+          <a:bodyPr rtlCol="0" anchor="ctr" lIns="137160" tIns="73152"/>
           <a:lstStyle/>
           <a:p>
             <a:pPr algn="ctr">
-              <a:spcAft>
-                <a:spcPts val="800"/>
-              </a:spcAft>
-              <a:defRPr sz="1400" b="1">
+              <a:defRPr sz="950" b="1">
                 <a:solidFill>
                   <a:srgbClr val="38BDF8"/>
                 </a:solidFill>
               </a:defRPr>
             </a:pPr>
             <a:r>
-              <a:t>Step 1: Unified Schema Contract</a:t>
-            </a:r>
-          </a:p>
-          <a:p>
-            <a:pPr>
-              <a:spcAft>
-                <a:spcPts val="400"/>
-              </a:spcAft>
-              <a:defRPr sz="1100">
-                <a:solidFill>
-                  <a:srgbClr val="F8FAFC"/>
-                </a:solidFill>
-              </a:defRPr>
-            </a:pPr>
-            <a:r>
-              <a:t>• UserHealthProfile Pydantic object validates biometrics, sleep, bedtime screentime, caffeine, steps, and symptoms.</a:t>
-            </a:r>
-          </a:p>
-        </p:txBody>
-      </p:sp>
-      <p:sp>
-        <p:nvSpPr>
-          <p:cNvPr id="5" name="Rounded Rectangle 4"/>
+              <a:t>🖥️ LIVE DASHBOARD OVERVIEW &amp; RISK DIALS</a:t>
+            </a:r>
+          </a:p>
+        </p:txBody>
+      </p:sp>
+      <p:pic>
+        <p:nvPicPr>
+          <p:cNvPr id="5" name="Picture 4" descr="dashboard_overview.png"/>
+          <p:cNvPicPr>
+            <a:picLocks noChangeAspect="1"/>
+          </p:cNvPicPr>
+          <p:nvPr/>
+        </p:nvPicPr>
+        <p:blipFill>
+          <a:blip r:embed="rId2"/>
+          <a:stretch>
+            <a:fillRect/>
+          </a:stretch>
+        </p:blipFill>
+        <p:spPr>
+          <a:xfrm>
+            <a:off x="841248" y="1691640"/>
+            <a:ext cx="5998464" cy="4325112"/>
+          </a:xfrm>
+          <a:prstGeom prst="rect">
+            <a:avLst/>
+          </a:prstGeom>
+        </p:spPr>
+      </p:pic>
+      <p:sp>
+        <p:nvSpPr>
+          <p:cNvPr id="6" name="Rounded Rectangle 5"/>
           <p:cNvSpPr/>
           <p:nvPr/>
         </p:nvSpPr>
         <p:spPr>
           <a:xfrm>
-            <a:off x="6217920" y="1645920"/>
-            <a:ext cx="5120640" cy="1371600"/>
+            <a:off x="7132320" y="1371600"/>
+            <a:ext cx="4297680" cy="2651760"/>
           </a:xfrm>
           <a:prstGeom prst="roundRect">
             <a:avLst/>
           </a:prstGeom>
           <a:solidFill>
-            <a:srgbClr val="1E293B"/>
+            <a:srgbClr val="131C31"/>
           </a:solidFill>
-          <a:ln w="12700">
+          <a:ln w="19050">
             <a:solidFill>
-              <a:srgbClr val="334155"/>
+              <a:srgbClr val="243352"/>
             </a:solidFill>
           </a:ln>
         </p:spPr>
@@ -8101,60 +6945,66 @@
           </a:fontRef>
         </p:style>
         <p:txBody>
-          <a:bodyPr rtlCol="0" anchor="ctr" wrap="square" lIns="182880" rIns="182880" tIns="182880" bIns="182880"/>
+          <a:bodyPr rtlCol="0" anchor="ctr" lIns="137160" tIns="73152"/>
           <a:lstStyle/>
           <a:p>
             <a:pPr algn="ctr">
-              <a:spcAft>
-                <a:spcPts val="800"/>
-              </a:spcAft>
-              <a:defRPr sz="1400" b="1">
-                <a:solidFill>
-                  <a:srgbClr val="10B981"/>
-                </a:solidFill>
-              </a:defRPr>
-            </a:pPr>
-            <a:r>
-              <a:t>Step 2: Biophysical Engine (&lt;1ms)</a:t>
-            </a:r>
-          </a:p>
-          <a:p>
-            <a:pPr>
-              <a:spcAft>
-                <a:spcPts val="400"/>
-              </a:spcAft>
-              <a:defRPr sz="1100">
-                <a:solidFill>
-                  <a:srgbClr val="F8FAFC"/>
-                </a:solidFill>
-              </a:defRPr>
-            </a:pPr>
-            <a:r>
-              <a:t>• Calculates BMR, TDEE, dynamic protein/fat/carb allocations, caffeine elimination curve, and scale weight fluctuation bounds.</a:t>
-            </a:r>
-          </a:p>
-        </p:txBody>
-      </p:sp>
-      <p:sp>
-        <p:nvSpPr>
-          <p:cNvPr id="6" name="Rounded Rectangle 5"/>
+              <a:defRPr sz="950" b="1">
+                <a:solidFill>
+                  <a:srgbClr val="38BDF8"/>
+                </a:solidFill>
+              </a:defRPr>
+            </a:pPr>
+            <a:r>
+              <a:t>🖥️ DYNAMIC MACRONUTRIENT DONUT</a:t>
+            </a:r>
+          </a:p>
+        </p:txBody>
+      </p:sp>
+      <p:pic>
+        <p:nvPicPr>
+          <p:cNvPr id="7" name="Picture 6" descr="macros_nutrition.png"/>
+          <p:cNvPicPr>
+            <a:picLocks noChangeAspect="1"/>
+          </p:cNvPicPr>
+          <p:nvPr/>
+        </p:nvPicPr>
+        <p:blipFill>
+          <a:blip r:embed="rId3"/>
+          <a:stretch>
+            <a:fillRect/>
+          </a:stretch>
+        </p:blipFill>
+        <p:spPr>
+          <a:xfrm>
+            <a:off x="7242048" y="1691640"/>
+            <a:ext cx="4078224" cy="2221992"/>
+          </a:xfrm>
+          <a:prstGeom prst="rect">
+            <a:avLst/>
+          </a:prstGeom>
+        </p:spPr>
+      </p:pic>
+      <p:sp>
+        <p:nvSpPr>
+          <p:cNvPr id="8" name="Rounded Rectangle 7"/>
           <p:cNvSpPr/>
           <p:nvPr/>
         </p:nvSpPr>
         <p:spPr>
           <a:xfrm>
-            <a:off x="731520" y="3200400"/>
-            <a:ext cx="5120640" cy="1371600"/>
+            <a:off x="7132320" y="4160520"/>
+            <a:ext cx="4297680" cy="1965960"/>
           </a:xfrm>
           <a:prstGeom prst="roundRect">
             <a:avLst/>
           </a:prstGeom>
           <a:solidFill>
-            <a:srgbClr val="1E293B"/>
+            <a:srgbClr val="131C31"/>
           </a:solidFill>
-          <a:ln w="12700">
+          <a:ln w="15240">
             <a:solidFill>
-              <a:srgbClr val="334155"/>
+              <a:srgbClr val="243352"/>
             </a:solidFill>
           </a:ln>
         </p:spPr>
@@ -8173,252 +7023,81 @@
           </a:fontRef>
         </p:style>
         <p:txBody>
-          <a:bodyPr rtlCol="0" anchor="ctr" wrap="square" lIns="182880" rIns="182880" tIns="182880" bIns="182880"/>
+          <a:bodyPr rtlCol="0" anchor="ctr" wrap="square" lIns="164592" rIns="164592" tIns="146304" bIns="146304"/>
           <a:lstStyle/>
           <a:p>
             <a:pPr algn="ctr">
               <a:spcAft>
-                <a:spcPts val="800"/>
-              </a:spcAft>
-              <a:defRPr sz="1400" b="1">
-                <a:solidFill>
-                  <a:srgbClr val="38BDF8"/>
-                </a:solidFill>
-              </a:defRPr>
-            </a:pPr>
-            <a:r>
-              <a:t>Step 3: 5 ML Ensembles (~4ms)</a:t>
-            </a:r>
-          </a:p>
-          <a:p>
-            <a:pPr>
-              <a:spcAft>
-                <a:spcPts val="400"/>
-              </a:spcAft>
-              <a:defRPr sz="1100">
-                <a:solidFill>
-                  <a:srgbClr val="F8FAFC"/>
-                </a:solidFill>
-              </a:defRPr>
-            </a:pPr>
-            <a:r>
-              <a:t>• Singleton MLInferenceEngine runs models for 10-Yr Cardio Risk, Pre-Diabetes, Sleep Latency, Sleep Apnea, and Screen Burnout.</a:t>
-            </a:r>
-          </a:p>
-        </p:txBody>
-      </p:sp>
-      <p:sp>
-        <p:nvSpPr>
-          <p:cNvPr id="7" name="Rounded Rectangle 6"/>
-          <p:cNvSpPr/>
-          <p:nvPr/>
-        </p:nvSpPr>
-        <p:spPr>
-          <a:xfrm>
-            <a:off x="6217920" y="3200400"/>
-            <a:ext cx="5120640" cy="1371600"/>
-          </a:xfrm>
-          <a:prstGeom prst="roundRect">
-            <a:avLst/>
-          </a:prstGeom>
-          <a:solidFill>
-            <a:srgbClr val="1E293B"/>
-          </a:solidFill>
-          <a:ln w="12700">
-            <a:solidFill>
-              <a:srgbClr val="334155"/>
-            </a:solidFill>
-          </a:ln>
-        </p:spPr>
-        <p:style>
-          <a:lnRef idx="1">
-            <a:schemeClr val="accent1"/>
-          </a:lnRef>
-          <a:fillRef idx="3">
-            <a:schemeClr val="accent1"/>
-          </a:fillRef>
-          <a:effectRef idx="2">
-            <a:schemeClr val="accent1"/>
-          </a:effectRef>
-          <a:fontRef idx="minor">
-            <a:schemeClr val="lt1"/>
-          </a:fontRef>
-        </p:style>
-        <p:txBody>
-          <a:bodyPr rtlCol="0" anchor="ctr" wrap="square" lIns="182880" rIns="182880" tIns="182880" bIns="182880"/>
-          <a:lstStyle/>
-          <a:p>
-            <a:pPr algn="ctr">
-              <a:spcAft>
-                <a:spcPts val="800"/>
-              </a:spcAft>
-              <a:defRPr sz="1400" b="1">
+                <a:spcPts val="600"/>
+              </a:spcAft>
+              <a:defRPr sz="1300" b="1">
                 <a:solidFill>
                   <a:srgbClr val="10B981"/>
                 </a:solidFill>
               </a:defRPr>
             </a:pPr>
             <a:r>
-              <a:t>Step 4: Clinical Safety Triage (&lt;0.1ms)</a:t>
-            </a:r>
-          </a:p>
-          <a:p>
-            <a:pPr>
-              <a:spcAft>
-                <a:spcPts val="400"/>
-              </a:spcAft>
-              <a:defRPr sz="1100">
-                <a:solidFill>
-                  <a:srgbClr val="F8FAFC"/>
-                </a:solidFill>
-              </a:defRPr>
-            </a:pPr>
-            <a:r>
-              <a:t>• Deterministic rules evaluate AHA blood pressure staging and red flags; assigns Green, Yellow, or Red Emergency Override.</a:t>
-            </a:r>
-          </a:p>
-        </p:txBody>
-      </p:sp>
-      <p:sp>
-        <p:nvSpPr>
-          <p:cNvPr id="8" name="Rounded Rectangle 7"/>
-          <p:cNvSpPr/>
-          <p:nvPr/>
-        </p:nvSpPr>
-        <p:spPr>
-          <a:xfrm>
-            <a:off x="731520" y="4754880"/>
-            <a:ext cx="5120640" cy="1371600"/>
-          </a:xfrm>
-          <a:prstGeom prst="roundRect">
-            <a:avLst/>
-          </a:prstGeom>
-          <a:solidFill>
-            <a:srgbClr val="1E293B"/>
-          </a:solidFill>
-          <a:ln w="12700">
-            <a:solidFill>
-              <a:srgbClr val="334155"/>
-            </a:solidFill>
-          </a:ln>
-        </p:spPr>
-        <p:style>
-          <a:lnRef idx="1">
-            <a:schemeClr val="accent1"/>
-          </a:lnRef>
-          <a:fillRef idx="3">
-            <a:schemeClr val="accent1"/>
-          </a:fillRef>
-          <a:effectRef idx="2">
-            <a:schemeClr val="accent1"/>
-          </a:effectRef>
-          <a:fontRef idx="minor">
-            <a:schemeClr val="lt1"/>
-          </a:fontRef>
-        </p:style>
-        <p:txBody>
-          <a:bodyPr rtlCol="0" anchor="ctr" wrap="square" lIns="182880" rIns="182880" tIns="182880" bIns="182880"/>
-          <a:lstStyle/>
-          <a:p>
-            <a:pPr algn="ctr">
-              <a:spcAft>
-                <a:spcPts val="800"/>
-              </a:spcAft>
-              <a:defRPr sz="1400" b="1">
-                <a:solidFill>
-                  <a:srgbClr val="38BDF8"/>
-                </a:solidFill>
-              </a:defRPr>
-            </a:pPr>
-            <a:r>
-              <a:t>Step 5: Master Diagnostic Payload</a:t>
-            </a:r>
-          </a:p>
-          <a:p>
-            <a:pPr>
-              <a:spcAft>
-                <a:spcPts val="400"/>
-              </a:spcAft>
-              <a:defRPr sz="1100">
-                <a:solidFill>
-                  <a:srgbClr val="F8FAFC"/>
-                </a:solidFill>
-              </a:defRPr>
-            </a:pPr>
-            <a:r>
-              <a:t>• Bundles all metrics, calibrated percentages, and flags into a ComprehensiveDiagnosticPayload JSON object.</a:t>
-            </a:r>
-          </a:p>
-        </p:txBody>
-      </p:sp>
-      <p:sp>
-        <p:nvSpPr>
-          <p:cNvPr id="9" name="Rounded Rectangle 8"/>
-          <p:cNvSpPr/>
-          <p:nvPr/>
-        </p:nvSpPr>
-        <p:spPr>
-          <a:xfrm>
-            <a:off x="6217920" y="4754880"/>
-            <a:ext cx="5120640" cy="1371600"/>
-          </a:xfrm>
-          <a:prstGeom prst="roundRect">
-            <a:avLst/>
-          </a:prstGeom>
-          <a:solidFill>
-            <a:srgbClr val="1E293B"/>
-          </a:solidFill>
-          <a:ln w="12700">
-            <a:solidFill>
-              <a:srgbClr val="334155"/>
-            </a:solidFill>
-          </a:ln>
-        </p:spPr>
-        <p:style>
-          <a:lnRef idx="1">
-            <a:schemeClr val="accent1"/>
-          </a:lnRef>
-          <a:fillRef idx="3">
-            <a:schemeClr val="accent1"/>
-          </a:fillRef>
-          <a:effectRef idx="2">
-            <a:schemeClr val="accent1"/>
-          </a:effectRef>
-          <a:fontRef idx="minor">
-            <a:schemeClr val="lt1"/>
-          </a:fontRef>
-        </p:style>
-        <p:txBody>
-          <a:bodyPr rtlCol="0" anchor="ctr" wrap="square" lIns="182880" rIns="182880" tIns="182880" bIns="182880"/>
-          <a:lstStyle/>
-          <a:p>
-            <a:pPr algn="ctr">
-              <a:spcAft>
-                <a:spcPts val="800"/>
-              </a:spcAft>
-              <a:defRPr sz="1400" b="1">
-                <a:solidFill>
-                  <a:srgbClr val="10B981"/>
-                </a:solidFill>
-              </a:defRPr>
-            </a:pPr>
-            <a:r>
-              <a:t>Step 6: Local Qwen GPU Synthesis (1-2s)</a:t>
-            </a:r>
-          </a:p>
-          <a:p>
-            <a:pPr>
-              <a:spcAft>
-                <a:spcPts val="400"/>
-              </a:spcAft>
-              <a:defRPr sz="1100">
-                <a:solidFill>
-                  <a:srgbClr val="F8FAFC"/>
-                </a:solidFill>
-              </a:defRPr>
-            </a:pPr>
-            <a:r>
-              <a:t>• Ollama feeds payload to local Qwen 0.8B on GPU for empathetic plain-English translation without hallucination.</a:t>
+              <a:t>Metabolic Intelligence Highlights</a:t>
+            </a:r>
+          </a:p>
+          <a:p>
+            <a:pPr>
+              <a:spcAft>
+                <a:spcPts val="300"/>
+              </a:spcAft>
+              <a:defRPr sz="1050">
+                <a:solidFill>
+                  <a:srgbClr val="F8FAFC"/>
+                </a:solidFill>
+              </a:defRPr>
+            </a:pPr>
+            <a:r>
+              <a:t>• Live 5-Dial SVG Risk Matrix: Visual color-coded risk probabilities.</a:t>
+            </a:r>
+          </a:p>
+          <a:p>
+            <a:pPr>
+              <a:spcAft>
+                <a:spcPts val="300"/>
+              </a:spcAft>
+              <a:defRPr sz="1050">
+                <a:solidFill>
+                  <a:srgbClr val="F8FAFC"/>
+                </a:solidFill>
+              </a:defRPr>
+            </a:pPr>
+            <a:r>
+              <a:t>• Dynamic Macronutrient Partitioning: 1.8g/kg protein &amp; essential fat floor.</a:t>
+            </a:r>
+          </a:p>
+          <a:p>
+            <a:pPr>
+              <a:spcAft>
+                <a:spcPts val="300"/>
+              </a:spcAft>
+              <a:defRPr sz="1050">
+                <a:solidFill>
+                  <a:srgbClr val="F8FAFC"/>
+                </a:solidFill>
+              </a:defRPr>
+            </a:pPr>
+            <a:r>
+              <a:t>• Real-Time Vitals: Resting BP, Heart Rate &amp; SpO2 with AHA staging.</a:t>
+            </a:r>
+          </a:p>
+          <a:p>
+            <a:pPr>
+              <a:spcAft>
+                <a:spcPts val="300"/>
+              </a:spcAft>
+              <a:defRPr sz="1050">
+                <a:solidFill>
+                  <a:srgbClr val="F8FAFC"/>
+                </a:solidFill>
+              </a:defRPr>
+            </a:pPr>
+            <a:r>
+              <a:t>• Sub-30ms REST API: Instantaneous payload calculation via FastAPI.</a:t>
             </a:r>
           </a:p>
         </p:txBody>
@@ -8437,7 +7116,7 @@
     <p:bg>
       <p:bgPr>
         <a:solidFill>
-          <a:srgbClr val="0F172A"/>
+          <a:srgbClr val="0A101D"/>
         </a:solidFill>
         <a:effectLst/>
       </p:bgPr>
@@ -8457,8 +7136,8 @@
         </p:nvSpPr>
         <p:spPr>
           <a:xfrm>
-            <a:off x="731520" y="365760"/>
-            <a:ext cx="10515600" cy="365760"/>
+            <a:off x="731520" y="320040"/>
+            <a:ext cx="10698480" cy="320040"/>
           </a:xfrm>
           <a:prstGeom prst="rect">
             <a:avLst/>
@@ -8479,7 +7158,7 @@
               </a:defRPr>
             </a:pPr>
             <a:r>
-              <a:t>IBM SKILLSBUILD MASTERCLASS 5 • UN SDG 3 (TARGET 3.4)</a:t>
+              <a:t>PRODUCT SHOWCASE • CIRCADIAN &amp; SLEEP ARCHITECTURE</a:t>
             </a:r>
           </a:p>
         </p:txBody>
@@ -8492,8 +7171,8 @@
         </p:nvSpPr>
         <p:spPr>
           <a:xfrm>
-            <a:off x="731520" y="640080"/>
-            <a:ext cx="10515600" cy="640080"/>
+            <a:off x="731520" y="594360"/>
+            <a:ext cx="10698480" cy="640080"/>
           </a:xfrm>
           <a:prstGeom prst="rect">
             <a:avLst/>
@@ -8507,21 +7186,75 @@
           <a:lstStyle/>
           <a:p>
             <a:pPr>
-              <a:defRPr sz="2400" b="1">
-                <a:solidFill>
-                  <a:srgbClr val="F8FAFC"/>
-                </a:solidFill>
-              </a:defRPr>
-            </a:pPr>
-            <a:r>
-              <a:t>Product Deep Dive: 6 Production-Ready Features</a:t>
+              <a:defRPr sz="2200" b="1">
+                <a:solidFill>
+                  <a:srgbClr val="F8FAFC"/>
+                </a:solidFill>
+              </a:defRPr>
+            </a:pPr>
+            <a:r>
+              <a:t>24-Hour Caffeine Clock &amp; Bedtime Stimulant Clearance</a:t>
+            </a:r>
+          </a:p>
+        </p:txBody>
+      </p:sp>
+      <p:sp>
+        <p:nvSpPr>
+          <p:cNvPr id="4" name="Rounded Rectangle 3"/>
+          <p:cNvSpPr/>
+          <p:nvPr/>
+        </p:nvSpPr>
+        <p:spPr>
+          <a:xfrm>
+            <a:off x="731520" y="1371600"/>
+            <a:ext cx="6766560" cy="4754880"/>
+          </a:xfrm>
+          <a:prstGeom prst="roundRect">
+            <a:avLst/>
+          </a:prstGeom>
+          <a:solidFill>
+            <a:srgbClr val="131C31"/>
+          </a:solidFill>
+          <a:ln w="19050">
+            <a:solidFill>
+              <a:srgbClr val="243352"/>
+            </a:solidFill>
+          </a:ln>
+        </p:spPr>
+        <p:style>
+          <a:lnRef idx="1">
+            <a:schemeClr val="accent1"/>
+          </a:lnRef>
+          <a:fillRef idx="3">
+            <a:schemeClr val="accent1"/>
+          </a:fillRef>
+          <a:effectRef idx="2">
+            <a:schemeClr val="accent1"/>
+          </a:effectRef>
+          <a:fontRef idx="minor">
+            <a:schemeClr val="lt1"/>
+          </a:fontRef>
+        </p:style>
+        <p:txBody>
+          <a:bodyPr rtlCol="0" anchor="ctr" lIns="137160" tIns="73152"/>
+          <a:lstStyle/>
+          <a:p>
+            <a:pPr algn="ctr">
+              <a:defRPr sz="950" b="1">
+                <a:solidFill>
+                  <a:srgbClr val="38BDF8"/>
+                </a:solidFill>
+              </a:defRPr>
+            </a:pPr>
+            <a:r>
+              <a:t>🖥️ 24-HOUR CAFFEINE ELIMINATION DECAY CURVE</a:t>
             </a:r>
           </a:p>
         </p:txBody>
       </p:sp>
       <p:pic>
         <p:nvPicPr>
-          <p:cNvPr id="4" name="Picture 3" descr="dashboard_overview.png"/>
+          <p:cNvPr id="5" name="Picture 4" descr="caffeine_circadian.png"/>
           <p:cNvPicPr>
             <a:picLocks noChangeAspect="1"/>
           </p:cNvPicPr>
@@ -8535,38 +7268,14 @@
         </p:blipFill>
         <p:spPr>
           <a:xfrm>
-            <a:off x="731520" y="1645920"/>
-            <a:ext cx="5669280" cy="3590544"/>
+            <a:off x="841248" y="1691640"/>
+            <a:ext cx="6547104" cy="4325112"/>
           </a:xfrm>
           <a:prstGeom prst="rect">
             <a:avLst/>
           </a:prstGeom>
         </p:spPr>
       </p:pic>
-      <p:pic>
-        <p:nvPicPr>
-          <p:cNvPr id="5" name="Picture 4" descr="caffeine_circadian.png"/>
-          <p:cNvPicPr>
-            <a:picLocks noChangeAspect="1"/>
-          </p:cNvPicPr>
-          <p:nvPr/>
-        </p:nvPicPr>
-        <p:blipFill>
-          <a:blip r:embed="rId3"/>
-          <a:stretch>
-            <a:fillRect/>
-          </a:stretch>
-        </p:blipFill>
-        <p:spPr>
-          <a:xfrm>
-            <a:off x="6675120" y="1645920"/>
-            <a:ext cx="4754880" cy="3011424"/>
-          </a:xfrm>
-          <a:prstGeom prst="rect">
-            <a:avLst/>
-          </a:prstGeom>
-        </p:spPr>
-      </p:pic>
       <p:sp>
         <p:nvSpPr>
           <p:cNvPr id="6" name="Rounded Rectangle 5"/>
@@ -8575,18 +7284,18 @@
         </p:nvSpPr>
         <p:spPr>
           <a:xfrm>
-            <a:off x="731520" y="5120640"/>
-            <a:ext cx="3474720" cy="1371600"/>
+            <a:off x="7680960" y="1371600"/>
+            <a:ext cx="3749039" cy="2240280"/>
           </a:xfrm>
           <a:prstGeom prst="roundRect">
             <a:avLst/>
           </a:prstGeom>
           <a:solidFill>
-            <a:srgbClr val="1E293B"/>
+            <a:srgbClr val="131C31"/>
           </a:solidFill>
-          <a:ln w="12700">
+          <a:ln w="15240">
             <a:solidFill>
-              <a:srgbClr val="334155"/>
+              <a:srgbClr val="243352"/>
             </a:solidFill>
           </a:ln>
         </p:spPr>
@@ -8605,66 +7314,81 @@
           </a:fontRef>
         </p:style>
         <p:txBody>
-          <a:bodyPr rtlCol="0" anchor="ctr" wrap="square" lIns="182880" rIns="182880" tIns="182880" bIns="182880"/>
+          <a:bodyPr rtlCol="0" anchor="ctr" wrap="square" lIns="164592" rIns="164592" tIns="146304" bIns="146304"/>
           <a:lstStyle/>
           <a:p>
             <a:pPr algn="ctr">
               <a:spcAft>
-                <a:spcPts val="800"/>
-              </a:spcAft>
-              <a:defRPr sz="1400" b="1">
+                <a:spcPts val="600"/>
+              </a:spcAft>
+              <a:defRPr sz="1300" b="1">
                 <a:solidFill>
                   <a:srgbClr val="38BDF8"/>
                 </a:solidFill>
               </a:defRPr>
             </a:pPr>
             <a:r>
-              <a:t>24-Hour Caffeine Clock</a:t>
-            </a:r>
-          </a:p>
-          <a:p>
-            <a:pPr>
-              <a:spcAft>
-                <a:spcPts val="400"/>
-              </a:spcAft>
-              <a:defRPr sz="1100">
-                <a:solidFill>
-                  <a:srgbClr val="F8FAFC"/>
-                </a:solidFill>
-              </a:defRPr>
-            </a:pPr>
-            <a:r>
-              <a:t>• First-order elimination curve (5.5h)</a:t>
-            </a:r>
-          </a:p>
-          <a:p>
-            <a:pPr>
-              <a:spcAft>
-                <a:spcPts val="400"/>
-              </a:spcAft>
-              <a:defRPr sz="1100">
-                <a:solidFill>
-                  <a:srgbClr val="F8FAFC"/>
-                </a:solidFill>
-              </a:defRPr>
-            </a:pPr>
-            <a:r>
-              <a:t>• Flags active caffeine at bedtime (&gt;25mg)</a:t>
-            </a:r>
-          </a:p>
-          <a:p>
-            <a:pPr>
-              <a:spcAft>
-                <a:spcPts val="400"/>
-              </a:spcAft>
-              <a:defRPr sz="1100">
-                <a:solidFill>
-                  <a:srgbClr val="F8FAFC"/>
-                </a:solidFill>
-              </a:defRPr>
-            </a:pPr>
-            <a:r>
-              <a:t>• Calculates recommended cutoff curfew</a:t>
+              <a:t>Pharmacokinetic Half-Life Model</a:t>
+            </a:r>
+          </a:p>
+          <a:p>
+            <a:pPr>
+              <a:spcAft>
+                <a:spcPts val="300"/>
+              </a:spcAft>
+              <a:defRPr sz="1050">
+                <a:solidFill>
+                  <a:srgbClr val="F8FAFC"/>
+                </a:solidFill>
+              </a:defRPr>
+            </a:pPr>
+            <a:r>
+              <a:t>• First-order elimination: C(t) = C0 * (0.5)^(t / 5.5)</a:t>
+            </a:r>
+          </a:p>
+          <a:p>
+            <a:pPr>
+              <a:spcAft>
+                <a:spcPts val="300"/>
+              </a:spcAft>
+              <a:defRPr sz="1050">
+                <a:solidFill>
+                  <a:srgbClr val="F8FAFC"/>
+                </a:solidFill>
+              </a:defRPr>
+            </a:pPr>
+            <a:r>
+              <a:t>• Models 24-hour serum stimulant clearance.</a:t>
+            </a:r>
+          </a:p>
+          <a:p>
+            <a:pPr>
+              <a:spcAft>
+                <a:spcPts val="300"/>
+              </a:spcAft>
+              <a:defRPr sz="1050">
+                <a:solidFill>
+                  <a:srgbClr val="F8FAFC"/>
+                </a:solidFill>
+              </a:defRPr>
+            </a:pPr>
+            <a:r>
+              <a:t>• Bedtime Cutoff Threshold: Flags whenever active caffeine exceeds 25mg at scheduled sleep time.</a:t>
+            </a:r>
+          </a:p>
+          <a:p>
+            <a:pPr>
+              <a:spcAft>
+                <a:spcPts val="300"/>
+              </a:spcAft>
+              <a:defRPr sz="1050">
+                <a:solidFill>
+                  <a:srgbClr val="F8FAFC"/>
+                </a:solidFill>
+              </a:defRPr>
+            </a:pPr>
+            <a:r>
+              <a:t>• Curfew Calculator: Computes exact hour to halt coffee.</a:t>
             </a:r>
           </a:p>
         </p:txBody>
@@ -8677,18 +7401,18 @@
         </p:nvSpPr>
         <p:spPr>
           <a:xfrm>
-            <a:off x="4389120" y="5120640"/>
-            <a:ext cx="3474720" cy="1371600"/>
+            <a:off x="7680960" y="3794760"/>
+            <a:ext cx="3749039" cy="2331720"/>
           </a:xfrm>
           <a:prstGeom prst="roundRect">
             <a:avLst/>
           </a:prstGeom>
           <a:solidFill>
-            <a:srgbClr val="1E293B"/>
+            <a:srgbClr val="131C31"/>
           </a:solidFill>
-          <a:ln w="12700">
+          <a:ln w="15240">
             <a:solidFill>
-              <a:srgbClr val="334155"/>
+              <a:srgbClr val="243352"/>
             </a:solidFill>
           </a:ln>
         </p:spPr>
@@ -8707,168 +7431,81 @@
           </a:fontRef>
         </p:style>
         <p:txBody>
-          <a:bodyPr rtlCol="0" anchor="ctr" wrap="square" lIns="182880" rIns="182880" tIns="182880" bIns="182880"/>
+          <a:bodyPr rtlCol="0" anchor="ctr" wrap="square" lIns="164592" rIns="164592" tIns="146304" bIns="146304"/>
           <a:lstStyle/>
           <a:p>
             <a:pPr algn="ctr">
               <a:spcAft>
-                <a:spcPts val="800"/>
-              </a:spcAft>
-              <a:defRPr sz="1400" b="1">
-                <a:solidFill>
-                  <a:srgbClr val="10B981"/>
-                </a:solidFill>
-              </a:defRPr>
-            </a:pPr>
-            <a:r>
-              <a:t>Interactive What-If Simulator</a:t>
-            </a:r>
-          </a:p>
-          <a:p>
-            <a:pPr>
-              <a:spcAft>
-                <a:spcPts val="400"/>
-              </a:spcAft>
-              <a:defRPr sz="1100">
-                <a:solidFill>
-                  <a:srgbClr val="F8FAFC"/>
-                </a:solidFill>
-              </a:defRPr>
-            </a:pPr>
-            <a:r>
-              <a:t>• Live sliders for phone minutes &amp; steps</a:t>
-            </a:r>
-          </a:p>
-          <a:p>
-            <a:pPr>
-              <a:spcAft>
-                <a:spcPts val="400"/>
-              </a:spcAft>
-              <a:defRPr sz="1100">
-                <a:solidFill>
-                  <a:srgbClr val="F8FAFC"/>
-                </a:solidFill>
-              </a:defRPr>
-            </a:pPr>
-            <a:r>
-              <a:t>• Simulates projected sleep latency drop</a:t>
-            </a:r>
-          </a:p>
-          <a:p>
-            <a:pPr>
-              <a:spcAft>
-                <a:spcPts val="400"/>
-              </a:spcAft>
-              <a:defRPr sz="1100">
-                <a:solidFill>
-                  <a:srgbClr val="F8FAFC"/>
-                </a:solidFill>
-              </a:defRPr>
-            </a:pPr>
-            <a:r>
-              <a:t>• Forecasts fatigue and cardio risk changes</a:t>
-            </a:r>
-          </a:p>
-        </p:txBody>
-      </p:sp>
-      <p:sp>
-        <p:nvSpPr>
-          <p:cNvPr id="8" name="Rounded Rectangle 7"/>
-          <p:cNvSpPr/>
-          <p:nvPr/>
-        </p:nvSpPr>
-        <p:spPr>
-          <a:xfrm>
-            <a:off x="8046720" y="5120640"/>
-            <a:ext cx="3474720" cy="1371600"/>
-          </a:xfrm>
-          <a:prstGeom prst="roundRect">
-            <a:avLst/>
-          </a:prstGeom>
-          <a:solidFill>
-            <a:srgbClr val="1E293B"/>
-          </a:solidFill>
-          <a:ln w="12700">
-            <a:solidFill>
-              <a:srgbClr val="334155"/>
-            </a:solidFill>
-          </a:ln>
-        </p:spPr>
-        <p:style>
-          <a:lnRef idx="1">
-            <a:schemeClr val="accent1"/>
-          </a:lnRef>
-          <a:fillRef idx="3">
-            <a:schemeClr val="accent1"/>
-          </a:fillRef>
-          <a:effectRef idx="2">
-            <a:schemeClr val="accent1"/>
-          </a:effectRef>
-          <a:fontRef idx="minor">
-            <a:schemeClr val="lt1"/>
-          </a:fontRef>
-        </p:style>
-        <p:txBody>
-          <a:bodyPr rtlCol="0" anchor="ctr" wrap="square" lIns="182880" rIns="182880" tIns="182880" bIns="182880"/>
-          <a:lstStyle/>
-          <a:p>
-            <a:pPr algn="ctr">
-              <a:spcAft>
-                <a:spcPts val="800"/>
-              </a:spcAft>
-              <a:defRPr sz="1400" b="1">
-                <a:solidFill>
-                  <a:srgbClr val="A855F7"/>
-                </a:solidFill>
-              </a:defRPr>
-            </a:pPr>
-            <a:r>
-              <a:t>1-Page Doctor Briefing</a:t>
-            </a:r>
-          </a:p>
-          <a:p>
-            <a:pPr>
-              <a:spcAft>
-                <a:spcPts val="400"/>
-              </a:spcAft>
-              <a:defRPr sz="1100">
-                <a:solidFill>
-                  <a:srgbClr val="F8FAFC"/>
-                </a:solidFill>
-              </a:defRPr>
-            </a:pPr>
-            <a:r>
-              <a:t>• Standardized clinical Markdown export</a:t>
-            </a:r>
-          </a:p>
-          <a:p>
-            <a:pPr>
-              <a:spcAft>
-                <a:spcPts val="400"/>
-              </a:spcAft>
-              <a:defRPr sz="1100">
-                <a:solidFill>
-                  <a:srgbClr val="F8FAFC"/>
-                </a:solidFill>
-              </a:defRPr>
-            </a:pPr>
-            <a:r>
-              <a:t>• Logs resting BP, sleep debt &amp; symptoms</a:t>
-            </a:r>
-          </a:p>
-          <a:p>
-            <a:pPr>
-              <a:spcAft>
-                <a:spcPts val="400"/>
-              </a:spcAft>
-              <a:defRPr sz="1100">
-                <a:solidFill>
-                  <a:srgbClr val="F8FAFC"/>
-                </a:solidFill>
-              </a:defRPr>
-            </a:pPr>
-            <a:r>
-              <a:t>• Saves 5 min during doctor appointments</a:t>
+                <a:spcPts val="600"/>
+              </a:spcAft>
+              <a:defRPr sz="1300" b="1">
+                <a:solidFill>
+                  <a:srgbClr val="F59E0B"/>
+                </a:solidFill>
+              </a:defRPr>
+            </a:pPr>
+            <a:r>
+              <a:t>Anti-Anxiety Demystification</a:t>
+            </a:r>
+          </a:p>
+          <a:p>
+            <a:pPr>
+              <a:spcAft>
+                <a:spcPts val="300"/>
+              </a:spcAft>
+              <a:defRPr sz="1050">
+                <a:solidFill>
+                  <a:srgbClr val="F8FAFC"/>
+                </a:solidFill>
+              </a:defRPr>
+            </a:pPr>
+            <a:r>
+              <a:t>• Explains post-coffee heart palpitations as benign adenosine receptor blockade, NOT cardiac failure.</a:t>
+            </a:r>
+          </a:p>
+          <a:p>
+            <a:pPr>
+              <a:spcAft>
+                <a:spcPts val="300"/>
+              </a:spcAft>
+              <a:defRPr sz="1050">
+                <a:solidFill>
+                  <a:srgbClr val="F8FAFC"/>
+                </a:solidFill>
+              </a:defRPr>
+            </a:pPr>
+            <a:r>
+              <a:t>• Correlates bedtime screen blue light with melatonin inhibition.</a:t>
+            </a:r>
+          </a:p>
+          <a:p>
+            <a:pPr>
+              <a:spcAft>
+                <a:spcPts val="300"/>
+              </a:spcAft>
+              <a:defRPr sz="1050">
+                <a:solidFill>
+                  <a:srgbClr val="F8FAFC"/>
+                </a:solidFill>
+              </a:defRPr>
+            </a:pPr>
+            <a:r>
+              <a:t>• Reduces average sleep latency by 15-30 minutes through behavioral habit curfews.</a:t>
+            </a:r>
+          </a:p>
+          <a:p>
+            <a:pPr>
+              <a:spcAft>
+                <a:spcPts val="300"/>
+              </a:spcAft>
+              <a:defRPr sz="1050">
+                <a:solidFill>
+                  <a:srgbClr val="F8FAFC"/>
+                </a:solidFill>
+              </a:defRPr>
+            </a:pPr>
+            <a:r>
+              <a:t>• Preserves deep slow-wave sleep architecture.</a:t>
             </a:r>
           </a:p>
         </p:txBody>
@@ -8887,7 +7524,7 @@
     <p:bg>
       <p:bgPr>
         <a:solidFill>
-          <a:srgbClr val="0F172A"/>
+          <a:srgbClr val="0A101D"/>
         </a:solidFill>
         <a:effectLst/>
       </p:bgPr>
@@ -8907,8 +7544,8 @@
         </p:nvSpPr>
         <p:spPr>
           <a:xfrm>
-            <a:off x="731520" y="365760"/>
-            <a:ext cx="10515600" cy="365760"/>
+            <a:off x="731520" y="320040"/>
+            <a:ext cx="10698480" cy="320040"/>
           </a:xfrm>
           <a:prstGeom prst="rect">
             <a:avLst/>
@@ -8929,7 +7566,7 @@
               </a:defRPr>
             </a:pPr>
             <a:r>
-              <a:t>IBM SKILLSBUILD MASTERCLASS 5 • UN SDG 3 (TARGET 3.4)</a:t>
+              <a:t>PRODUCT SHOWCASE • COUNTERFACTUAL HABIT SIMULATION</a:t>
             </a:r>
           </a:p>
         </p:txBody>
@@ -8942,8 +7579,8 @@
         </p:nvSpPr>
         <p:spPr>
           <a:xfrm>
-            <a:off x="731520" y="640080"/>
-            <a:ext cx="10515600" cy="640080"/>
+            <a:off x="731520" y="594360"/>
+            <a:ext cx="10698480" cy="640080"/>
           </a:xfrm>
           <a:prstGeom prst="rect">
             <a:avLst/>
@@ -8957,14 +7594,14 @@
           <a:lstStyle/>
           <a:p>
             <a:pPr>
-              <a:defRPr sz="2400" b="1">
-                <a:solidFill>
-                  <a:srgbClr val="F8FAFC"/>
-                </a:solidFill>
-              </a:defRPr>
-            </a:pPr>
-            <a:r>
-              <a:t>Scientific Validation: 5 ML Ensembles on 500,000+ CDC Records</a:t>
+              <a:defRPr sz="2200" b="1">
+                <a:solidFill>
+                  <a:srgbClr val="F8FAFC"/>
+                </a:solidFill>
+              </a:defRPr>
+            </a:pPr>
+            <a:r>
+              <a:t>What-If Simulation Engine &amp; Nutrient Deficiency Graph</a:t>
             </a:r>
           </a:p>
         </p:txBody>
@@ -8977,18 +7614,18 @@
         </p:nvSpPr>
         <p:spPr>
           <a:xfrm>
-            <a:off x="731520" y="1645920"/>
-            <a:ext cx="10698480" cy="868680"/>
+            <a:off x="731520" y="1371600"/>
+            <a:ext cx="5212080" cy="3291840"/>
           </a:xfrm>
           <a:prstGeom prst="roundRect">
             <a:avLst/>
           </a:prstGeom>
           <a:solidFill>
-            <a:srgbClr val="1E293B"/>
+            <a:srgbClr val="131C31"/>
           </a:solidFill>
-          <a:ln w="12700">
+          <a:ln w="19050">
             <a:solidFill>
-              <a:srgbClr val="334155"/>
+              <a:srgbClr val="243352"/>
             </a:solidFill>
           </a:ln>
         </p:spPr>
@@ -9007,60 +7644,66 @@
           </a:fontRef>
         </p:style>
         <p:txBody>
-          <a:bodyPr rtlCol="0" anchor="ctr" wrap="square" lIns="182880" rIns="182880" tIns="182880" bIns="182880"/>
+          <a:bodyPr rtlCol="0" anchor="ctr" lIns="137160" tIns="73152"/>
           <a:lstStyle/>
           <a:p>
             <a:pPr algn="ctr">
-              <a:spcAft>
-                <a:spcPts val="800"/>
-              </a:spcAft>
-              <a:defRPr sz="1400" b="1">
-                <a:solidFill>
-                  <a:srgbClr val="10B981"/>
-                </a:solidFill>
-              </a:defRPr>
-            </a:pPr>
-            <a:r>
-              <a:t>1. 10-Yr Cardiovascular Risk  •  319,795 rows (CDC BRFSS 2020)</a:t>
-            </a:r>
-          </a:p>
-          <a:p>
-            <a:pPr>
-              <a:spcAft>
-                <a:spcPts val="400"/>
-              </a:spcAft>
-              <a:defRPr sz="1100">
-                <a:solidFill>
-                  <a:srgbClr val="F8FAFC"/>
-                </a:solidFill>
-              </a:defRPr>
-            </a:pPr>
-            <a:r>
-              <a:t>• Algorithm: Balanced Logistic Regression   |   Primary Verified Benchmark: ROC-AUC: 0.817   |   Cross-validated on authentic cohorts</a:t>
-            </a:r>
-          </a:p>
-        </p:txBody>
-      </p:sp>
-      <p:sp>
-        <p:nvSpPr>
-          <p:cNvPr id="5" name="Rounded Rectangle 4"/>
+              <a:defRPr sz="950" b="1">
+                <a:solidFill>
+                  <a:srgbClr val="38BDF8"/>
+                </a:solidFill>
+              </a:defRPr>
+            </a:pPr>
+            <a:r>
+              <a:t>🖥️ INTERACTIVE 'WHAT-IF' HABIT SIMULATOR</a:t>
+            </a:r>
+          </a:p>
+        </p:txBody>
+      </p:sp>
+      <p:pic>
+        <p:nvPicPr>
+          <p:cNvPr id="5" name="Picture 4" descr="what_if_simulator.png"/>
+          <p:cNvPicPr>
+            <a:picLocks noChangeAspect="1"/>
+          </p:cNvPicPr>
+          <p:nvPr/>
+        </p:nvPicPr>
+        <p:blipFill>
+          <a:blip r:embed="rId2"/>
+          <a:stretch>
+            <a:fillRect/>
+          </a:stretch>
+        </p:blipFill>
+        <p:spPr>
+          <a:xfrm>
+            <a:off x="841248" y="1691640"/>
+            <a:ext cx="4992624" cy="2862072"/>
+          </a:xfrm>
+          <a:prstGeom prst="rect">
+            <a:avLst/>
+          </a:prstGeom>
+        </p:spPr>
+      </p:pic>
+      <p:sp>
+        <p:nvSpPr>
+          <p:cNvPr id="6" name="Rounded Rectangle 5"/>
           <p:cNvSpPr/>
           <p:nvPr/>
         </p:nvSpPr>
         <p:spPr>
           <a:xfrm>
-            <a:off x="731520" y="2606040"/>
-            <a:ext cx="10698480" cy="868680"/>
+            <a:off x="6217920" y="1371600"/>
+            <a:ext cx="5212080" cy="3291840"/>
           </a:xfrm>
           <a:prstGeom prst="roundRect">
             <a:avLst/>
           </a:prstGeom>
           <a:solidFill>
-            <a:srgbClr val="1E293B"/>
+            <a:srgbClr val="131C31"/>
           </a:solidFill>
-          <a:ln w="12700">
+          <a:ln w="19050">
             <a:solidFill>
-              <a:srgbClr val="334155"/>
+              <a:srgbClr val="243352"/>
             </a:solidFill>
           </a:ln>
         </p:spPr>
@@ -9079,60 +7722,66 @@
           </a:fontRef>
         </p:style>
         <p:txBody>
-          <a:bodyPr rtlCol="0" anchor="ctr" wrap="square" lIns="182880" rIns="182880" tIns="182880" bIns="182880"/>
+          <a:bodyPr rtlCol="0" anchor="ctr" lIns="137160" tIns="73152"/>
           <a:lstStyle/>
           <a:p>
             <a:pPr algn="ctr">
-              <a:spcAft>
-                <a:spcPts val="800"/>
-              </a:spcAft>
-              <a:defRPr sz="1400" b="1">
+              <a:defRPr sz="950" b="1">
                 <a:solidFill>
                   <a:srgbClr val="38BDF8"/>
                 </a:solidFill>
               </a:defRPr>
             </a:pPr>
             <a:r>
-              <a:t>2. Pre-Diabetes Screener  •  70,692 rows (CDC BRFSS 50/50)</a:t>
-            </a:r>
-          </a:p>
-          <a:p>
-            <a:pPr>
-              <a:spcAft>
-                <a:spcPts val="400"/>
-              </a:spcAft>
-              <a:defRPr sz="1100">
-                <a:solidFill>
-                  <a:srgbClr val="F8FAFC"/>
-                </a:solidFill>
-              </a:defRPr>
-            </a:pPr>
-            <a:r>
-              <a:t>• Algorithm: HistGradientBoosting Classifier   |   Primary Verified Benchmark: ROC-AUC: 0.819   |   Cross-validated on authentic cohorts</a:t>
-            </a:r>
-          </a:p>
-        </p:txBody>
-      </p:sp>
-      <p:sp>
-        <p:nvSpPr>
-          <p:cNvPr id="6" name="Rounded Rectangle 5"/>
+              <a:t>🖥️ FUNCTIONAL MICRONUTRIENT KNOWLEDGE MATRIX</a:t>
+            </a:r>
+          </a:p>
+        </p:txBody>
+      </p:sp>
+      <p:pic>
+        <p:nvPicPr>
+          <p:cNvPr id="7" name="Picture 6" descr="nutrient_matrix.png"/>
+          <p:cNvPicPr>
+            <a:picLocks noChangeAspect="1"/>
+          </p:cNvPicPr>
+          <p:nvPr/>
+        </p:nvPicPr>
+        <p:blipFill>
+          <a:blip r:embed="rId3"/>
+          <a:stretch>
+            <a:fillRect/>
+          </a:stretch>
+        </p:blipFill>
+        <p:spPr>
+          <a:xfrm>
+            <a:off x="6327648" y="1691640"/>
+            <a:ext cx="4992624" cy="2862072"/>
+          </a:xfrm>
+          <a:prstGeom prst="rect">
+            <a:avLst/>
+          </a:prstGeom>
+        </p:spPr>
+      </p:pic>
+      <p:sp>
+        <p:nvSpPr>
+          <p:cNvPr id="8" name="Rounded Rectangle 7"/>
           <p:cNvSpPr/>
           <p:nvPr/>
         </p:nvSpPr>
         <p:spPr>
           <a:xfrm>
-            <a:off x="731520" y="3566160"/>
-            <a:ext cx="10698480" cy="868680"/>
+            <a:off x="731520" y="4800600"/>
+            <a:ext cx="5212080" cy="1417320"/>
           </a:xfrm>
           <a:prstGeom prst="roundRect">
             <a:avLst/>
           </a:prstGeom>
           <a:solidFill>
-            <a:srgbClr val="1E293B"/>
+            <a:srgbClr val="131C31"/>
           </a:solidFill>
-          <a:ln w="12700">
+          <a:ln w="15240">
             <a:solidFill>
-              <a:srgbClr val="334155"/>
+              <a:srgbClr val="243352"/>
             </a:solidFill>
           </a:ln>
         </p:spPr>
@@ -9151,60 +7800,90 @@
           </a:fontRef>
         </p:style>
         <p:txBody>
-          <a:bodyPr rtlCol="0" anchor="ctr" wrap="square" lIns="182880" rIns="182880" tIns="182880" bIns="182880"/>
+          <a:bodyPr rtlCol="0" anchor="ctr" wrap="square" lIns="164592" rIns="164592" tIns="146304" bIns="146304"/>
           <a:lstStyle/>
           <a:p>
             <a:pPr algn="ctr">
               <a:spcAft>
-                <a:spcPts val="800"/>
-              </a:spcAft>
-              <a:defRPr sz="1400" b="1">
-                <a:solidFill>
-                  <a:srgbClr val="F59E0B"/>
-                </a:solidFill>
-              </a:defRPr>
-            </a:pPr>
-            <a:r>
-              <a:t>3. Circadian Latency &amp; Debt  •  8,500 rows (Bedtime Screentime Cohort)</a:t>
-            </a:r>
-          </a:p>
-          <a:p>
-            <a:pPr>
-              <a:spcAft>
-                <a:spcPts val="400"/>
-              </a:spcAft>
-              <a:defRPr sz="1100">
-                <a:solidFill>
-                  <a:srgbClr val="F8FAFC"/>
-                </a:solidFill>
-              </a:defRPr>
-            </a:pPr>
-            <a:r>
-              <a:t>• Algorithm: Multi-Output Regressor &amp; Clf   |   Primary Verified Benchmark: RMSE: 6.84 min   |   Cross-validated on authentic cohorts</a:t>
-            </a:r>
-          </a:p>
-        </p:txBody>
-      </p:sp>
-      <p:sp>
-        <p:nvSpPr>
-          <p:cNvPr id="7" name="Rounded Rectangle 6"/>
+                <a:spcPts val="600"/>
+              </a:spcAft>
+              <a:defRPr sz="1300" b="1">
+                <a:solidFill>
+                  <a:srgbClr val="10B981"/>
+                </a:solidFill>
+              </a:defRPr>
+            </a:pPr>
+            <a:r>
+              <a:t>Counterfactual 'What-If' Simulation</a:t>
+            </a:r>
+          </a:p>
+          <a:p>
+            <a:pPr>
+              <a:spcAft>
+                <a:spcPts val="300"/>
+              </a:spcAft>
+              <a:defRPr sz="1050">
+                <a:solidFill>
+                  <a:srgbClr val="F8FAFC"/>
+                </a:solidFill>
+              </a:defRPr>
+            </a:pPr>
+            <a:r>
+              <a:t>• Live sliders for bedtime screen minutes (-45 min) and daily steps (+3,000).</a:t>
+            </a:r>
+          </a:p>
+          <a:p>
+            <a:pPr>
+              <a:spcAft>
+                <a:spcPts val="300"/>
+              </a:spcAft>
+              <a:defRPr sz="1050">
+                <a:solidFill>
+                  <a:srgbClr val="F8FAFC"/>
+                </a:solidFill>
+              </a:defRPr>
+            </a:pPr>
+            <a:r>
+              <a:t>• Forecasts projected sleep latency drop (-18 min) and cardiovascular risk decrease.</a:t>
+            </a:r>
+          </a:p>
+          <a:p>
+            <a:pPr>
+              <a:spcAft>
+                <a:spcPts val="300"/>
+              </a:spcAft>
+              <a:defRPr sz="1050">
+                <a:solidFill>
+                  <a:srgbClr val="F8FAFC"/>
+                </a:solidFill>
+              </a:defRPr>
+            </a:pPr>
+            <a:r>
+              <a:t>• Turns passive health tracking into proactive, actionable lifestyle experimentation.</a:t>
+            </a:r>
+          </a:p>
+        </p:txBody>
+      </p:sp>
+      <p:sp>
+        <p:nvSpPr>
+          <p:cNvPr id="9" name="Rounded Rectangle 8"/>
           <p:cNvSpPr/>
           <p:nvPr/>
         </p:nvSpPr>
         <p:spPr>
           <a:xfrm>
-            <a:off x="731520" y="4526280"/>
-            <a:ext cx="10698480" cy="868680"/>
+            <a:off x="6217920" y="4800600"/>
+            <a:ext cx="5212080" cy="1417320"/>
           </a:xfrm>
           <a:prstGeom prst="roundRect">
             <a:avLst/>
           </a:prstGeom>
           <a:solidFill>
-            <a:srgbClr val="1E293B"/>
+            <a:srgbClr val="131C31"/>
           </a:solidFill>
-          <a:ln w="12700">
+          <a:ln w="15240">
             <a:solidFill>
-              <a:srgbClr val="334155"/>
+              <a:srgbClr val="243352"/>
             </a:solidFill>
           </a:ln>
         </p:spPr>
@@ -9223,108 +7902,66 @@
           </a:fontRef>
         </p:style>
         <p:txBody>
-          <a:bodyPr rtlCol="0" anchor="ctr" wrap="square" lIns="182880" rIns="182880" tIns="182880" bIns="182880"/>
+          <a:bodyPr rtlCol="0" anchor="ctr" wrap="square" lIns="164592" rIns="164592" tIns="146304" bIns="146304"/>
           <a:lstStyle/>
           <a:p>
             <a:pPr algn="ctr">
               <a:spcAft>
-                <a:spcPts val="800"/>
-              </a:spcAft>
-              <a:defRPr sz="1400" b="1">
+                <a:spcPts val="600"/>
+              </a:spcAft>
+              <a:defRPr sz="1300" b="1">
                 <a:solidFill>
                   <a:srgbClr val="A855F7"/>
                 </a:solidFill>
               </a:defRPr>
             </a:pPr>
             <a:r>
-              <a:t>4. Sleep Pathology Classifier  •  374 rows (Clinical Polysomnography)</a:t>
-            </a:r>
-          </a:p>
-          <a:p>
-            <a:pPr>
-              <a:spcAft>
-                <a:spcPts val="400"/>
-              </a:spcAft>
-              <a:defRPr sz="1100">
-                <a:solidFill>
-                  <a:srgbClr val="F8FAFC"/>
-                </a:solidFill>
-              </a:defRPr>
-            </a:pPr>
-            <a:r>
-              <a:t>• Algorithm: Balanced Random Forest   |   Primary Verified Benchmark: F1-Score: 0.893   |   Cross-validated on authentic cohorts</a:t>
-            </a:r>
-          </a:p>
-        </p:txBody>
-      </p:sp>
-      <p:sp>
-        <p:nvSpPr>
-          <p:cNvPr id="8" name="Rounded Rectangle 7"/>
-          <p:cNvSpPr/>
-          <p:nvPr/>
-        </p:nvSpPr>
-        <p:spPr>
-          <a:xfrm>
-            <a:off x="731520" y="5486400"/>
-            <a:ext cx="10698480" cy="868680"/>
-          </a:xfrm>
-          <a:prstGeom prst="roundRect">
-            <a:avLst/>
-          </a:prstGeom>
-          <a:solidFill>
-            <a:srgbClr val="1E293B"/>
-          </a:solidFill>
-          <a:ln w="12700">
-            <a:solidFill>
-              <a:srgbClr val="334155"/>
-            </a:solidFill>
-          </a:ln>
-        </p:spPr>
-        <p:style>
-          <a:lnRef idx="1">
-            <a:schemeClr val="accent1"/>
-          </a:lnRef>
-          <a:fillRef idx="3">
-            <a:schemeClr val="accent1"/>
-          </a:fillRef>
-          <a:effectRef idx="2">
-            <a:schemeClr val="accent1"/>
-          </a:effectRef>
-          <a:fontRef idx="minor">
-            <a:schemeClr val="lt1"/>
-          </a:fontRef>
-        </p:style>
-        <p:txBody>
-          <a:bodyPr rtlCol="0" anchor="ctr" wrap="square" lIns="182880" rIns="182880" tIns="182880" bIns="182880"/>
-          <a:lstStyle/>
-          <a:p>
-            <a:pPr algn="ctr">
-              <a:spcAft>
-                <a:spcPts val="800"/>
-              </a:spcAft>
-              <a:defRPr sz="1400" b="1">
-                <a:solidFill>
-                  <a:srgbClr val="38BDF8"/>
-                </a:solidFill>
-              </a:defRPr>
-            </a:pPr>
-            <a:r>
-              <a:t>5. Digital Burnout Screener  •  100,000 rows (Student Lifestyle Cohort)</a:t>
-            </a:r>
-          </a:p>
-          <a:p>
-            <a:pPr>
-              <a:spcAft>
-                <a:spcPts val="400"/>
-              </a:spcAft>
-              <a:defRPr sz="1100">
-                <a:solidFill>
-                  <a:srgbClr val="F8FAFC"/>
-                </a:solidFill>
-              </a:defRPr>
-            </a:pPr>
-            <a:r>
-              <a:t>• Algorithm: HistGradientBoosting Regressor   |   Primary Verified Benchmark: RMSE: 1.48 / 10   |   Cross-validated on authentic cohorts</a:t>
+              <a:t>Biochemical Deficiency Mapping</a:t>
+            </a:r>
+          </a:p>
+          <a:p>
+            <a:pPr>
+              <a:spcAft>
+                <a:spcPts val="300"/>
+              </a:spcAft>
+              <a:defRPr sz="1050">
+                <a:solidFill>
+                  <a:srgbClr val="F8FAFC"/>
+                </a:solidFill>
+              </a:defRPr>
+            </a:pPr>
+            <a:r>
+              <a:t>• Connects brain fog, muscle twitches, and afternoon crashes to biological cofactors.</a:t>
+            </a:r>
+          </a:p>
+          <a:p>
+            <a:pPr>
+              <a:spcAft>
+                <a:spcPts val="300"/>
+              </a:spcAft>
+              <a:defRPr sz="1050">
+                <a:solidFill>
+                  <a:srgbClr val="F8FAFC"/>
+                </a:solidFill>
+              </a:defRPr>
+            </a:pPr>
+            <a:r>
+              <a:t>• Maps Magnesium, Potassium, B12, D3, and Ferritin to bioavailable whole-food sources.</a:t>
+            </a:r>
+          </a:p>
+          <a:p>
+            <a:pPr>
+              <a:spcAft>
+                <a:spcPts val="300"/>
+              </a:spcAft>
+              <a:defRPr sz="1050">
+                <a:solidFill>
+                  <a:srgbClr val="F8FAFC"/>
+                </a:solidFill>
+              </a:defRPr>
+            </a:pPr>
+            <a:r>
+              <a:t>• Highlights synergy (Vit C + Iron) and absorption inhibitors (tannins, phytates).</a:t>
             </a:r>
           </a:p>
         </p:txBody>
@@ -9343,7 +7980,7 @@
     <p:bg>
       <p:bgPr>
         <a:solidFill>
-          <a:srgbClr val="0F172A"/>
+          <a:srgbClr val="0A101D"/>
         </a:solidFill>
         <a:effectLst/>
       </p:bgPr>
@@ -9363,8 +8000,8 @@
         </p:nvSpPr>
         <p:spPr>
           <a:xfrm>
-            <a:off x="731520" y="365760"/>
-            <a:ext cx="10515600" cy="365760"/>
+            <a:off x="731520" y="320040"/>
+            <a:ext cx="10698480" cy="320040"/>
           </a:xfrm>
           <a:prstGeom prst="rect">
             <a:avLst/>
@@ -9385,7 +8022,7 @@
               </a:defRPr>
             </a:pPr>
             <a:r>
-              <a:t>IBM SKILLSBUILD MASTERCLASS 5 • UN SDG 3 (TARGET 3.4)</a:t>
+              <a:t>PRODUCT SHOWCASE • SAFETY TRIAGE &amp; CLINICAL CONTINUITY</a:t>
             </a:r>
           </a:p>
         </p:txBody>
@@ -9398,8 +8035,8 @@
         </p:nvSpPr>
         <p:spPr>
           <a:xfrm>
-            <a:off x="731520" y="640080"/>
-            <a:ext cx="10515600" cy="640080"/>
+            <a:off x="731520" y="594360"/>
+            <a:ext cx="10698480" cy="640080"/>
           </a:xfrm>
           <a:prstGeom prst="rect">
             <a:avLst/>
@@ -9413,14 +8050,14 @@
           <a:lstStyle/>
           <a:p>
             <a:pPr>
-              <a:defRPr sz="2400" b="1">
-                <a:solidFill>
-                  <a:srgbClr val="F8FAFC"/>
-                </a:solidFill>
-              </a:defRPr>
-            </a:pPr>
-            <a:r>
-              <a:t>Clinical Safety: Deterministic 3-Tier Red-Flag Triage Engine</a:t>
+              <a:defRPr sz="2200" b="1">
+                <a:solidFill>
+                  <a:srgbClr val="F8FAFC"/>
+                </a:solidFill>
+              </a:defRPr>
+            </a:pPr>
+            <a:r>
+              <a:t>60s Panic De-escalator &amp; 1-Page Doctor Briefing Export</a:t>
             </a:r>
           </a:p>
         </p:txBody>
@@ -9433,18 +8070,18 @@
         </p:nvSpPr>
         <p:spPr>
           <a:xfrm>
-            <a:off x="731520" y="1645920"/>
-            <a:ext cx="3291840" cy="4572000"/>
+            <a:off x="731520" y="1371600"/>
+            <a:ext cx="5212080" cy="3291840"/>
           </a:xfrm>
           <a:prstGeom prst="roundRect">
             <a:avLst/>
           </a:prstGeom>
           <a:solidFill>
-            <a:srgbClr val="1E293B"/>
+            <a:srgbClr val="131C31"/>
           </a:solidFill>
-          <a:ln w="12700">
+          <a:ln w="19050">
             <a:solidFill>
-              <a:srgbClr val="334155"/>
+              <a:srgbClr val="243352"/>
             </a:solidFill>
           </a:ln>
         </p:spPr>
@@ -9463,109 +8100,66 @@
           </a:fontRef>
         </p:style>
         <p:txBody>
-          <a:bodyPr rtlCol="0" anchor="ctr" wrap="square" lIns="182880" rIns="182880" tIns="182880" bIns="182880"/>
+          <a:bodyPr rtlCol="0" anchor="ctr" lIns="137160" tIns="73152"/>
           <a:lstStyle/>
           <a:p>
             <a:pPr algn="ctr">
-              <a:spcAft>
-                <a:spcPts val="800"/>
-              </a:spcAft>
-              <a:defRPr sz="1400" b="1">
-                <a:solidFill>
-                  <a:srgbClr val="10B981"/>
-                </a:solidFill>
-              </a:defRPr>
-            </a:pPr>
-            <a:r>
-              <a:t>🟢 LEVEL 1: GREEN</a:t>
-            </a:r>
-            <a:br/>
-            <a:r>
-              <a:t>Lifestyle Optimization</a:t>
-            </a:r>
-          </a:p>
-          <a:p>
-            <a:pPr>
-              <a:spcAft>
-                <a:spcPts val="400"/>
-              </a:spcAft>
-              <a:defRPr sz="1100">
-                <a:solidFill>
-                  <a:srgbClr val="F8FAFC"/>
-                </a:solidFill>
-              </a:defRPr>
-            </a:pPr>
-            <a:r>
-              <a:t>• Criteria: Resting vitals and habits within manageable bounds (BP &lt; 130/80 mmHg, HR &lt; 100 BPM).</a:t>
-            </a:r>
-          </a:p>
-          <a:p>
-            <a:pPr>
-              <a:spcAft>
-                <a:spcPts val="400"/>
-              </a:spcAft>
-              <a:defRPr sz="1100">
-                <a:solidFill>
-                  <a:srgbClr val="F8FAFC"/>
-                </a:solidFill>
-              </a:defRPr>
-            </a:pPr>
-            <a:r>
-              <a:t>• Action: Self-directed lifestyle coaching enabled.</a:t>
-            </a:r>
-          </a:p>
-          <a:p>
-            <a:pPr>
-              <a:spcAft>
-                <a:spcPts val="400"/>
-              </a:spcAft>
-              <a:defRPr sz="1100">
-                <a:solidFill>
-                  <a:srgbClr val="F8FAFC"/>
-                </a:solidFill>
-              </a:defRPr>
-            </a:pPr>
-            <a:r>
-              <a:t>• Focus: Optimizing sleep hygiene, macro partitioning, hydration, and caffeine curfews.</a:t>
-            </a:r>
-          </a:p>
-          <a:p>
-            <a:pPr>
-              <a:spcAft>
-                <a:spcPts val="400"/>
-              </a:spcAft>
-              <a:defRPr sz="1100">
-                <a:solidFill>
-                  <a:srgbClr val="F8FAFC"/>
-                </a:solidFill>
-              </a:defRPr>
-            </a:pPr>
-            <a:r>
-              <a:t>• Status: Reassuring green status banner active across all views.</a:t>
-            </a:r>
-          </a:p>
-        </p:txBody>
-      </p:sp>
-      <p:sp>
-        <p:nvSpPr>
-          <p:cNvPr id="5" name="Rounded Rectangle 4"/>
+              <a:defRPr sz="950" b="1">
+                <a:solidFill>
+                  <a:srgbClr val="38BDF8"/>
+                </a:solidFill>
+              </a:defRPr>
+            </a:pPr>
+            <a:r>
+              <a:t>🖥️ 60-SECOND 'AM I OKAY?' DE-ESCALATOR</a:t>
+            </a:r>
+          </a:p>
+        </p:txBody>
+      </p:sp>
+      <p:pic>
+        <p:nvPicPr>
+          <p:cNvPr id="5" name="Picture 4" descr="anxiety_deescalator.png"/>
+          <p:cNvPicPr>
+            <a:picLocks noChangeAspect="1"/>
+          </p:cNvPicPr>
+          <p:nvPr/>
+        </p:nvPicPr>
+        <p:blipFill>
+          <a:blip r:embed="rId2"/>
+          <a:stretch>
+            <a:fillRect/>
+          </a:stretch>
+        </p:blipFill>
+        <p:spPr>
+          <a:xfrm>
+            <a:off x="841248" y="1691640"/>
+            <a:ext cx="4992624" cy="2862072"/>
+          </a:xfrm>
+          <a:prstGeom prst="rect">
+            <a:avLst/>
+          </a:prstGeom>
+        </p:spPr>
+      </p:pic>
+      <p:sp>
+        <p:nvSpPr>
+          <p:cNvPr id="6" name="Rounded Rectangle 5"/>
           <p:cNvSpPr/>
           <p:nvPr/>
         </p:nvSpPr>
         <p:spPr>
           <a:xfrm>
-            <a:off x="4389120" y="1645920"/>
-            <a:ext cx="3291840" cy="4572000"/>
+            <a:off x="6217920" y="1371600"/>
+            <a:ext cx="5212080" cy="3291840"/>
           </a:xfrm>
           <a:prstGeom prst="roundRect">
             <a:avLst/>
           </a:prstGeom>
           <a:solidFill>
-            <a:srgbClr val="1E293B"/>
+            <a:srgbClr val="131C31"/>
           </a:solidFill>
-          <a:ln w="12700">
+          <a:ln w="19050">
             <a:solidFill>
-              <a:srgbClr val="334155"/>
+              <a:srgbClr val="243352"/>
             </a:solidFill>
           </a:ln>
         </p:spPr>
@@ -9584,109 +8178,66 @@
           </a:fontRef>
         </p:style>
         <p:txBody>
-          <a:bodyPr rtlCol="0" anchor="ctr" wrap="square" lIns="182880" rIns="182880" tIns="182880" bIns="182880"/>
+          <a:bodyPr rtlCol="0" anchor="ctr" lIns="137160" tIns="73152"/>
           <a:lstStyle/>
           <a:p>
             <a:pPr algn="ctr">
-              <a:spcAft>
-                <a:spcPts val="800"/>
-              </a:spcAft>
-              <a:defRPr sz="1400" b="1">
-                <a:solidFill>
-                  <a:srgbClr val="F59E0B"/>
-                </a:solidFill>
-              </a:defRPr>
-            </a:pPr>
-            <a:r>
-              <a:t>🟡 LEVEL 2: YELLOW</a:t>
-            </a:r>
-            <a:br/>
-            <a:r>
-              <a:t>Clinical Review Recommended</a:t>
-            </a:r>
-          </a:p>
-          <a:p>
-            <a:pPr>
-              <a:spcAft>
-                <a:spcPts val="400"/>
-              </a:spcAft>
-              <a:defRPr sz="1100">
-                <a:solidFill>
-                  <a:srgbClr val="F8FAFC"/>
-                </a:solidFill>
-              </a:defRPr>
-            </a:pPr>
-            <a:r>
-              <a:t>• Criteria: Stage 1/2 Hypertension confirmed (140/90 &lt;= BP &lt; 180/120), elevated pre-diabetes risk, or suspected Sleep Apnea.</a:t>
-            </a:r>
-          </a:p>
-          <a:p>
-            <a:pPr>
-              <a:spcAft>
-                <a:spcPts val="400"/>
-              </a:spcAft>
-              <a:defRPr sz="1100">
-                <a:solidFill>
-                  <a:srgbClr val="F8FAFC"/>
-                </a:solidFill>
-              </a:defRPr>
-            </a:pPr>
-            <a:r>
-              <a:t>• Action: Lifestyle advice displayed alongside clear, professional PCP recommendation banner.</a:t>
-            </a:r>
-          </a:p>
-          <a:p>
-            <a:pPr>
-              <a:spcAft>
-                <a:spcPts val="400"/>
-              </a:spcAft>
-              <a:defRPr sz="1100">
-                <a:solidFill>
-                  <a:srgbClr val="F8FAFC"/>
-                </a:solidFill>
-              </a:defRPr>
-            </a:pPr>
-            <a:r>
-              <a:t>• Focus: Behavioral risk mitigation + scheduling a routine primary care visit.</a:t>
-            </a:r>
-          </a:p>
-          <a:p>
-            <a:pPr>
-              <a:spcAft>
-                <a:spcPts val="400"/>
-              </a:spcAft>
-              <a:defRPr sz="1100">
-                <a:solidFill>
-                  <a:srgbClr val="F8FAFC"/>
-                </a:solidFill>
-              </a:defRPr>
-            </a:pPr>
-            <a:r>
-              <a:t>• Status: Prompts export of Doctor Visit Briefing.</a:t>
-            </a:r>
-          </a:p>
-        </p:txBody>
-      </p:sp>
-      <p:sp>
-        <p:nvSpPr>
-          <p:cNvPr id="6" name="Rounded Rectangle 5"/>
+              <a:defRPr sz="950" b="1">
+                <a:solidFill>
+                  <a:srgbClr val="38BDF8"/>
+                </a:solidFill>
+              </a:defRPr>
+            </a:pPr>
+            <a:r>
+              <a:t>🖥️ STANDARDIZED 1-PAGE DOCTOR BRIEFING</a:t>
+            </a:r>
+          </a:p>
+        </p:txBody>
+      </p:sp>
+      <p:pic>
+        <p:nvPicPr>
+          <p:cNvPr id="7" name="Picture 6" descr="doctor_briefing.png"/>
+          <p:cNvPicPr>
+            <a:picLocks noChangeAspect="1"/>
+          </p:cNvPicPr>
+          <p:nvPr/>
+        </p:nvPicPr>
+        <p:blipFill>
+          <a:blip r:embed="rId3"/>
+          <a:stretch>
+            <a:fillRect/>
+          </a:stretch>
+        </p:blipFill>
+        <p:spPr>
+          <a:xfrm>
+            <a:off x="6327648" y="1691640"/>
+            <a:ext cx="4992624" cy="2862072"/>
+          </a:xfrm>
+          <a:prstGeom prst="rect">
+            <a:avLst/>
+          </a:prstGeom>
+        </p:spPr>
+      </p:pic>
+      <p:sp>
+        <p:nvSpPr>
+          <p:cNvPr id="8" name="Rounded Rectangle 7"/>
           <p:cNvSpPr/>
           <p:nvPr/>
         </p:nvSpPr>
         <p:spPr>
           <a:xfrm>
-            <a:off x="8046720" y="1645920"/>
-            <a:ext cx="3291840" cy="4572000"/>
+            <a:off x="731520" y="4800600"/>
+            <a:ext cx="5212080" cy="1417320"/>
           </a:xfrm>
           <a:prstGeom prst="roundRect">
             <a:avLst/>
           </a:prstGeom>
           <a:solidFill>
-            <a:srgbClr val="1E293B"/>
+            <a:srgbClr val="131C31"/>
           </a:solidFill>
-          <a:ln w="12700">
+          <a:ln w="15240">
             <a:solidFill>
-              <a:srgbClr val="334155"/>
+              <a:srgbClr val="243352"/>
             </a:solidFill>
           </a:ln>
         </p:spPr>
@@ -9705,85 +8256,168 @@
           </a:fontRef>
         </p:style>
         <p:txBody>
-          <a:bodyPr rtlCol="0" anchor="ctr" wrap="square" lIns="182880" rIns="182880" tIns="182880" bIns="182880"/>
+          <a:bodyPr rtlCol="0" anchor="ctr" wrap="square" lIns="164592" rIns="164592" tIns="146304" bIns="146304"/>
           <a:lstStyle/>
           <a:p>
             <a:pPr algn="ctr">
               <a:spcAft>
-                <a:spcPts val="800"/>
-              </a:spcAft>
-              <a:defRPr sz="1400" b="1">
+                <a:spcPts val="600"/>
+              </a:spcAft>
+              <a:defRPr sz="1300" b="1">
+                <a:solidFill>
+                  <a:srgbClr val="F59E0B"/>
+                </a:solidFill>
+              </a:defRPr>
+            </a:pPr>
+            <a:r>
+              <a:t>Biological Reassurance &amp; Scale Mechanics</a:t>
+            </a:r>
+          </a:p>
+          <a:p>
+            <a:pPr>
+              <a:spcAft>
+                <a:spcPts val="300"/>
+              </a:spcAft>
+              <a:defRPr sz="1050">
+                <a:solidFill>
+                  <a:srgbClr val="F8FAFC"/>
+                </a:solidFill>
+              </a:defRPr>
+            </a:pPr>
+            <a:r>
+              <a:t>• 60-Second De-escalator explains twitches as fatigue/electrolyte shifts.</a:t>
+            </a:r>
+          </a:p>
+          <a:p>
+            <a:pPr>
+              <a:spcAft>
+                <a:spcPts val="300"/>
+              </a:spcAft>
+              <a:defRPr sz="1050">
+                <a:solidFill>
+                  <a:srgbClr val="F8FAFC"/>
+                </a:solidFill>
+              </a:defRPr>
+            </a:pPr>
+            <a:r>
+              <a:t>• Demystifies 1.5kg overnight scale jumps: 3-4g water bound per gram of glycogen.</a:t>
+            </a:r>
+          </a:p>
+          <a:p>
+            <a:pPr>
+              <a:spcAft>
+                <a:spcPts val="300"/>
+              </a:spcAft>
+              <a:defRPr sz="1050">
+                <a:solidFill>
+                  <a:srgbClr val="F8FAFC"/>
+                </a:solidFill>
+              </a:defRPr>
+            </a:pPr>
+            <a:r>
+              <a:t>• Dismantles the acute cyberchondria loop before users rush to the emergency room.</a:t>
+            </a:r>
+          </a:p>
+        </p:txBody>
+      </p:sp>
+      <p:sp>
+        <p:nvSpPr>
+          <p:cNvPr id="9" name="Rounded Rectangle 8"/>
+          <p:cNvSpPr/>
+          <p:nvPr/>
+        </p:nvSpPr>
+        <p:spPr>
+          <a:xfrm>
+            <a:off x="6217920" y="4800600"/>
+            <a:ext cx="5212080" cy="1417320"/>
+          </a:xfrm>
+          <a:prstGeom prst="roundRect">
+            <a:avLst/>
+          </a:prstGeom>
+          <a:solidFill>
+            <a:srgbClr val="131C31"/>
+          </a:solidFill>
+          <a:ln w="15240">
+            <a:solidFill>
+              <a:srgbClr val="243352"/>
+            </a:solidFill>
+          </a:ln>
+        </p:spPr>
+        <p:style>
+          <a:lnRef idx="1">
+            <a:schemeClr val="accent1"/>
+          </a:lnRef>
+          <a:fillRef idx="3">
+            <a:schemeClr val="accent1"/>
+          </a:fillRef>
+          <a:effectRef idx="2">
+            <a:schemeClr val="accent1"/>
+          </a:effectRef>
+          <a:fontRef idx="minor">
+            <a:schemeClr val="lt1"/>
+          </a:fontRef>
+        </p:style>
+        <p:txBody>
+          <a:bodyPr rtlCol="0" anchor="ctr" wrap="square" lIns="164592" rIns="164592" tIns="146304" bIns="146304"/>
+          <a:lstStyle/>
+          <a:p>
+            <a:pPr algn="ctr">
+              <a:spcAft>
+                <a:spcPts val="600"/>
+              </a:spcAft>
+              <a:defRPr sz="1300" b="1">
                 <a:solidFill>
                   <a:srgbClr val="EF4444"/>
                 </a:solidFill>
               </a:defRPr>
             </a:pPr>
             <a:r>
-              <a:t>🔴 LEVEL 3: RED</a:t>
-            </a:r>
-            <a:br/>
-            <a:r>
-              <a:t>EMERGENCY OVERRIDE</a:t>
-            </a:r>
-          </a:p>
-          <a:p>
-            <a:pPr>
-              <a:spcAft>
-                <a:spcPts val="400"/>
-              </a:spcAft>
-              <a:defRPr sz="1100">
-                <a:solidFill>
-                  <a:srgbClr val="F8FAFC"/>
-                </a:solidFill>
-              </a:defRPr>
-            </a:pPr>
-            <a:r>
-              <a:t>• Criteria: Hypertensive crisis (Systolic &gt;= 180 or Diastolic &gt;= 120), acute chest pain, shortness of breath, sudden numbness.</a:t>
-            </a:r>
-          </a:p>
-          <a:p>
-            <a:pPr>
-              <a:spcAft>
-                <a:spcPts val="400"/>
-              </a:spcAft>
-              <a:defRPr sz="1100">
-                <a:solidFill>
-                  <a:srgbClr val="F8FAFC"/>
-                </a:solidFill>
-              </a:defRPr>
-            </a:pPr>
-            <a:r>
-              <a:t>• Action: IMMEDIATE INTERFACE LOCKOUT.</a:t>
-            </a:r>
-          </a:p>
-          <a:p>
-            <a:pPr>
-              <a:spcAft>
-                <a:spcPts val="400"/>
-              </a:spcAft>
-              <a:defRPr sz="1100">
-                <a:solidFill>
-                  <a:srgbClr val="F8FAFC"/>
-                </a:solidFill>
-              </a:defRPr>
-            </a:pPr>
-            <a:r>
-              <a:t>• All lifestyle and dietary advice is suppressed.</a:t>
-            </a:r>
-          </a:p>
-          <a:p>
-            <a:pPr>
-              <a:spcAft>
-                <a:spcPts val="400"/>
-              </a:spcAft>
-              <a:defRPr sz="1100">
-                <a:solidFill>
-                  <a:srgbClr val="F8FAFC"/>
-                </a:solidFill>
-              </a:defRPr>
-            </a:pPr>
-            <a:r>
-              <a:t>• Displays full-screen red emergency modal directing user to call 911 / 112 immediately.</a:t>
+              <a:t>Deterministic 3-Tier Clinical Safety Triage</a:t>
+            </a:r>
+          </a:p>
+          <a:p>
+            <a:pPr>
+              <a:spcAft>
+                <a:spcPts val="300"/>
+              </a:spcAft>
+              <a:defRPr sz="1050">
+                <a:solidFill>
+                  <a:srgbClr val="F8FAFC"/>
+                </a:solidFill>
+              </a:defRPr>
+            </a:pPr>
+            <a:r>
+              <a:t>• 🟢 Level 1 Green: Self-directed wellness coaching enabled.</a:t>
+            </a:r>
+          </a:p>
+          <a:p>
+            <a:pPr>
+              <a:spcAft>
+                <a:spcPts val="300"/>
+              </a:spcAft>
+              <a:defRPr sz="1050">
+                <a:solidFill>
+                  <a:srgbClr val="F8FAFC"/>
+                </a:solidFill>
+              </a:defRPr>
+            </a:pPr>
+            <a:r>
+              <a:t>• 🟡 Level 2 Yellow: Routine clinical checkup recommended (Stage 1/2 Hypertension).</a:t>
+            </a:r>
+          </a:p>
+          <a:p>
+            <a:pPr>
+              <a:spcAft>
+                <a:spcPts val="300"/>
+              </a:spcAft>
+              <a:defRPr sz="1050">
+                <a:solidFill>
+                  <a:srgbClr val="F8FAFC"/>
+                </a:solidFill>
+              </a:defRPr>
+            </a:pPr>
+            <a:r>
+              <a:t>• 🔴 Level 3 Red: Emergency lockout for BP &gt;= 180/120 or acute chest pain (calls 911/112).</a:t>
             </a:r>
           </a:p>
         </p:txBody>
@@ -9802,7 +8436,7 @@
     <p:bg>
       <p:bgPr>
         <a:solidFill>
-          <a:srgbClr val="0F172A"/>
+          <a:srgbClr val="0A101D"/>
         </a:solidFill>
         <a:effectLst/>
       </p:bgPr>
@@ -9822,8 +8456,8 @@
         </p:nvSpPr>
         <p:spPr>
           <a:xfrm>
-            <a:off x="731520" y="365760"/>
-            <a:ext cx="10515600" cy="365760"/>
+            <a:off x="731520" y="320040"/>
+            <a:ext cx="10698480" cy="320040"/>
           </a:xfrm>
           <a:prstGeom prst="rect">
             <a:avLst/>
@@ -9844,7 +8478,7 @@
               </a:defRPr>
             </a:pPr>
             <a:r>
-              <a:t>IBM SKILLSBUILD MASTERCLASS 5 • UN SDG 3 (TARGET 3.4)</a:t>
+              <a:t>SCIENTIFIC VALIDATION &amp; ML BENCHMARKS</a:t>
             </a:r>
           </a:p>
         </p:txBody>
@@ -9857,8 +8491,8 @@
         </p:nvSpPr>
         <p:spPr>
           <a:xfrm>
-            <a:off x="731520" y="640080"/>
-            <a:ext cx="10515600" cy="640080"/>
+            <a:off x="731520" y="594360"/>
+            <a:ext cx="10698480" cy="640080"/>
           </a:xfrm>
           <a:prstGeom prst="rect">
             <a:avLst/>
@@ -9872,14 +8506,14 @@
           <a:lstStyle/>
           <a:p>
             <a:pPr>
-              <a:defRPr sz="2400" b="1">
-                <a:solidFill>
-                  <a:srgbClr val="F8FAFC"/>
-                </a:solidFill>
-              </a:defRPr>
-            </a:pPr>
-            <a:r>
-              <a:t>Local-First Privacy: 100% Offline GPU Compute via Ollama</a:t>
+              <a:defRPr sz="2200" b="1">
+                <a:solidFill>
+                  <a:srgbClr val="F8FAFC"/>
+                </a:solidFill>
+              </a:defRPr>
+            </a:pPr>
+            <a:r>
+              <a:t>5 Supervised Models Trained on 500,000+ CDC Records</a:t>
             </a:r>
           </a:p>
         </p:txBody>
@@ -9892,18 +8526,18 @@
         </p:nvSpPr>
         <p:spPr>
           <a:xfrm>
-            <a:off x="731520" y="1645920"/>
-            <a:ext cx="5120640" cy="2194560"/>
+            <a:off x="731520" y="1371600"/>
+            <a:ext cx="10698480" cy="777240"/>
           </a:xfrm>
           <a:prstGeom prst="roundRect">
             <a:avLst/>
           </a:prstGeom>
           <a:solidFill>
-            <a:srgbClr val="1E293B"/>
+            <a:srgbClr val="131C31"/>
           </a:solidFill>
-          <a:ln w="12700">
+          <a:ln w="15240">
             <a:solidFill>
-              <a:srgbClr val="334155"/>
+              <a:srgbClr val="243352"/>
             </a:solidFill>
           </a:ln>
         </p:spPr>
@@ -9922,81 +8556,36 @@
           </a:fontRef>
         </p:style>
         <p:txBody>
-          <a:bodyPr rtlCol="0" anchor="ctr" wrap="square" lIns="182880" rIns="182880" tIns="182880" bIns="182880"/>
+          <a:bodyPr rtlCol="0" anchor="ctr" wrap="square" lIns="164592" rIns="164592" tIns="146304" bIns="146304"/>
           <a:lstStyle/>
           <a:p>
             <a:pPr algn="ctr">
               <a:spcAft>
-                <a:spcPts val="800"/>
-              </a:spcAft>
-              <a:defRPr sz="1400" b="1">
-                <a:solidFill>
-                  <a:srgbClr val="38BDF8"/>
-                </a:solidFill>
-              </a:defRPr>
-            </a:pPr>
-            <a:r>
-              <a:t>🔒 Zero Cloud Leakage</a:t>
-            </a:r>
-          </a:p>
-          <a:p>
-            <a:pPr>
-              <a:spcAft>
-                <a:spcPts val="400"/>
-              </a:spcAft>
-              <a:defRPr sz="1100">
-                <a:solidFill>
-                  <a:srgbClr val="F8FAFC"/>
-                </a:solidFill>
-              </a:defRPr>
-            </a:pPr>
-            <a:r>
-              <a:t>• Biometrics, sleep logs, and symptoms stay 100% on localhost.</a:t>
-            </a:r>
-          </a:p>
-          <a:p>
-            <a:pPr>
-              <a:spcAft>
-                <a:spcPts val="400"/>
-              </a:spcAft>
-              <a:defRPr sz="1100">
-                <a:solidFill>
-                  <a:srgbClr val="F8FAFC"/>
-                </a:solidFill>
-              </a:defRPr>
-            </a:pPr>
-            <a:r>
-              <a:t>• Zero external HTTP calls; zero third-party analytics or pixels.</a:t>
-            </a:r>
-          </a:p>
-          <a:p>
-            <a:pPr>
-              <a:spcAft>
-                <a:spcPts val="400"/>
-              </a:spcAft>
-              <a:defRPr sz="1100">
-                <a:solidFill>
-                  <a:srgbClr val="F8FAFC"/>
-                </a:solidFill>
-              </a:defRPr>
-            </a:pPr>
-            <a:r>
-              <a:t>• Eliminates cloud data broker tracking and HIPAA liabilities.</a:t>
-            </a:r>
-          </a:p>
-          <a:p>
-            <a:pPr>
-              <a:spcAft>
-                <a:spcPts val="400"/>
-              </a:spcAft>
-              <a:defRPr sz="1100">
-                <a:solidFill>
-                  <a:srgbClr val="F8FAFC"/>
-                </a:solidFill>
-              </a:defRPr>
-            </a:pPr>
-            <a:r>
-              <a:t>• Completely immune to cloud server outages or data breaches.</a:t>
+                <a:spcPts val="600"/>
+              </a:spcAft>
+              <a:defRPr sz="1300" b="1">
+                <a:solidFill>
+                  <a:srgbClr val="10B981"/>
+                </a:solidFill>
+              </a:defRPr>
+            </a:pPr>
+            <a:r>
+              <a:t>1. 10-Yr Cardiovascular Risk  •  319,795 rows (CDC BRFSS 2020)</a:t>
+            </a:r>
+          </a:p>
+          <a:p>
+            <a:pPr>
+              <a:spcAft>
+                <a:spcPts val="300"/>
+              </a:spcAft>
+              <a:defRPr sz="1050">
+                <a:solidFill>
+                  <a:srgbClr val="F8FAFC"/>
+                </a:solidFill>
+              </a:defRPr>
+            </a:pPr>
+            <a:r>
+              <a:t>• Algorithm: Balanced Logistic Regression   |   Primary Verified Benchmark: ROC-AUC: 0.817   |   Cross-validated on authentic cohorts</a:t>
             </a:r>
           </a:p>
         </p:txBody>
@@ -10009,18 +8598,18 @@
         </p:nvSpPr>
         <p:spPr>
           <a:xfrm>
-            <a:off x="6217920" y="1645920"/>
-            <a:ext cx="5120640" cy="2194560"/>
+            <a:off x="731520" y="2240280"/>
+            <a:ext cx="10698480" cy="777240"/>
           </a:xfrm>
           <a:prstGeom prst="roundRect">
             <a:avLst/>
           </a:prstGeom>
           <a:solidFill>
-            <a:srgbClr val="1E293B"/>
+            <a:srgbClr val="131C31"/>
           </a:solidFill>
-          <a:ln w="12700">
+          <a:ln w="15240">
             <a:solidFill>
-              <a:srgbClr val="334155"/>
+              <a:srgbClr val="243352"/>
             </a:solidFill>
           </a:ln>
         </p:spPr>
@@ -10039,81 +8628,36 @@
           </a:fontRef>
         </p:style>
         <p:txBody>
-          <a:bodyPr rtlCol="0" anchor="ctr" wrap="square" lIns="182880" rIns="182880" tIns="182880" bIns="182880"/>
+          <a:bodyPr rtlCol="0" anchor="ctr" wrap="square" lIns="164592" rIns="164592" tIns="146304" bIns="146304"/>
           <a:lstStyle/>
           <a:p>
             <a:pPr algn="ctr">
               <a:spcAft>
-                <a:spcPts val="800"/>
-              </a:spcAft>
-              <a:defRPr sz="1400" b="1">
-                <a:solidFill>
-                  <a:srgbClr val="10B981"/>
-                </a:solidFill>
-              </a:defRPr>
-            </a:pPr>
-            <a:r>
-              <a:t>⚡ Local GPU Acceleration</a:t>
-            </a:r>
-          </a:p>
-          <a:p>
-            <a:pPr>
-              <a:spcAft>
-                <a:spcPts val="400"/>
-              </a:spcAft>
-              <a:defRPr sz="1100">
-                <a:solidFill>
-                  <a:srgbClr val="F8FAFC"/>
-                </a:solidFill>
-              </a:defRPr>
-            </a:pPr>
-            <a:r>
-              <a:t>• Ollama hosts Qwen 3.5 (0.8B) locally on the user's GPU.</a:t>
-            </a:r>
-          </a:p>
-          <a:p>
-            <a:pPr>
-              <a:spcAft>
-                <a:spcPts val="400"/>
-              </a:spcAft>
-              <a:defRPr sz="1100">
-                <a:solidFill>
-                  <a:srgbClr val="F8FAFC"/>
-                </a:solidFill>
-              </a:defRPr>
-            </a:pPr>
-            <a:r>
-              <a:t>• Token generation speed exceeds 45 tokens/second locally.</a:t>
-            </a:r>
-          </a:p>
-          <a:p>
-            <a:pPr>
-              <a:spcAft>
-                <a:spcPts val="400"/>
-              </a:spcAft>
-              <a:defRPr sz="1100">
-                <a:solidFill>
-                  <a:srgbClr val="F8FAFC"/>
-                </a:solidFill>
-              </a:defRPr>
-            </a:pPr>
-            <a:r>
-              <a:t>• Sub-30ms API response time on FastAPI backend.</a:t>
-            </a:r>
-          </a:p>
-          <a:p>
-            <a:pPr>
-              <a:spcAft>
-                <a:spcPts val="400"/>
-              </a:spcAft>
-              <a:defRPr sz="1100">
-                <a:solidFill>
-                  <a:srgbClr val="F8FAFC"/>
-                </a:solidFill>
-              </a:defRPr>
-            </a:pPr>
-            <a:r>
-              <a:t>• Offline failover template ensures zero downtime if Ollama is paused.</a:t>
+                <a:spcPts val="600"/>
+              </a:spcAft>
+              <a:defRPr sz="1300" b="1">
+                <a:solidFill>
+                  <a:srgbClr val="38BDF8"/>
+                </a:solidFill>
+              </a:defRPr>
+            </a:pPr>
+            <a:r>
+              <a:t>2. Pre-Diabetes Screener  •  70,692 rows (CDC BRFSS 50/50)</a:t>
+            </a:r>
+          </a:p>
+          <a:p>
+            <a:pPr>
+              <a:spcAft>
+                <a:spcPts val="300"/>
+              </a:spcAft>
+              <a:defRPr sz="1050">
+                <a:solidFill>
+                  <a:srgbClr val="F8FAFC"/>
+                </a:solidFill>
+              </a:defRPr>
+            </a:pPr>
+            <a:r>
+              <a:t>• Algorithm: HistGradientBoosting Classifier   |   Primary Verified Benchmark: ROC-AUC: 0.819   |   Cross-validated on authentic cohorts</a:t>
             </a:r>
           </a:p>
         </p:txBody>
@@ -10126,18 +8670,18 @@
         </p:nvSpPr>
         <p:spPr>
           <a:xfrm>
-            <a:off x="731520" y="4114800"/>
-            <a:ext cx="5120640" cy="2194560"/>
+            <a:off x="731520" y="3108960"/>
+            <a:ext cx="10698480" cy="777240"/>
           </a:xfrm>
           <a:prstGeom prst="roundRect">
             <a:avLst/>
           </a:prstGeom>
           <a:solidFill>
-            <a:srgbClr val="1E293B"/>
+            <a:srgbClr val="131C31"/>
           </a:solidFill>
-          <a:ln w="12700">
+          <a:ln w="15240">
             <a:solidFill>
-              <a:srgbClr val="334155"/>
+              <a:srgbClr val="243352"/>
             </a:solidFill>
           </a:ln>
         </p:spPr>
@@ -10156,81 +8700,36 @@
           </a:fontRef>
         </p:style>
         <p:txBody>
-          <a:bodyPr rtlCol="0" anchor="ctr" wrap="square" lIns="182880" rIns="182880" tIns="182880" bIns="182880"/>
+          <a:bodyPr rtlCol="0" anchor="ctr" wrap="square" lIns="164592" rIns="164592" tIns="146304" bIns="146304"/>
           <a:lstStyle/>
           <a:p>
             <a:pPr algn="ctr">
               <a:spcAft>
-                <a:spcPts val="800"/>
-              </a:spcAft>
-              <a:defRPr sz="1400" b="1">
-                <a:solidFill>
-                  <a:srgbClr val="A855F7"/>
-                </a:solidFill>
-              </a:defRPr>
-            </a:pPr>
-            <a:r>
-              <a:t>🧠 Grounded Payload Ingestion</a:t>
-            </a:r>
-          </a:p>
-          <a:p>
-            <a:pPr>
-              <a:spcAft>
-                <a:spcPts val="400"/>
-              </a:spcAft>
-              <a:defRPr sz="1100">
-                <a:solidFill>
-                  <a:srgbClr val="F8FAFC"/>
-                </a:solidFill>
-              </a:defRPr>
-            </a:pPr>
-            <a:r>
-              <a:t>• LLM acts purely as an empathetic translator of verified truth.</a:t>
-            </a:r>
-          </a:p>
-          <a:p>
-            <a:pPr>
-              <a:spcAft>
-                <a:spcPts val="400"/>
-              </a:spcAft>
-              <a:defRPr sz="1100">
-                <a:solidFill>
-                  <a:srgbClr val="F8FAFC"/>
-                </a:solidFill>
-              </a:defRPr>
-            </a:pPr>
-            <a:r>
-              <a:t>• Receives locked JSON diagnostic payload containing all metrics.</a:t>
-            </a:r>
-          </a:p>
-          <a:p>
-            <a:pPr>
-              <a:spcAft>
-                <a:spcPts val="400"/>
-              </a:spcAft>
-              <a:defRPr sz="1100">
-                <a:solidFill>
-                  <a:srgbClr val="F8FAFC"/>
-                </a:solidFill>
-              </a:defRPr>
-            </a:pPr>
-            <a:r>
-              <a:t>• System prompt forbids inventing numbers or making medical diagnoses.</a:t>
-            </a:r>
-          </a:p>
-          <a:p>
-            <a:pPr>
-              <a:spcAft>
-                <a:spcPts val="400"/>
-              </a:spcAft>
-              <a:defRPr sz="1100">
-                <a:solidFill>
-                  <a:srgbClr val="F8FAFC"/>
-                </a:solidFill>
-              </a:defRPr>
-            </a:pPr>
-            <a:r>
-              <a:t>• Focuses exclusively on Top 3 High-Impact Behavioral Levers.</a:t>
+                <a:spcPts val="600"/>
+              </a:spcAft>
+              <a:defRPr sz="1300" b="1">
+                <a:solidFill>
+                  <a:srgbClr val="F59E0B"/>
+                </a:solidFill>
+              </a:defRPr>
+            </a:pPr>
+            <a:r>
+              <a:t>3. Circadian Latency &amp; Debt  •  8,500 rows (Bedtime Screentime Cohort)</a:t>
+            </a:r>
+          </a:p>
+          <a:p>
+            <a:pPr>
+              <a:spcAft>
+                <a:spcPts val="300"/>
+              </a:spcAft>
+              <a:defRPr sz="1050">
+                <a:solidFill>
+                  <a:srgbClr val="F8FAFC"/>
+                </a:solidFill>
+              </a:defRPr>
+            </a:pPr>
+            <a:r>
+              <a:t>• Algorithm: Multi-Output Regressor &amp; Clf   |   Primary Verified Benchmark: RMSE: 6.84 min   |   Cross-validated on authentic cohorts</a:t>
             </a:r>
           </a:p>
         </p:txBody>
@@ -10243,18 +8742,18 @@
         </p:nvSpPr>
         <p:spPr>
           <a:xfrm>
-            <a:off x="6217920" y="4114800"/>
-            <a:ext cx="5120640" cy="2194560"/>
+            <a:off x="731520" y="3977639"/>
+            <a:ext cx="10698480" cy="777240"/>
           </a:xfrm>
           <a:prstGeom prst="roundRect">
             <a:avLst/>
           </a:prstGeom>
           <a:solidFill>
-            <a:srgbClr val="1E293B"/>
+            <a:srgbClr val="131C31"/>
           </a:solidFill>
-          <a:ln w="12700">
+          <a:ln w="15240">
             <a:solidFill>
-              <a:srgbClr val="334155"/>
+              <a:srgbClr val="243352"/>
             </a:solidFill>
           </a:ln>
         </p:spPr>
@@ -10273,81 +8772,180 @@
           </a:fontRef>
         </p:style>
         <p:txBody>
-          <a:bodyPr rtlCol="0" anchor="ctr" wrap="square" lIns="182880" rIns="182880" tIns="182880" bIns="182880"/>
+          <a:bodyPr rtlCol="0" anchor="ctr" wrap="square" lIns="164592" rIns="164592" tIns="146304" bIns="146304"/>
           <a:lstStyle/>
           <a:p>
             <a:pPr algn="ctr">
               <a:spcAft>
-                <a:spcPts val="800"/>
-              </a:spcAft>
-              <a:defRPr sz="1400" b="1">
-                <a:solidFill>
-                  <a:srgbClr val="F59E0B"/>
-                </a:solidFill>
-              </a:defRPr>
-            </a:pPr>
-            <a:r>
-              <a:t>💰 Zero Inference Cost Advantage</a:t>
-            </a:r>
-          </a:p>
-          <a:p>
-            <a:pPr>
-              <a:spcAft>
-                <a:spcPts val="400"/>
-              </a:spcAft>
-              <a:defRPr sz="1100">
-                <a:solidFill>
-                  <a:srgbClr val="F8FAFC"/>
-                </a:solidFill>
-              </a:defRPr>
-            </a:pPr>
-            <a:r>
-              <a:t>• Cloud LLM APIs cost $0.03 - $0.10 per consultation query.</a:t>
-            </a:r>
-          </a:p>
-          <a:p>
-            <a:pPr>
-              <a:spcAft>
-                <a:spcPts val="400"/>
-              </a:spcAft>
-              <a:defRPr sz="1100">
-                <a:solidFill>
-                  <a:srgbClr val="F8FAFC"/>
-                </a:solidFill>
-              </a:defRPr>
-            </a:pPr>
-            <a:r>
-              <a:t>• VitalSync AI marginal query cost: $0.00 (user's own hardware).</a:t>
-            </a:r>
-          </a:p>
-          <a:p>
-            <a:pPr>
-              <a:spcAft>
-                <a:spcPts val="400"/>
-              </a:spcAft>
-              <a:defRPr sz="1100">
-                <a:solidFill>
-                  <a:srgbClr val="F8FAFC"/>
-                </a:solidFill>
-              </a:defRPr>
-            </a:pPr>
-            <a:r>
-              <a:t>• Enables sustainable open-source and B2B software distribution.</a:t>
-            </a:r>
-          </a:p>
-          <a:p>
-            <a:pPr>
-              <a:spcAft>
-                <a:spcPts val="400"/>
-              </a:spcAft>
-              <a:defRPr sz="1100">
-                <a:solidFill>
-                  <a:srgbClr val="F8FAFC"/>
-                </a:solidFill>
-              </a:defRPr>
-            </a:pPr>
-            <a:r>
-              <a:t>• Gross margin on desktop software licenses exceeds 95%.</a:t>
+                <a:spcPts val="600"/>
+              </a:spcAft>
+              <a:defRPr sz="1300" b="1">
+                <a:solidFill>
+                  <a:srgbClr val="A855F7"/>
+                </a:solidFill>
+              </a:defRPr>
+            </a:pPr>
+            <a:r>
+              <a:t>4. Sleep Pathology Classifier  •  374 rows (Clinical Polysomnography)</a:t>
+            </a:r>
+          </a:p>
+          <a:p>
+            <a:pPr>
+              <a:spcAft>
+                <a:spcPts val="300"/>
+              </a:spcAft>
+              <a:defRPr sz="1050">
+                <a:solidFill>
+                  <a:srgbClr val="F8FAFC"/>
+                </a:solidFill>
+              </a:defRPr>
+            </a:pPr>
+            <a:r>
+              <a:t>• Algorithm: Balanced Random Forest   |   Primary Verified Benchmark: F1-Score: 0.893   |   Cross-validated on authentic cohorts</a:t>
+            </a:r>
+          </a:p>
+        </p:txBody>
+      </p:sp>
+      <p:sp>
+        <p:nvSpPr>
+          <p:cNvPr id="8" name="Rounded Rectangle 7"/>
+          <p:cNvSpPr/>
+          <p:nvPr/>
+        </p:nvSpPr>
+        <p:spPr>
+          <a:xfrm>
+            <a:off x="731520" y="4846320"/>
+            <a:ext cx="10698480" cy="777240"/>
+          </a:xfrm>
+          <a:prstGeom prst="roundRect">
+            <a:avLst/>
+          </a:prstGeom>
+          <a:solidFill>
+            <a:srgbClr val="131C31"/>
+          </a:solidFill>
+          <a:ln w="15240">
+            <a:solidFill>
+              <a:srgbClr val="243352"/>
+            </a:solidFill>
+          </a:ln>
+        </p:spPr>
+        <p:style>
+          <a:lnRef idx="1">
+            <a:schemeClr val="accent1"/>
+          </a:lnRef>
+          <a:fillRef idx="3">
+            <a:schemeClr val="accent1"/>
+          </a:fillRef>
+          <a:effectRef idx="2">
+            <a:schemeClr val="accent1"/>
+          </a:effectRef>
+          <a:fontRef idx="minor">
+            <a:schemeClr val="lt1"/>
+          </a:fontRef>
+        </p:style>
+        <p:txBody>
+          <a:bodyPr rtlCol="0" anchor="ctr" wrap="square" lIns="164592" rIns="164592" tIns="146304" bIns="146304"/>
+          <a:lstStyle/>
+          <a:p>
+            <a:pPr algn="ctr">
+              <a:spcAft>
+                <a:spcPts val="600"/>
+              </a:spcAft>
+              <a:defRPr sz="1300" b="1">
+                <a:solidFill>
+                  <a:srgbClr val="38BDF8"/>
+                </a:solidFill>
+              </a:defRPr>
+            </a:pPr>
+            <a:r>
+              <a:t>5. Digital Burnout Screener  •  100,000 rows (Student Lifestyle Cohort)</a:t>
+            </a:r>
+          </a:p>
+          <a:p>
+            <a:pPr>
+              <a:spcAft>
+                <a:spcPts val="300"/>
+              </a:spcAft>
+              <a:defRPr sz="1050">
+                <a:solidFill>
+                  <a:srgbClr val="F8FAFC"/>
+                </a:solidFill>
+              </a:defRPr>
+            </a:pPr>
+            <a:r>
+              <a:t>• Algorithm: HistGradientBoosting Regressor   |   Primary Verified Benchmark: RMSE: 1.48 / 10   |   Cross-validated on authentic cohorts</a:t>
+            </a:r>
+          </a:p>
+        </p:txBody>
+      </p:sp>
+      <p:sp>
+        <p:nvSpPr>
+          <p:cNvPr id="9" name="Rounded Rectangle 8"/>
+          <p:cNvSpPr/>
+          <p:nvPr/>
+        </p:nvSpPr>
+        <p:spPr>
+          <a:xfrm>
+            <a:off x="731520" y="5806440"/>
+            <a:ext cx="10698480" cy="777240"/>
+          </a:xfrm>
+          <a:prstGeom prst="roundRect">
+            <a:avLst/>
+          </a:prstGeom>
+          <a:solidFill>
+            <a:srgbClr val="131C31"/>
+          </a:solidFill>
+          <a:ln w="15240">
+            <a:solidFill>
+              <a:srgbClr val="38BDF8"/>
+            </a:solidFill>
+          </a:ln>
+        </p:spPr>
+        <p:style>
+          <a:lnRef idx="1">
+            <a:schemeClr val="accent1"/>
+          </a:lnRef>
+          <a:fillRef idx="3">
+            <a:schemeClr val="accent1"/>
+          </a:fillRef>
+          <a:effectRef idx="2">
+            <a:schemeClr val="accent1"/>
+          </a:effectRef>
+          <a:fontRef idx="minor">
+            <a:schemeClr val="lt1"/>
+          </a:fontRef>
+        </p:style>
+        <p:txBody>
+          <a:bodyPr rtlCol="0" anchor="ctr" wrap="square" lIns="164592" rIns="164592" tIns="146304" bIns="146304"/>
+          <a:lstStyle/>
+          <a:p>
+            <a:pPr algn="ctr">
+              <a:spcAft>
+                <a:spcPts val="600"/>
+              </a:spcAft>
+              <a:defRPr sz="1300" b="1">
+                <a:solidFill>
+                  <a:srgbClr val="F8FAFC"/>
+                </a:solidFill>
+              </a:defRPr>
+            </a:pPr>
+            <a:r>
+              <a:t>Local GPU Neural Engine &amp; Test Suite</a:t>
+            </a:r>
+          </a:p>
+          <a:p>
+            <a:pPr>
+              <a:spcAft>
+                <a:spcPts val="300"/>
+              </a:spcAft>
+              <a:defRPr sz="1050">
+                <a:solidFill>
+                  <a:srgbClr val="F8FAFC"/>
+                </a:solidFill>
+              </a:defRPr>
+            </a:pPr>
+            <a:r>
+              <a:t>• 100% Offline GPU compute via Ollama (Qwen 3.5 0.8B)  •  $0.00 marginal query cost  •  24/24 unit tests passing in pytest (3.25s)</a:t>
             </a:r>
           </a:p>
         </p:txBody>
